--- a/宣道詩/(宣道詩244) 在主裏得勝.pptx
+++ b/宣道詩/(宣道詩244) 在主裏得勝.pptx
@@ -5,21 +5,31 @@
     <p:sldMasterId id="2147483660" r:id="rId1"/>
   </p:sldMasterIdLst>
   <p:notesMasterIdLst>
-    <p:notesMasterId r:id="rId11"/>
+    <p:notesMasterId r:id="rId21"/>
   </p:notesMasterIdLst>
   <p:handoutMasterIdLst>
-    <p:handoutMasterId r:id="rId12"/>
+    <p:handoutMasterId r:id="rId22"/>
   </p:handoutMasterIdLst>
   <p:sldIdLst>
-    <p:sldId id="1605" r:id="rId2"/>
-    <p:sldId id="1606" r:id="rId3"/>
-    <p:sldId id="1607" r:id="rId4"/>
-    <p:sldId id="1608" r:id="rId5"/>
-    <p:sldId id="1609" r:id="rId6"/>
-    <p:sldId id="1610" r:id="rId7"/>
-    <p:sldId id="1611" r:id="rId8"/>
-    <p:sldId id="1612" r:id="rId9"/>
-    <p:sldId id="1613" r:id="rId10"/>
+    <p:sldId id="393" r:id="rId2"/>
+    <p:sldId id="412" r:id="rId3"/>
+    <p:sldId id="1614" r:id="rId4"/>
+    <p:sldId id="1615" r:id="rId5"/>
+    <p:sldId id="1616" r:id="rId6"/>
+    <p:sldId id="1617" r:id="rId7"/>
+    <p:sldId id="1618" r:id="rId8"/>
+    <p:sldId id="1619" r:id="rId9"/>
+    <p:sldId id="1620" r:id="rId10"/>
+    <p:sldId id="1623" r:id="rId11"/>
+    <p:sldId id="1624" r:id="rId12"/>
+    <p:sldId id="1625" r:id="rId13"/>
+    <p:sldId id="1626" r:id="rId14"/>
+    <p:sldId id="1621" r:id="rId15"/>
+    <p:sldId id="1622" r:id="rId16"/>
+    <p:sldId id="1627" r:id="rId17"/>
+    <p:sldId id="1628" r:id="rId18"/>
+    <p:sldId id="1629" r:id="rId19"/>
+    <p:sldId id="1630" r:id="rId20"/>
   </p:sldIdLst>
   <p:sldSz cx="12192000" cy="6858000"/>
   <p:notesSz cx="6858000" cy="9144000"/>
@@ -318,6 +328,11 @@
         </p:txBody>
       </p:sp>
     </p:spTree>
+    <p:extLst>
+      <p:ext uri="{BB962C8B-B14F-4D97-AF65-F5344CB8AC3E}">
+        <p14:creationId xmlns:p14="http://schemas.microsoft.com/office/powerpoint/2010/main" val="1"/>
+      </p:ext>
+    </p:extLst>
   </p:cSld>
   <p:clrMap bg1="lt1" tx1="dk1" bg2="lt2" tx2="dk2" accent1="accent1" accent2="accent2" accent3="accent3" accent4="accent4" accent5="accent5" accent6="accent6" hlink="hlink" folHlink="folHlink"/>
 </p:handoutMaster>
@@ -467,38 +482,37 @@
           <a:p>
             <a:pPr lvl="0"/>
             <a:r>
-              <a:rPr lang="zh-TW" altLang="en-US" smtClean="0"/>
+              <a:rPr lang="zh-TW" altLang="en-US"/>
               <a:t>按一下以編輯母片文字樣式</a:t>
             </a:r>
           </a:p>
           <a:p>
             <a:pPr lvl="1"/>
             <a:r>
-              <a:rPr lang="zh-TW" altLang="en-US" smtClean="0"/>
+              <a:rPr lang="zh-TW" altLang="en-US"/>
               <a:t>第二層</a:t>
             </a:r>
           </a:p>
           <a:p>
             <a:pPr lvl="2"/>
             <a:r>
-              <a:rPr lang="zh-TW" altLang="en-US" smtClean="0"/>
+              <a:rPr lang="zh-TW" altLang="en-US"/>
               <a:t>第三層</a:t>
             </a:r>
           </a:p>
           <a:p>
             <a:pPr lvl="3"/>
             <a:r>
-              <a:rPr lang="zh-TW" altLang="en-US" smtClean="0"/>
+              <a:rPr lang="zh-TW" altLang="en-US"/>
               <a:t>第四層</a:t>
             </a:r>
           </a:p>
           <a:p>
             <a:pPr lvl="4"/>
             <a:r>
-              <a:rPr lang="zh-TW" altLang="en-US" smtClean="0"/>
+              <a:rPr lang="zh-TW" altLang="en-US"/>
               <a:t>第五層</a:t>
             </a:r>
-            <a:endParaRPr lang="zh-TW" altLang="en-US"/>
           </a:p>
         </p:txBody>
       </p:sp>
@@ -666,6 +680,1926 @@
 </p:notesMaster>
 </file>
 
+<file path=ppt/notesSlides/notesSlide1.xml><?xml version="1.0" encoding="utf-8"?>
+<p:notes xmlns:a="http://schemas.openxmlformats.org/drawingml/2006/main" xmlns:r="http://schemas.openxmlformats.org/officeDocument/2006/relationships" xmlns:p="http://schemas.openxmlformats.org/presentationml/2006/main">
+  <p:cSld>
+    <p:spTree>
+      <p:nvGrpSpPr>
+        <p:cNvPr id="1" name=""/>
+        <p:cNvGrpSpPr/>
+        <p:nvPr/>
+      </p:nvGrpSpPr>
+      <p:grpSpPr>
+        <a:xfrm>
+          <a:off x="0" y="0"/>
+          <a:ext cx="0" cy="0"/>
+          <a:chOff x="0" y="0"/>
+          <a:chExt cx="0" cy="0"/>
+        </a:xfrm>
+      </p:grpSpPr>
+      <p:sp>
+        <p:nvSpPr>
+          <p:cNvPr id="2" name="Slide Image Placeholder 1"/>
+          <p:cNvSpPr>
+            <a:spLocks noGrp="1" noRot="1" noChangeAspect="1"/>
+          </p:cNvSpPr>
+          <p:nvPr>
+            <p:ph type="sldImg"/>
+          </p:nvPr>
+        </p:nvSpPr>
+        <p:spPr/>
+      </p:sp>
+      <p:sp>
+        <p:nvSpPr>
+          <p:cNvPr id="3" name="Notes Placeholder 2"/>
+          <p:cNvSpPr>
+            <a:spLocks noGrp="1"/>
+          </p:cNvSpPr>
+          <p:nvPr>
+            <p:ph type="body" idx="1"/>
+          </p:nvPr>
+        </p:nvSpPr>
+        <p:spPr/>
+        <p:txBody>
+          <a:bodyPr/>
+          <a:lstStyle/>
+          <a:p>
+            <a:endParaRPr lang="en-US" dirty="0"/>
+          </a:p>
+        </p:txBody>
+      </p:sp>
+      <p:sp>
+        <p:nvSpPr>
+          <p:cNvPr id="4" name="Slide Number Placeholder 3"/>
+          <p:cNvSpPr>
+            <a:spLocks noGrp="1"/>
+          </p:cNvSpPr>
+          <p:nvPr>
+            <p:ph type="sldNum" sz="quarter" idx="5"/>
+          </p:nvPr>
+        </p:nvSpPr>
+        <p:spPr/>
+        <p:txBody>
+          <a:bodyPr/>
+          <a:lstStyle/>
+          <a:p>
+            <a:fld id="{789453B0-9DF3-4847-AF80-E61FDDFE7134}" type="slidenum">
+              <a:rPr lang="zh-TW" altLang="en-US" smtClean="0"/>
+              <a:t>2</a:t>
+            </a:fld>
+            <a:endParaRPr lang="zh-TW" altLang="en-US"/>
+          </a:p>
+        </p:txBody>
+      </p:sp>
+    </p:spTree>
+    <p:extLst>
+      <p:ext uri="{BB962C8B-B14F-4D97-AF65-F5344CB8AC3E}">
+        <p14:creationId xmlns:p14="http://schemas.microsoft.com/office/powerpoint/2010/main" val="2998282263"/>
+      </p:ext>
+    </p:extLst>
+  </p:cSld>
+  <p:clrMapOvr>
+    <a:masterClrMapping/>
+  </p:clrMapOvr>
+</p:notes>
+</file>
+
+<file path=ppt/notesSlides/notesSlide10.xml><?xml version="1.0" encoding="utf-8"?>
+<p:notes xmlns:a="http://schemas.openxmlformats.org/drawingml/2006/main" xmlns:r="http://schemas.openxmlformats.org/officeDocument/2006/relationships" xmlns:p="http://schemas.openxmlformats.org/presentationml/2006/main">
+  <p:cSld>
+    <p:spTree>
+      <p:nvGrpSpPr>
+        <p:cNvPr id="1" name="">
+          <a:extLst>
+            <a:ext uri="{FF2B5EF4-FFF2-40B4-BE49-F238E27FC236}">
+              <a16:creationId xmlns:a16="http://schemas.microsoft.com/office/drawing/2014/main" id="{3DB17A8E-757B-1B36-3230-ED027FD87CC9}"/>
+            </a:ext>
+          </a:extLst>
+        </p:cNvPr>
+        <p:cNvGrpSpPr/>
+        <p:nvPr/>
+      </p:nvGrpSpPr>
+      <p:grpSpPr>
+        <a:xfrm>
+          <a:off x="0" y="0"/>
+          <a:ext cx="0" cy="0"/>
+          <a:chOff x="0" y="0"/>
+          <a:chExt cx="0" cy="0"/>
+        </a:xfrm>
+      </p:grpSpPr>
+      <p:sp>
+        <p:nvSpPr>
+          <p:cNvPr id="2" name="Slide Image Placeholder 1">
+            <a:extLst>
+              <a:ext uri="{FF2B5EF4-FFF2-40B4-BE49-F238E27FC236}">
+                <a16:creationId xmlns:a16="http://schemas.microsoft.com/office/drawing/2014/main" id="{7E981F1A-53D7-8C32-78A6-694D6EC8AEB8}"/>
+              </a:ext>
+            </a:extLst>
+          </p:cNvPr>
+          <p:cNvSpPr>
+            <a:spLocks noGrp="1" noRot="1" noChangeAspect="1"/>
+          </p:cNvSpPr>
+          <p:nvPr>
+            <p:ph type="sldImg"/>
+          </p:nvPr>
+        </p:nvSpPr>
+        <p:spPr/>
+      </p:sp>
+      <p:sp>
+        <p:nvSpPr>
+          <p:cNvPr id="3" name="Notes Placeholder 2">
+            <a:extLst>
+              <a:ext uri="{FF2B5EF4-FFF2-40B4-BE49-F238E27FC236}">
+                <a16:creationId xmlns:a16="http://schemas.microsoft.com/office/drawing/2014/main" id="{DB6B9C79-3DC3-E58A-9A38-FC34B83566D2}"/>
+              </a:ext>
+            </a:extLst>
+          </p:cNvPr>
+          <p:cNvSpPr>
+            <a:spLocks noGrp="1"/>
+          </p:cNvSpPr>
+          <p:nvPr>
+            <p:ph type="body" idx="1"/>
+          </p:nvPr>
+        </p:nvSpPr>
+        <p:spPr/>
+        <p:txBody>
+          <a:bodyPr/>
+          <a:lstStyle/>
+          <a:p>
+            <a:endParaRPr lang="en-US" dirty="0"/>
+          </a:p>
+        </p:txBody>
+      </p:sp>
+      <p:sp>
+        <p:nvSpPr>
+          <p:cNvPr id="4" name="Slide Number Placeholder 3">
+            <a:extLst>
+              <a:ext uri="{FF2B5EF4-FFF2-40B4-BE49-F238E27FC236}">
+                <a16:creationId xmlns:a16="http://schemas.microsoft.com/office/drawing/2014/main" id="{8872B410-1D0C-5D79-58C1-9BCF1FCCA51F}"/>
+              </a:ext>
+            </a:extLst>
+          </p:cNvPr>
+          <p:cNvSpPr>
+            <a:spLocks noGrp="1"/>
+          </p:cNvSpPr>
+          <p:nvPr>
+            <p:ph type="sldNum" sz="quarter" idx="5"/>
+          </p:nvPr>
+        </p:nvSpPr>
+        <p:spPr/>
+        <p:txBody>
+          <a:bodyPr/>
+          <a:lstStyle/>
+          <a:p>
+            <a:fld id="{789453B0-9DF3-4847-AF80-E61FDDFE7134}" type="slidenum">
+              <a:rPr lang="zh-TW" altLang="en-US" smtClean="0"/>
+              <a:t>11</a:t>
+            </a:fld>
+            <a:endParaRPr lang="zh-TW" altLang="en-US"/>
+          </a:p>
+        </p:txBody>
+      </p:sp>
+    </p:spTree>
+    <p:extLst>
+      <p:ext uri="{BB962C8B-B14F-4D97-AF65-F5344CB8AC3E}">
+        <p14:creationId xmlns:p14="http://schemas.microsoft.com/office/powerpoint/2010/main" val="3284685168"/>
+      </p:ext>
+    </p:extLst>
+  </p:cSld>
+  <p:clrMapOvr>
+    <a:masterClrMapping/>
+  </p:clrMapOvr>
+</p:notes>
+</file>
+
+<file path=ppt/notesSlides/notesSlide11.xml><?xml version="1.0" encoding="utf-8"?>
+<p:notes xmlns:a="http://schemas.openxmlformats.org/drawingml/2006/main" xmlns:r="http://schemas.openxmlformats.org/officeDocument/2006/relationships" xmlns:p="http://schemas.openxmlformats.org/presentationml/2006/main">
+  <p:cSld>
+    <p:spTree>
+      <p:nvGrpSpPr>
+        <p:cNvPr id="1" name="">
+          <a:extLst>
+            <a:ext uri="{FF2B5EF4-FFF2-40B4-BE49-F238E27FC236}">
+              <a16:creationId xmlns:a16="http://schemas.microsoft.com/office/drawing/2014/main" id="{C48E7663-8969-02EF-5EF8-A538117A3052}"/>
+            </a:ext>
+          </a:extLst>
+        </p:cNvPr>
+        <p:cNvGrpSpPr/>
+        <p:nvPr/>
+      </p:nvGrpSpPr>
+      <p:grpSpPr>
+        <a:xfrm>
+          <a:off x="0" y="0"/>
+          <a:ext cx="0" cy="0"/>
+          <a:chOff x="0" y="0"/>
+          <a:chExt cx="0" cy="0"/>
+        </a:xfrm>
+      </p:grpSpPr>
+      <p:sp>
+        <p:nvSpPr>
+          <p:cNvPr id="2" name="Slide Image Placeholder 1">
+            <a:extLst>
+              <a:ext uri="{FF2B5EF4-FFF2-40B4-BE49-F238E27FC236}">
+                <a16:creationId xmlns:a16="http://schemas.microsoft.com/office/drawing/2014/main" id="{1B996833-F6D1-5987-3576-BBEDED70A0F0}"/>
+              </a:ext>
+            </a:extLst>
+          </p:cNvPr>
+          <p:cNvSpPr>
+            <a:spLocks noGrp="1" noRot="1" noChangeAspect="1"/>
+          </p:cNvSpPr>
+          <p:nvPr>
+            <p:ph type="sldImg"/>
+          </p:nvPr>
+        </p:nvSpPr>
+        <p:spPr/>
+      </p:sp>
+      <p:sp>
+        <p:nvSpPr>
+          <p:cNvPr id="3" name="Notes Placeholder 2">
+            <a:extLst>
+              <a:ext uri="{FF2B5EF4-FFF2-40B4-BE49-F238E27FC236}">
+                <a16:creationId xmlns:a16="http://schemas.microsoft.com/office/drawing/2014/main" id="{1AAC52F7-2708-8205-BAC6-296F2E2A48F5}"/>
+              </a:ext>
+            </a:extLst>
+          </p:cNvPr>
+          <p:cNvSpPr>
+            <a:spLocks noGrp="1"/>
+          </p:cNvSpPr>
+          <p:nvPr>
+            <p:ph type="body" idx="1"/>
+          </p:nvPr>
+        </p:nvSpPr>
+        <p:spPr/>
+        <p:txBody>
+          <a:bodyPr/>
+          <a:lstStyle/>
+          <a:p>
+            <a:endParaRPr lang="en-US" dirty="0"/>
+          </a:p>
+        </p:txBody>
+      </p:sp>
+      <p:sp>
+        <p:nvSpPr>
+          <p:cNvPr id="4" name="Slide Number Placeholder 3">
+            <a:extLst>
+              <a:ext uri="{FF2B5EF4-FFF2-40B4-BE49-F238E27FC236}">
+                <a16:creationId xmlns:a16="http://schemas.microsoft.com/office/drawing/2014/main" id="{758CB785-65DA-B4F5-8200-5179B1ADCB28}"/>
+              </a:ext>
+            </a:extLst>
+          </p:cNvPr>
+          <p:cNvSpPr>
+            <a:spLocks noGrp="1"/>
+          </p:cNvSpPr>
+          <p:nvPr>
+            <p:ph type="sldNum" sz="quarter" idx="5"/>
+          </p:nvPr>
+        </p:nvSpPr>
+        <p:spPr/>
+        <p:txBody>
+          <a:bodyPr/>
+          <a:lstStyle/>
+          <a:p>
+            <a:fld id="{789453B0-9DF3-4847-AF80-E61FDDFE7134}" type="slidenum">
+              <a:rPr lang="zh-TW" altLang="en-US" smtClean="0"/>
+              <a:t>12</a:t>
+            </a:fld>
+            <a:endParaRPr lang="zh-TW" altLang="en-US"/>
+          </a:p>
+        </p:txBody>
+      </p:sp>
+    </p:spTree>
+    <p:extLst>
+      <p:ext uri="{BB962C8B-B14F-4D97-AF65-F5344CB8AC3E}">
+        <p14:creationId xmlns:p14="http://schemas.microsoft.com/office/powerpoint/2010/main" val="2790252021"/>
+      </p:ext>
+    </p:extLst>
+  </p:cSld>
+  <p:clrMapOvr>
+    <a:masterClrMapping/>
+  </p:clrMapOvr>
+</p:notes>
+</file>
+
+<file path=ppt/notesSlides/notesSlide12.xml><?xml version="1.0" encoding="utf-8"?>
+<p:notes xmlns:a="http://schemas.openxmlformats.org/drawingml/2006/main" xmlns:r="http://schemas.openxmlformats.org/officeDocument/2006/relationships" xmlns:p="http://schemas.openxmlformats.org/presentationml/2006/main">
+  <p:cSld>
+    <p:spTree>
+      <p:nvGrpSpPr>
+        <p:cNvPr id="1" name="">
+          <a:extLst>
+            <a:ext uri="{FF2B5EF4-FFF2-40B4-BE49-F238E27FC236}">
+              <a16:creationId xmlns:a16="http://schemas.microsoft.com/office/drawing/2014/main" id="{820D6572-BE37-7DFE-C38C-0BC8A7DAFEA8}"/>
+            </a:ext>
+          </a:extLst>
+        </p:cNvPr>
+        <p:cNvGrpSpPr/>
+        <p:nvPr/>
+      </p:nvGrpSpPr>
+      <p:grpSpPr>
+        <a:xfrm>
+          <a:off x="0" y="0"/>
+          <a:ext cx="0" cy="0"/>
+          <a:chOff x="0" y="0"/>
+          <a:chExt cx="0" cy="0"/>
+        </a:xfrm>
+      </p:grpSpPr>
+      <p:sp>
+        <p:nvSpPr>
+          <p:cNvPr id="2" name="Slide Image Placeholder 1">
+            <a:extLst>
+              <a:ext uri="{FF2B5EF4-FFF2-40B4-BE49-F238E27FC236}">
+                <a16:creationId xmlns:a16="http://schemas.microsoft.com/office/drawing/2014/main" id="{07D96697-7E74-0FDF-4865-C3B840D15BD6}"/>
+              </a:ext>
+            </a:extLst>
+          </p:cNvPr>
+          <p:cNvSpPr>
+            <a:spLocks noGrp="1" noRot="1" noChangeAspect="1"/>
+          </p:cNvSpPr>
+          <p:nvPr>
+            <p:ph type="sldImg"/>
+          </p:nvPr>
+        </p:nvSpPr>
+        <p:spPr/>
+      </p:sp>
+      <p:sp>
+        <p:nvSpPr>
+          <p:cNvPr id="3" name="Notes Placeholder 2">
+            <a:extLst>
+              <a:ext uri="{FF2B5EF4-FFF2-40B4-BE49-F238E27FC236}">
+                <a16:creationId xmlns:a16="http://schemas.microsoft.com/office/drawing/2014/main" id="{4E978088-2BAD-F44C-2188-5EF3D4B0B4F3}"/>
+              </a:ext>
+            </a:extLst>
+          </p:cNvPr>
+          <p:cNvSpPr>
+            <a:spLocks noGrp="1"/>
+          </p:cNvSpPr>
+          <p:nvPr>
+            <p:ph type="body" idx="1"/>
+          </p:nvPr>
+        </p:nvSpPr>
+        <p:spPr/>
+        <p:txBody>
+          <a:bodyPr/>
+          <a:lstStyle/>
+          <a:p>
+            <a:endParaRPr lang="en-US" dirty="0"/>
+          </a:p>
+        </p:txBody>
+      </p:sp>
+      <p:sp>
+        <p:nvSpPr>
+          <p:cNvPr id="4" name="Slide Number Placeholder 3">
+            <a:extLst>
+              <a:ext uri="{FF2B5EF4-FFF2-40B4-BE49-F238E27FC236}">
+                <a16:creationId xmlns:a16="http://schemas.microsoft.com/office/drawing/2014/main" id="{6EFDBD88-4559-B5D4-75B6-F84177E9FD5B}"/>
+              </a:ext>
+            </a:extLst>
+          </p:cNvPr>
+          <p:cNvSpPr>
+            <a:spLocks noGrp="1"/>
+          </p:cNvSpPr>
+          <p:nvPr>
+            <p:ph type="sldNum" sz="quarter" idx="5"/>
+          </p:nvPr>
+        </p:nvSpPr>
+        <p:spPr/>
+        <p:txBody>
+          <a:bodyPr/>
+          <a:lstStyle/>
+          <a:p>
+            <a:fld id="{789453B0-9DF3-4847-AF80-E61FDDFE7134}" type="slidenum">
+              <a:rPr lang="zh-TW" altLang="en-US" smtClean="0"/>
+              <a:t>13</a:t>
+            </a:fld>
+            <a:endParaRPr lang="zh-TW" altLang="en-US"/>
+          </a:p>
+        </p:txBody>
+      </p:sp>
+    </p:spTree>
+    <p:extLst>
+      <p:ext uri="{BB962C8B-B14F-4D97-AF65-F5344CB8AC3E}">
+        <p14:creationId xmlns:p14="http://schemas.microsoft.com/office/powerpoint/2010/main" val="1176226763"/>
+      </p:ext>
+    </p:extLst>
+  </p:cSld>
+  <p:clrMapOvr>
+    <a:masterClrMapping/>
+  </p:clrMapOvr>
+</p:notes>
+</file>
+
+<file path=ppt/notesSlides/notesSlide13.xml><?xml version="1.0" encoding="utf-8"?>
+<p:notes xmlns:a="http://schemas.openxmlformats.org/drawingml/2006/main" xmlns:r="http://schemas.openxmlformats.org/officeDocument/2006/relationships" xmlns:p="http://schemas.openxmlformats.org/presentationml/2006/main">
+  <p:cSld>
+    <p:spTree>
+      <p:nvGrpSpPr>
+        <p:cNvPr id="1" name="">
+          <a:extLst>
+            <a:ext uri="{FF2B5EF4-FFF2-40B4-BE49-F238E27FC236}">
+              <a16:creationId xmlns:a16="http://schemas.microsoft.com/office/drawing/2014/main" id="{A70230D8-58A4-81A4-35EA-21E031E2A357}"/>
+            </a:ext>
+          </a:extLst>
+        </p:cNvPr>
+        <p:cNvGrpSpPr/>
+        <p:nvPr/>
+      </p:nvGrpSpPr>
+      <p:grpSpPr>
+        <a:xfrm>
+          <a:off x="0" y="0"/>
+          <a:ext cx="0" cy="0"/>
+          <a:chOff x="0" y="0"/>
+          <a:chExt cx="0" cy="0"/>
+        </a:xfrm>
+      </p:grpSpPr>
+      <p:sp>
+        <p:nvSpPr>
+          <p:cNvPr id="2" name="Slide Image Placeholder 1">
+            <a:extLst>
+              <a:ext uri="{FF2B5EF4-FFF2-40B4-BE49-F238E27FC236}">
+                <a16:creationId xmlns:a16="http://schemas.microsoft.com/office/drawing/2014/main" id="{63BC766A-4ED4-A62F-1145-56F7014DC729}"/>
+              </a:ext>
+            </a:extLst>
+          </p:cNvPr>
+          <p:cNvSpPr>
+            <a:spLocks noGrp="1" noRot="1" noChangeAspect="1"/>
+          </p:cNvSpPr>
+          <p:nvPr>
+            <p:ph type="sldImg"/>
+          </p:nvPr>
+        </p:nvSpPr>
+        <p:spPr/>
+      </p:sp>
+      <p:sp>
+        <p:nvSpPr>
+          <p:cNvPr id="3" name="Notes Placeholder 2">
+            <a:extLst>
+              <a:ext uri="{FF2B5EF4-FFF2-40B4-BE49-F238E27FC236}">
+                <a16:creationId xmlns:a16="http://schemas.microsoft.com/office/drawing/2014/main" id="{E58BA594-1C2C-EA53-E2B1-3BFE98171AEE}"/>
+              </a:ext>
+            </a:extLst>
+          </p:cNvPr>
+          <p:cNvSpPr>
+            <a:spLocks noGrp="1"/>
+          </p:cNvSpPr>
+          <p:nvPr>
+            <p:ph type="body" idx="1"/>
+          </p:nvPr>
+        </p:nvSpPr>
+        <p:spPr/>
+        <p:txBody>
+          <a:bodyPr/>
+          <a:lstStyle/>
+          <a:p>
+            <a:endParaRPr lang="en-US" dirty="0"/>
+          </a:p>
+        </p:txBody>
+      </p:sp>
+      <p:sp>
+        <p:nvSpPr>
+          <p:cNvPr id="4" name="Slide Number Placeholder 3">
+            <a:extLst>
+              <a:ext uri="{FF2B5EF4-FFF2-40B4-BE49-F238E27FC236}">
+                <a16:creationId xmlns:a16="http://schemas.microsoft.com/office/drawing/2014/main" id="{B0BC573E-AC0C-958F-7154-85ABDDD70BA3}"/>
+              </a:ext>
+            </a:extLst>
+          </p:cNvPr>
+          <p:cNvSpPr>
+            <a:spLocks noGrp="1"/>
+          </p:cNvSpPr>
+          <p:nvPr>
+            <p:ph type="sldNum" sz="quarter" idx="5"/>
+          </p:nvPr>
+        </p:nvSpPr>
+        <p:spPr/>
+        <p:txBody>
+          <a:bodyPr/>
+          <a:lstStyle/>
+          <a:p>
+            <a:fld id="{789453B0-9DF3-4847-AF80-E61FDDFE7134}" type="slidenum">
+              <a:rPr lang="zh-TW" altLang="en-US" smtClean="0"/>
+              <a:t>14</a:t>
+            </a:fld>
+            <a:endParaRPr lang="zh-TW" altLang="en-US"/>
+          </a:p>
+        </p:txBody>
+      </p:sp>
+    </p:spTree>
+    <p:extLst>
+      <p:ext uri="{BB962C8B-B14F-4D97-AF65-F5344CB8AC3E}">
+        <p14:creationId xmlns:p14="http://schemas.microsoft.com/office/powerpoint/2010/main" val="4176670873"/>
+      </p:ext>
+    </p:extLst>
+  </p:cSld>
+  <p:clrMapOvr>
+    <a:masterClrMapping/>
+  </p:clrMapOvr>
+</p:notes>
+</file>
+
+<file path=ppt/notesSlides/notesSlide14.xml><?xml version="1.0" encoding="utf-8"?>
+<p:notes xmlns:a="http://schemas.openxmlformats.org/drawingml/2006/main" xmlns:r="http://schemas.openxmlformats.org/officeDocument/2006/relationships" xmlns:p="http://schemas.openxmlformats.org/presentationml/2006/main">
+  <p:cSld>
+    <p:spTree>
+      <p:nvGrpSpPr>
+        <p:cNvPr id="1" name="">
+          <a:extLst>
+            <a:ext uri="{FF2B5EF4-FFF2-40B4-BE49-F238E27FC236}">
+              <a16:creationId xmlns:a16="http://schemas.microsoft.com/office/drawing/2014/main" id="{0715B613-2DFC-CD7C-54DC-BCA2E7FDB64C}"/>
+            </a:ext>
+          </a:extLst>
+        </p:cNvPr>
+        <p:cNvGrpSpPr/>
+        <p:nvPr/>
+      </p:nvGrpSpPr>
+      <p:grpSpPr>
+        <a:xfrm>
+          <a:off x="0" y="0"/>
+          <a:ext cx="0" cy="0"/>
+          <a:chOff x="0" y="0"/>
+          <a:chExt cx="0" cy="0"/>
+        </a:xfrm>
+      </p:grpSpPr>
+      <p:sp>
+        <p:nvSpPr>
+          <p:cNvPr id="2" name="Slide Image Placeholder 1">
+            <a:extLst>
+              <a:ext uri="{FF2B5EF4-FFF2-40B4-BE49-F238E27FC236}">
+                <a16:creationId xmlns:a16="http://schemas.microsoft.com/office/drawing/2014/main" id="{6DD53396-70B5-7B5F-210E-F63FCAA3F109}"/>
+              </a:ext>
+            </a:extLst>
+          </p:cNvPr>
+          <p:cNvSpPr>
+            <a:spLocks noGrp="1" noRot="1" noChangeAspect="1"/>
+          </p:cNvSpPr>
+          <p:nvPr>
+            <p:ph type="sldImg"/>
+          </p:nvPr>
+        </p:nvSpPr>
+        <p:spPr/>
+      </p:sp>
+      <p:sp>
+        <p:nvSpPr>
+          <p:cNvPr id="3" name="Notes Placeholder 2">
+            <a:extLst>
+              <a:ext uri="{FF2B5EF4-FFF2-40B4-BE49-F238E27FC236}">
+                <a16:creationId xmlns:a16="http://schemas.microsoft.com/office/drawing/2014/main" id="{7BA7DB34-A97C-ABC1-C951-2B2502D55289}"/>
+              </a:ext>
+            </a:extLst>
+          </p:cNvPr>
+          <p:cNvSpPr>
+            <a:spLocks noGrp="1"/>
+          </p:cNvSpPr>
+          <p:nvPr>
+            <p:ph type="body" idx="1"/>
+          </p:nvPr>
+        </p:nvSpPr>
+        <p:spPr/>
+        <p:txBody>
+          <a:bodyPr/>
+          <a:lstStyle/>
+          <a:p>
+            <a:endParaRPr lang="en-US" dirty="0"/>
+          </a:p>
+        </p:txBody>
+      </p:sp>
+      <p:sp>
+        <p:nvSpPr>
+          <p:cNvPr id="4" name="Slide Number Placeholder 3">
+            <a:extLst>
+              <a:ext uri="{FF2B5EF4-FFF2-40B4-BE49-F238E27FC236}">
+                <a16:creationId xmlns:a16="http://schemas.microsoft.com/office/drawing/2014/main" id="{8B78692B-E57A-2E01-50EC-FDF431F1A2D3}"/>
+              </a:ext>
+            </a:extLst>
+          </p:cNvPr>
+          <p:cNvSpPr>
+            <a:spLocks noGrp="1"/>
+          </p:cNvSpPr>
+          <p:nvPr>
+            <p:ph type="sldNum" sz="quarter" idx="5"/>
+          </p:nvPr>
+        </p:nvSpPr>
+        <p:spPr/>
+        <p:txBody>
+          <a:bodyPr/>
+          <a:lstStyle/>
+          <a:p>
+            <a:fld id="{789453B0-9DF3-4847-AF80-E61FDDFE7134}" type="slidenum">
+              <a:rPr lang="zh-TW" altLang="en-US" smtClean="0"/>
+              <a:t>15</a:t>
+            </a:fld>
+            <a:endParaRPr lang="zh-TW" altLang="en-US"/>
+          </a:p>
+        </p:txBody>
+      </p:sp>
+    </p:spTree>
+    <p:extLst>
+      <p:ext uri="{BB962C8B-B14F-4D97-AF65-F5344CB8AC3E}">
+        <p14:creationId xmlns:p14="http://schemas.microsoft.com/office/powerpoint/2010/main" val="3653414760"/>
+      </p:ext>
+    </p:extLst>
+  </p:cSld>
+  <p:clrMapOvr>
+    <a:masterClrMapping/>
+  </p:clrMapOvr>
+</p:notes>
+</file>
+
+<file path=ppt/notesSlides/notesSlide15.xml><?xml version="1.0" encoding="utf-8"?>
+<p:notes xmlns:a="http://schemas.openxmlformats.org/drawingml/2006/main" xmlns:r="http://schemas.openxmlformats.org/officeDocument/2006/relationships" xmlns:p="http://schemas.openxmlformats.org/presentationml/2006/main">
+  <p:cSld>
+    <p:spTree>
+      <p:nvGrpSpPr>
+        <p:cNvPr id="1" name="">
+          <a:extLst>
+            <a:ext uri="{FF2B5EF4-FFF2-40B4-BE49-F238E27FC236}">
+              <a16:creationId xmlns:a16="http://schemas.microsoft.com/office/drawing/2014/main" id="{95AA8832-4515-A06A-0844-9FA68AF65311}"/>
+            </a:ext>
+          </a:extLst>
+        </p:cNvPr>
+        <p:cNvGrpSpPr/>
+        <p:nvPr/>
+      </p:nvGrpSpPr>
+      <p:grpSpPr>
+        <a:xfrm>
+          <a:off x="0" y="0"/>
+          <a:ext cx="0" cy="0"/>
+          <a:chOff x="0" y="0"/>
+          <a:chExt cx="0" cy="0"/>
+        </a:xfrm>
+      </p:grpSpPr>
+      <p:sp>
+        <p:nvSpPr>
+          <p:cNvPr id="2" name="Slide Image Placeholder 1">
+            <a:extLst>
+              <a:ext uri="{FF2B5EF4-FFF2-40B4-BE49-F238E27FC236}">
+                <a16:creationId xmlns:a16="http://schemas.microsoft.com/office/drawing/2014/main" id="{A4773BD2-343B-BFE9-FB1D-744AE53DD1F9}"/>
+              </a:ext>
+            </a:extLst>
+          </p:cNvPr>
+          <p:cNvSpPr>
+            <a:spLocks noGrp="1" noRot="1" noChangeAspect="1"/>
+          </p:cNvSpPr>
+          <p:nvPr>
+            <p:ph type="sldImg"/>
+          </p:nvPr>
+        </p:nvSpPr>
+        <p:spPr/>
+      </p:sp>
+      <p:sp>
+        <p:nvSpPr>
+          <p:cNvPr id="3" name="Notes Placeholder 2">
+            <a:extLst>
+              <a:ext uri="{FF2B5EF4-FFF2-40B4-BE49-F238E27FC236}">
+                <a16:creationId xmlns:a16="http://schemas.microsoft.com/office/drawing/2014/main" id="{EC9D2E2F-38EC-010A-A159-D40CE36819D6}"/>
+              </a:ext>
+            </a:extLst>
+          </p:cNvPr>
+          <p:cNvSpPr>
+            <a:spLocks noGrp="1"/>
+          </p:cNvSpPr>
+          <p:nvPr>
+            <p:ph type="body" idx="1"/>
+          </p:nvPr>
+        </p:nvSpPr>
+        <p:spPr/>
+        <p:txBody>
+          <a:bodyPr/>
+          <a:lstStyle/>
+          <a:p>
+            <a:endParaRPr lang="en-US" dirty="0"/>
+          </a:p>
+        </p:txBody>
+      </p:sp>
+      <p:sp>
+        <p:nvSpPr>
+          <p:cNvPr id="4" name="Slide Number Placeholder 3">
+            <a:extLst>
+              <a:ext uri="{FF2B5EF4-FFF2-40B4-BE49-F238E27FC236}">
+                <a16:creationId xmlns:a16="http://schemas.microsoft.com/office/drawing/2014/main" id="{A8C1ACAD-2D8D-0AD1-8A8D-E34AA0544C92}"/>
+              </a:ext>
+            </a:extLst>
+          </p:cNvPr>
+          <p:cNvSpPr>
+            <a:spLocks noGrp="1"/>
+          </p:cNvSpPr>
+          <p:nvPr>
+            <p:ph type="sldNum" sz="quarter" idx="5"/>
+          </p:nvPr>
+        </p:nvSpPr>
+        <p:spPr/>
+        <p:txBody>
+          <a:bodyPr/>
+          <a:lstStyle/>
+          <a:p>
+            <a:fld id="{789453B0-9DF3-4847-AF80-E61FDDFE7134}" type="slidenum">
+              <a:rPr lang="zh-TW" altLang="en-US" smtClean="0"/>
+              <a:t>16</a:t>
+            </a:fld>
+            <a:endParaRPr lang="zh-TW" altLang="en-US"/>
+          </a:p>
+        </p:txBody>
+      </p:sp>
+    </p:spTree>
+    <p:extLst>
+      <p:ext uri="{BB962C8B-B14F-4D97-AF65-F5344CB8AC3E}">
+        <p14:creationId xmlns:p14="http://schemas.microsoft.com/office/powerpoint/2010/main" val="4026689605"/>
+      </p:ext>
+    </p:extLst>
+  </p:cSld>
+  <p:clrMapOvr>
+    <a:masterClrMapping/>
+  </p:clrMapOvr>
+</p:notes>
+</file>
+
+<file path=ppt/notesSlides/notesSlide16.xml><?xml version="1.0" encoding="utf-8"?>
+<p:notes xmlns:a="http://schemas.openxmlformats.org/drawingml/2006/main" xmlns:r="http://schemas.openxmlformats.org/officeDocument/2006/relationships" xmlns:p="http://schemas.openxmlformats.org/presentationml/2006/main">
+  <p:cSld>
+    <p:spTree>
+      <p:nvGrpSpPr>
+        <p:cNvPr id="1" name="">
+          <a:extLst>
+            <a:ext uri="{FF2B5EF4-FFF2-40B4-BE49-F238E27FC236}">
+              <a16:creationId xmlns:a16="http://schemas.microsoft.com/office/drawing/2014/main" id="{F5D04879-02F0-5720-6B4B-EB4843FBAA1B}"/>
+            </a:ext>
+          </a:extLst>
+        </p:cNvPr>
+        <p:cNvGrpSpPr/>
+        <p:nvPr/>
+      </p:nvGrpSpPr>
+      <p:grpSpPr>
+        <a:xfrm>
+          <a:off x="0" y="0"/>
+          <a:ext cx="0" cy="0"/>
+          <a:chOff x="0" y="0"/>
+          <a:chExt cx="0" cy="0"/>
+        </a:xfrm>
+      </p:grpSpPr>
+      <p:sp>
+        <p:nvSpPr>
+          <p:cNvPr id="2" name="Slide Image Placeholder 1">
+            <a:extLst>
+              <a:ext uri="{FF2B5EF4-FFF2-40B4-BE49-F238E27FC236}">
+                <a16:creationId xmlns:a16="http://schemas.microsoft.com/office/drawing/2014/main" id="{99B313F8-5E9C-616B-CE2B-61334933B2B2}"/>
+              </a:ext>
+            </a:extLst>
+          </p:cNvPr>
+          <p:cNvSpPr>
+            <a:spLocks noGrp="1" noRot="1" noChangeAspect="1"/>
+          </p:cNvSpPr>
+          <p:nvPr>
+            <p:ph type="sldImg"/>
+          </p:nvPr>
+        </p:nvSpPr>
+        <p:spPr/>
+      </p:sp>
+      <p:sp>
+        <p:nvSpPr>
+          <p:cNvPr id="3" name="Notes Placeholder 2">
+            <a:extLst>
+              <a:ext uri="{FF2B5EF4-FFF2-40B4-BE49-F238E27FC236}">
+                <a16:creationId xmlns:a16="http://schemas.microsoft.com/office/drawing/2014/main" id="{0BC6DC50-62DE-8B24-A617-9D3E207892E5}"/>
+              </a:ext>
+            </a:extLst>
+          </p:cNvPr>
+          <p:cNvSpPr>
+            <a:spLocks noGrp="1"/>
+          </p:cNvSpPr>
+          <p:nvPr>
+            <p:ph type="body" idx="1"/>
+          </p:nvPr>
+        </p:nvSpPr>
+        <p:spPr/>
+        <p:txBody>
+          <a:bodyPr/>
+          <a:lstStyle/>
+          <a:p>
+            <a:endParaRPr lang="en-US" dirty="0"/>
+          </a:p>
+        </p:txBody>
+      </p:sp>
+      <p:sp>
+        <p:nvSpPr>
+          <p:cNvPr id="4" name="Slide Number Placeholder 3">
+            <a:extLst>
+              <a:ext uri="{FF2B5EF4-FFF2-40B4-BE49-F238E27FC236}">
+                <a16:creationId xmlns:a16="http://schemas.microsoft.com/office/drawing/2014/main" id="{ABFA0242-29FD-1EB8-0CD6-907B376C0EB8}"/>
+              </a:ext>
+            </a:extLst>
+          </p:cNvPr>
+          <p:cNvSpPr>
+            <a:spLocks noGrp="1"/>
+          </p:cNvSpPr>
+          <p:nvPr>
+            <p:ph type="sldNum" sz="quarter" idx="5"/>
+          </p:nvPr>
+        </p:nvSpPr>
+        <p:spPr/>
+        <p:txBody>
+          <a:bodyPr/>
+          <a:lstStyle/>
+          <a:p>
+            <a:fld id="{789453B0-9DF3-4847-AF80-E61FDDFE7134}" type="slidenum">
+              <a:rPr lang="zh-TW" altLang="en-US" smtClean="0"/>
+              <a:t>17</a:t>
+            </a:fld>
+            <a:endParaRPr lang="zh-TW" altLang="en-US"/>
+          </a:p>
+        </p:txBody>
+      </p:sp>
+    </p:spTree>
+    <p:extLst>
+      <p:ext uri="{BB962C8B-B14F-4D97-AF65-F5344CB8AC3E}">
+        <p14:creationId xmlns:p14="http://schemas.microsoft.com/office/powerpoint/2010/main" val="692826978"/>
+      </p:ext>
+    </p:extLst>
+  </p:cSld>
+  <p:clrMapOvr>
+    <a:masterClrMapping/>
+  </p:clrMapOvr>
+</p:notes>
+</file>
+
+<file path=ppt/notesSlides/notesSlide17.xml><?xml version="1.0" encoding="utf-8"?>
+<p:notes xmlns:a="http://schemas.openxmlformats.org/drawingml/2006/main" xmlns:r="http://schemas.openxmlformats.org/officeDocument/2006/relationships" xmlns:p="http://schemas.openxmlformats.org/presentationml/2006/main">
+  <p:cSld>
+    <p:spTree>
+      <p:nvGrpSpPr>
+        <p:cNvPr id="1" name="">
+          <a:extLst>
+            <a:ext uri="{FF2B5EF4-FFF2-40B4-BE49-F238E27FC236}">
+              <a16:creationId xmlns:a16="http://schemas.microsoft.com/office/drawing/2014/main" id="{86BC52F5-74C5-9E66-23EF-864C249BBA9E}"/>
+            </a:ext>
+          </a:extLst>
+        </p:cNvPr>
+        <p:cNvGrpSpPr/>
+        <p:nvPr/>
+      </p:nvGrpSpPr>
+      <p:grpSpPr>
+        <a:xfrm>
+          <a:off x="0" y="0"/>
+          <a:ext cx="0" cy="0"/>
+          <a:chOff x="0" y="0"/>
+          <a:chExt cx="0" cy="0"/>
+        </a:xfrm>
+      </p:grpSpPr>
+      <p:sp>
+        <p:nvSpPr>
+          <p:cNvPr id="2" name="Slide Image Placeholder 1">
+            <a:extLst>
+              <a:ext uri="{FF2B5EF4-FFF2-40B4-BE49-F238E27FC236}">
+                <a16:creationId xmlns:a16="http://schemas.microsoft.com/office/drawing/2014/main" id="{6A48DB55-6365-CE8D-5662-A14A4AAFC4E8}"/>
+              </a:ext>
+            </a:extLst>
+          </p:cNvPr>
+          <p:cNvSpPr>
+            <a:spLocks noGrp="1" noRot="1" noChangeAspect="1"/>
+          </p:cNvSpPr>
+          <p:nvPr>
+            <p:ph type="sldImg"/>
+          </p:nvPr>
+        </p:nvSpPr>
+        <p:spPr/>
+      </p:sp>
+      <p:sp>
+        <p:nvSpPr>
+          <p:cNvPr id="3" name="Notes Placeholder 2">
+            <a:extLst>
+              <a:ext uri="{FF2B5EF4-FFF2-40B4-BE49-F238E27FC236}">
+                <a16:creationId xmlns:a16="http://schemas.microsoft.com/office/drawing/2014/main" id="{3181B758-A454-95FD-0B43-E0863FCFE2E8}"/>
+              </a:ext>
+            </a:extLst>
+          </p:cNvPr>
+          <p:cNvSpPr>
+            <a:spLocks noGrp="1"/>
+          </p:cNvSpPr>
+          <p:nvPr>
+            <p:ph type="body" idx="1"/>
+          </p:nvPr>
+        </p:nvSpPr>
+        <p:spPr/>
+        <p:txBody>
+          <a:bodyPr/>
+          <a:lstStyle/>
+          <a:p>
+            <a:endParaRPr lang="en-US" dirty="0"/>
+          </a:p>
+        </p:txBody>
+      </p:sp>
+      <p:sp>
+        <p:nvSpPr>
+          <p:cNvPr id="4" name="Slide Number Placeholder 3">
+            <a:extLst>
+              <a:ext uri="{FF2B5EF4-FFF2-40B4-BE49-F238E27FC236}">
+                <a16:creationId xmlns:a16="http://schemas.microsoft.com/office/drawing/2014/main" id="{EAA6B632-B252-CFBB-C879-8867A60110DB}"/>
+              </a:ext>
+            </a:extLst>
+          </p:cNvPr>
+          <p:cNvSpPr>
+            <a:spLocks noGrp="1"/>
+          </p:cNvSpPr>
+          <p:nvPr>
+            <p:ph type="sldNum" sz="quarter" idx="5"/>
+          </p:nvPr>
+        </p:nvSpPr>
+        <p:spPr/>
+        <p:txBody>
+          <a:bodyPr/>
+          <a:lstStyle/>
+          <a:p>
+            <a:fld id="{789453B0-9DF3-4847-AF80-E61FDDFE7134}" type="slidenum">
+              <a:rPr lang="zh-TW" altLang="en-US" smtClean="0"/>
+              <a:t>18</a:t>
+            </a:fld>
+            <a:endParaRPr lang="zh-TW" altLang="en-US"/>
+          </a:p>
+        </p:txBody>
+      </p:sp>
+    </p:spTree>
+    <p:extLst>
+      <p:ext uri="{BB962C8B-B14F-4D97-AF65-F5344CB8AC3E}">
+        <p14:creationId xmlns:p14="http://schemas.microsoft.com/office/powerpoint/2010/main" val="2172683632"/>
+      </p:ext>
+    </p:extLst>
+  </p:cSld>
+  <p:clrMapOvr>
+    <a:masterClrMapping/>
+  </p:clrMapOvr>
+</p:notes>
+</file>
+
+<file path=ppt/notesSlides/notesSlide18.xml><?xml version="1.0" encoding="utf-8"?>
+<p:notes xmlns:a="http://schemas.openxmlformats.org/drawingml/2006/main" xmlns:r="http://schemas.openxmlformats.org/officeDocument/2006/relationships" xmlns:p="http://schemas.openxmlformats.org/presentationml/2006/main">
+  <p:cSld>
+    <p:spTree>
+      <p:nvGrpSpPr>
+        <p:cNvPr id="1" name="">
+          <a:extLst>
+            <a:ext uri="{FF2B5EF4-FFF2-40B4-BE49-F238E27FC236}">
+              <a16:creationId xmlns:a16="http://schemas.microsoft.com/office/drawing/2014/main" id="{4F912FB2-ADE0-79F1-BE52-7A2617726439}"/>
+            </a:ext>
+          </a:extLst>
+        </p:cNvPr>
+        <p:cNvGrpSpPr/>
+        <p:nvPr/>
+      </p:nvGrpSpPr>
+      <p:grpSpPr>
+        <a:xfrm>
+          <a:off x="0" y="0"/>
+          <a:ext cx="0" cy="0"/>
+          <a:chOff x="0" y="0"/>
+          <a:chExt cx="0" cy="0"/>
+        </a:xfrm>
+      </p:grpSpPr>
+      <p:sp>
+        <p:nvSpPr>
+          <p:cNvPr id="2" name="Slide Image Placeholder 1">
+            <a:extLst>
+              <a:ext uri="{FF2B5EF4-FFF2-40B4-BE49-F238E27FC236}">
+                <a16:creationId xmlns:a16="http://schemas.microsoft.com/office/drawing/2014/main" id="{D63B7282-D039-6FA8-5D96-61CF0FF2D52F}"/>
+              </a:ext>
+            </a:extLst>
+          </p:cNvPr>
+          <p:cNvSpPr>
+            <a:spLocks noGrp="1" noRot="1" noChangeAspect="1"/>
+          </p:cNvSpPr>
+          <p:nvPr>
+            <p:ph type="sldImg"/>
+          </p:nvPr>
+        </p:nvSpPr>
+        <p:spPr/>
+      </p:sp>
+      <p:sp>
+        <p:nvSpPr>
+          <p:cNvPr id="3" name="Notes Placeholder 2">
+            <a:extLst>
+              <a:ext uri="{FF2B5EF4-FFF2-40B4-BE49-F238E27FC236}">
+                <a16:creationId xmlns:a16="http://schemas.microsoft.com/office/drawing/2014/main" id="{03B7ADB1-1263-6C09-912D-E1E6D8A0FF8C}"/>
+              </a:ext>
+            </a:extLst>
+          </p:cNvPr>
+          <p:cNvSpPr>
+            <a:spLocks noGrp="1"/>
+          </p:cNvSpPr>
+          <p:nvPr>
+            <p:ph type="body" idx="1"/>
+          </p:nvPr>
+        </p:nvSpPr>
+        <p:spPr/>
+        <p:txBody>
+          <a:bodyPr/>
+          <a:lstStyle/>
+          <a:p>
+            <a:endParaRPr lang="en-US" dirty="0"/>
+          </a:p>
+        </p:txBody>
+      </p:sp>
+      <p:sp>
+        <p:nvSpPr>
+          <p:cNvPr id="4" name="Slide Number Placeholder 3">
+            <a:extLst>
+              <a:ext uri="{FF2B5EF4-FFF2-40B4-BE49-F238E27FC236}">
+                <a16:creationId xmlns:a16="http://schemas.microsoft.com/office/drawing/2014/main" id="{0C76F254-E975-73E1-10C8-13E19492D9BC}"/>
+              </a:ext>
+            </a:extLst>
+          </p:cNvPr>
+          <p:cNvSpPr>
+            <a:spLocks noGrp="1"/>
+          </p:cNvSpPr>
+          <p:nvPr>
+            <p:ph type="sldNum" sz="quarter" idx="5"/>
+          </p:nvPr>
+        </p:nvSpPr>
+        <p:spPr/>
+        <p:txBody>
+          <a:bodyPr/>
+          <a:lstStyle/>
+          <a:p>
+            <a:fld id="{789453B0-9DF3-4847-AF80-E61FDDFE7134}" type="slidenum">
+              <a:rPr lang="zh-TW" altLang="en-US" smtClean="0"/>
+              <a:t>19</a:t>
+            </a:fld>
+            <a:endParaRPr lang="zh-TW" altLang="en-US"/>
+          </a:p>
+        </p:txBody>
+      </p:sp>
+    </p:spTree>
+    <p:extLst>
+      <p:ext uri="{BB962C8B-B14F-4D97-AF65-F5344CB8AC3E}">
+        <p14:creationId xmlns:p14="http://schemas.microsoft.com/office/powerpoint/2010/main" val="3718682394"/>
+      </p:ext>
+    </p:extLst>
+  </p:cSld>
+  <p:clrMapOvr>
+    <a:masterClrMapping/>
+  </p:clrMapOvr>
+</p:notes>
+</file>
+
+<file path=ppt/notesSlides/notesSlide2.xml><?xml version="1.0" encoding="utf-8"?>
+<p:notes xmlns:a="http://schemas.openxmlformats.org/drawingml/2006/main" xmlns:r="http://schemas.openxmlformats.org/officeDocument/2006/relationships" xmlns:p="http://schemas.openxmlformats.org/presentationml/2006/main">
+  <p:cSld>
+    <p:spTree>
+      <p:nvGrpSpPr>
+        <p:cNvPr id="1" name="">
+          <a:extLst>
+            <a:ext uri="{FF2B5EF4-FFF2-40B4-BE49-F238E27FC236}">
+              <a16:creationId xmlns:a16="http://schemas.microsoft.com/office/drawing/2014/main" id="{22EDB378-94EB-B5AA-A43E-874355BA12F5}"/>
+            </a:ext>
+          </a:extLst>
+        </p:cNvPr>
+        <p:cNvGrpSpPr/>
+        <p:nvPr/>
+      </p:nvGrpSpPr>
+      <p:grpSpPr>
+        <a:xfrm>
+          <a:off x="0" y="0"/>
+          <a:ext cx="0" cy="0"/>
+          <a:chOff x="0" y="0"/>
+          <a:chExt cx="0" cy="0"/>
+        </a:xfrm>
+      </p:grpSpPr>
+      <p:sp>
+        <p:nvSpPr>
+          <p:cNvPr id="2" name="Slide Image Placeholder 1">
+            <a:extLst>
+              <a:ext uri="{FF2B5EF4-FFF2-40B4-BE49-F238E27FC236}">
+                <a16:creationId xmlns:a16="http://schemas.microsoft.com/office/drawing/2014/main" id="{DA06CB8A-0800-0109-8198-F88A9ADE4122}"/>
+              </a:ext>
+            </a:extLst>
+          </p:cNvPr>
+          <p:cNvSpPr>
+            <a:spLocks noGrp="1" noRot="1" noChangeAspect="1"/>
+          </p:cNvSpPr>
+          <p:nvPr>
+            <p:ph type="sldImg"/>
+          </p:nvPr>
+        </p:nvSpPr>
+        <p:spPr/>
+      </p:sp>
+      <p:sp>
+        <p:nvSpPr>
+          <p:cNvPr id="3" name="Notes Placeholder 2">
+            <a:extLst>
+              <a:ext uri="{FF2B5EF4-FFF2-40B4-BE49-F238E27FC236}">
+                <a16:creationId xmlns:a16="http://schemas.microsoft.com/office/drawing/2014/main" id="{2D3F81A4-60EF-08A5-7DB3-12F41A6DF9B9}"/>
+              </a:ext>
+            </a:extLst>
+          </p:cNvPr>
+          <p:cNvSpPr>
+            <a:spLocks noGrp="1"/>
+          </p:cNvSpPr>
+          <p:nvPr>
+            <p:ph type="body" idx="1"/>
+          </p:nvPr>
+        </p:nvSpPr>
+        <p:spPr/>
+        <p:txBody>
+          <a:bodyPr/>
+          <a:lstStyle/>
+          <a:p>
+            <a:endParaRPr lang="en-US" dirty="0"/>
+          </a:p>
+        </p:txBody>
+      </p:sp>
+      <p:sp>
+        <p:nvSpPr>
+          <p:cNvPr id="4" name="Slide Number Placeholder 3">
+            <a:extLst>
+              <a:ext uri="{FF2B5EF4-FFF2-40B4-BE49-F238E27FC236}">
+                <a16:creationId xmlns:a16="http://schemas.microsoft.com/office/drawing/2014/main" id="{BF3DBD54-CF80-F560-A251-697A98AF0D06}"/>
+              </a:ext>
+            </a:extLst>
+          </p:cNvPr>
+          <p:cNvSpPr>
+            <a:spLocks noGrp="1"/>
+          </p:cNvSpPr>
+          <p:nvPr>
+            <p:ph type="sldNum" sz="quarter" idx="5"/>
+          </p:nvPr>
+        </p:nvSpPr>
+        <p:spPr/>
+        <p:txBody>
+          <a:bodyPr/>
+          <a:lstStyle/>
+          <a:p>
+            <a:fld id="{789453B0-9DF3-4847-AF80-E61FDDFE7134}" type="slidenum">
+              <a:rPr lang="zh-TW" altLang="en-US" smtClean="0"/>
+              <a:t>3</a:t>
+            </a:fld>
+            <a:endParaRPr lang="zh-TW" altLang="en-US"/>
+          </a:p>
+        </p:txBody>
+      </p:sp>
+    </p:spTree>
+    <p:extLst>
+      <p:ext uri="{BB962C8B-B14F-4D97-AF65-F5344CB8AC3E}">
+        <p14:creationId xmlns:p14="http://schemas.microsoft.com/office/powerpoint/2010/main" val="2488735790"/>
+      </p:ext>
+    </p:extLst>
+  </p:cSld>
+  <p:clrMapOvr>
+    <a:masterClrMapping/>
+  </p:clrMapOvr>
+</p:notes>
+</file>
+
+<file path=ppt/notesSlides/notesSlide3.xml><?xml version="1.0" encoding="utf-8"?>
+<p:notes xmlns:a="http://schemas.openxmlformats.org/drawingml/2006/main" xmlns:r="http://schemas.openxmlformats.org/officeDocument/2006/relationships" xmlns:p="http://schemas.openxmlformats.org/presentationml/2006/main">
+  <p:cSld>
+    <p:spTree>
+      <p:nvGrpSpPr>
+        <p:cNvPr id="1" name="">
+          <a:extLst>
+            <a:ext uri="{FF2B5EF4-FFF2-40B4-BE49-F238E27FC236}">
+              <a16:creationId xmlns:a16="http://schemas.microsoft.com/office/drawing/2014/main" id="{C3F903C1-932C-10BA-DF93-D4CC33A306A7}"/>
+            </a:ext>
+          </a:extLst>
+        </p:cNvPr>
+        <p:cNvGrpSpPr/>
+        <p:nvPr/>
+      </p:nvGrpSpPr>
+      <p:grpSpPr>
+        <a:xfrm>
+          <a:off x="0" y="0"/>
+          <a:ext cx="0" cy="0"/>
+          <a:chOff x="0" y="0"/>
+          <a:chExt cx="0" cy="0"/>
+        </a:xfrm>
+      </p:grpSpPr>
+      <p:sp>
+        <p:nvSpPr>
+          <p:cNvPr id="2" name="Slide Image Placeholder 1">
+            <a:extLst>
+              <a:ext uri="{FF2B5EF4-FFF2-40B4-BE49-F238E27FC236}">
+                <a16:creationId xmlns:a16="http://schemas.microsoft.com/office/drawing/2014/main" id="{439CB66B-3A39-3CD2-E752-CC7725BB7193}"/>
+              </a:ext>
+            </a:extLst>
+          </p:cNvPr>
+          <p:cNvSpPr>
+            <a:spLocks noGrp="1" noRot="1" noChangeAspect="1"/>
+          </p:cNvSpPr>
+          <p:nvPr>
+            <p:ph type="sldImg"/>
+          </p:nvPr>
+        </p:nvSpPr>
+        <p:spPr/>
+      </p:sp>
+      <p:sp>
+        <p:nvSpPr>
+          <p:cNvPr id="3" name="Notes Placeholder 2">
+            <a:extLst>
+              <a:ext uri="{FF2B5EF4-FFF2-40B4-BE49-F238E27FC236}">
+                <a16:creationId xmlns:a16="http://schemas.microsoft.com/office/drawing/2014/main" id="{66C7C873-9E8A-57E4-10BC-4265B2AA7603}"/>
+              </a:ext>
+            </a:extLst>
+          </p:cNvPr>
+          <p:cNvSpPr>
+            <a:spLocks noGrp="1"/>
+          </p:cNvSpPr>
+          <p:nvPr>
+            <p:ph type="body" idx="1"/>
+          </p:nvPr>
+        </p:nvSpPr>
+        <p:spPr/>
+        <p:txBody>
+          <a:bodyPr/>
+          <a:lstStyle/>
+          <a:p>
+            <a:endParaRPr lang="en-US" dirty="0"/>
+          </a:p>
+        </p:txBody>
+      </p:sp>
+      <p:sp>
+        <p:nvSpPr>
+          <p:cNvPr id="4" name="Slide Number Placeholder 3">
+            <a:extLst>
+              <a:ext uri="{FF2B5EF4-FFF2-40B4-BE49-F238E27FC236}">
+                <a16:creationId xmlns:a16="http://schemas.microsoft.com/office/drawing/2014/main" id="{960B9207-01B4-AFF8-4505-7E3C3C2DEEF0}"/>
+              </a:ext>
+            </a:extLst>
+          </p:cNvPr>
+          <p:cNvSpPr>
+            <a:spLocks noGrp="1"/>
+          </p:cNvSpPr>
+          <p:nvPr>
+            <p:ph type="sldNum" sz="quarter" idx="5"/>
+          </p:nvPr>
+        </p:nvSpPr>
+        <p:spPr/>
+        <p:txBody>
+          <a:bodyPr/>
+          <a:lstStyle/>
+          <a:p>
+            <a:fld id="{789453B0-9DF3-4847-AF80-E61FDDFE7134}" type="slidenum">
+              <a:rPr lang="zh-TW" altLang="en-US" smtClean="0"/>
+              <a:t>4</a:t>
+            </a:fld>
+            <a:endParaRPr lang="zh-TW" altLang="en-US"/>
+          </a:p>
+        </p:txBody>
+      </p:sp>
+    </p:spTree>
+    <p:extLst>
+      <p:ext uri="{BB962C8B-B14F-4D97-AF65-F5344CB8AC3E}">
+        <p14:creationId xmlns:p14="http://schemas.microsoft.com/office/powerpoint/2010/main" val="3684232408"/>
+      </p:ext>
+    </p:extLst>
+  </p:cSld>
+  <p:clrMapOvr>
+    <a:masterClrMapping/>
+  </p:clrMapOvr>
+</p:notes>
+</file>
+
+<file path=ppt/notesSlides/notesSlide4.xml><?xml version="1.0" encoding="utf-8"?>
+<p:notes xmlns:a="http://schemas.openxmlformats.org/drawingml/2006/main" xmlns:r="http://schemas.openxmlformats.org/officeDocument/2006/relationships" xmlns:p="http://schemas.openxmlformats.org/presentationml/2006/main">
+  <p:cSld>
+    <p:spTree>
+      <p:nvGrpSpPr>
+        <p:cNvPr id="1" name="">
+          <a:extLst>
+            <a:ext uri="{FF2B5EF4-FFF2-40B4-BE49-F238E27FC236}">
+              <a16:creationId xmlns:a16="http://schemas.microsoft.com/office/drawing/2014/main" id="{BE07BE55-B600-0BB9-D157-86E1621AE9A3}"/>
+            </a:ext>
+          </a:extLst>
+        </p:cNvPr>
+        <p:cNvGrpSpPr/>
+        <p:nvPr/>
+      </p:nvGrpSpPr>
+      <p:grpSpPr>
+        <a:xfrm>
+          <a:off x="0" y="0"/>
+          <a:ext cx="0" cy="0"/>
+          <a:chOff x="0" y="0"/>
+          <a:chExt cx="0" cy="0"/>
+        </a:xfrm>
+      </p:grpSpPr>
+      <p:sp>
+        <p:nvSpPr>
+          <p:cNvPr id="2" name="Slide Image Placeholder 1">
+            <a:extLst>
+              <a:ext uri="{FF2B5EF4-FFF2-40B4-BE49-F238E27FC236}">
+                <a16:creationId xmlns:a16="http://schemas.microsoft.com/office/drawing/2014/main" id="{CE44EAB9-B8FE-7921-B337-F229C567C0DD}"/>
+              </a:ext>
+            </a:extLst>
+          </p:cNvPr>
+          <p:cNvSpPr>
+            <a:spLocks noGrp="1" noRot="1" noChangeAspect="1"/>
+          </p:cNvSpPr>
+          <p:nvPr>
+            <p:ph type="sldImg"/>
+          </p:nvPr>
+        </p:nvSpPr>
+        <p:spPr/>
+      </p:sp>
+      <p:sp>
+        <p:nvSpPr>
+          <p:cNvPr id="3" name="Notes Placeholder 2">
+            <a:extLst>
+              <a:ext uri="{FF2B5EF4-FFF2-40B4-BE49-F238E27FC236}">
+                <a16:creationId xmlns:a16="http://schemas.microsoft.com/office/drawing/2014/main" id="{85A4C446-9AAF-D55D-DE3C-FA090811279F}"/>
+              </a:ext>
+            </a:extLst>
+          </p:cNvPr>
+          <p:cNvSpPr>
+            <a:spLocks noGrp="1"/>
+          </p:cNvSpPr>
+          <p:nvPr>
+            <p:ph type="body" idx="1"/>
+          </p:nvPr>
+        </p:nvSpPr>
+        <p:spPr/>
+        <p:txBody>
+          <a:bodyPr/>
+          <a:lstStyle/>
+          <a:p>
+            <a:endParaRPr lang="en-US" dirty="0"/>
+          </a:p>
+        </p:txBody>
+      </p:sp>
+      <p:sp>
+        <p:nvSpPr>
+          <p:cNvPr id="4" name="Slide Number Placeholder 3">
+            <a:extLst>
+              <a:ext uri="{FF2B5EF4-FFF2-40B4-BE49-F238E27FC236}">
+                <a16:creationId xmlns:a16="http://schemas.microsoft.com/office/drawing/2014/main" id="{2013BA6F-2937-E101-2DD3-EB7E9E8716EF}"/>
+              </a:ext>
+            </a:extLst>
+          </p:cNvPr>
+          <p:cNvSpPr>
+            <a:spLocks noGrp="1"/>
+          </p:cNvSpPr>
+          <p:nvPr>
+            <p:ph type="sldNum" sz="quarter" idx="5"/>
+          </p:nvPr>
+        </p:nvSpPr>
+        <p:spPr/>
+        <p:txBody>
+          <a:bodyPr/>
+          <a:lstStyle/>
+          <a:p>
+            <a:fld id="{789453B0-9DF3-4847-AF80-E61FDDFE7134}" type="slidenum">
+              <a:rPr lang="zh-TW" altLang="en-US" smtClean="0"/>
+              <a:t>5</a:t>
+            </a:fld>
+            <a:endParaRPr lang="zh-TW" altLang="en-US"/>
+          </a:p>
+        </p:txBody>
+      </p:sp>
+    </p:spTree>
+    <p:extLst>
+      <p:ext uri="{BB962C8B-B14F-4D97-AF65-F5344CB8AC3E}">
+        <p14:creationId xmlns:p14="http://schemas.microsoft.com/office/powerpoint/2010/main" val="547887863"/>
+      </p:ext>
+    </p:extLst>
+  </p:cSld>
+  <p:clrMapOvr>
+    <a:masterClrMapping/>
+  </p:clrMapOvr>
+</p:notes>
+</file>
+
+<file path=ppt/notesSlides/notesSlide5.xml><?xml version="1.0" encoding="utf-8"?>
+<p:notes xmlns:a="http://schemas.openxmlformats.org/drawingml/2006/main" xmlns:r="http://schemas.openxmlformats.org/officeDocument/2006/relationships" xmlns:p="http://schemas.openxmlformats.org/presentationml/2006/main">
+  <p:cSld>
+    <p:spTree>
+      <p:nvGrpSpPr>
+        <p:cNvPr id="1" name="">
+          <a:extLst>
+            <a:ext uri="{FF2B5EF4-FFF2-40B4-BE49-F238E27FC236}">
+              <a16:creationId xmlns:a16="http://schemas.microsoft.com/office/drawing/2014/main" id="{A5CA29E3-8696-B4AC-6D33-FD0FF935840B}"/>
+            </a:ext>
+          </a:extLst>
+        </p:cNvPr>
+        <p:cNvGrpSpPr/>
+        <p:nvPr/>
+      </p:nvGrpSpPr>
+      <p:grpSpPr>
+        <a:xfrm>
+          <a:off x="0" y="0"/>
+          <a:ext cx="0" cy="0"/>
+          <a:chOff x="0" y="0"/>
+          <a:chExt cx="0" cy="0"/>
+        </a:xfrm>
+      </p:grpSpPr>
+      <p:sp>
+        <p:nvSpPr>
+          <p:cNvPr id="2" name="Slide Image Placeholder 1">
+            <a:extLst>
+              <a:ext uri="{FF2B5EF4-FFF2-40B4-BE49-F238E27FC236}">
+                <a16:creationId xmlns:a16="http://schemas.microsoft.com/office/drawing/2014/main" id="{F25CDEEC-2573-E87A-DF89-5BD979CB3F34}"/>
+              </a:ext>
+            </a:extLst>
+          </p:cNvPr>
+          <p:cNvSpPr>
+            <a:spLocks noGrp="1" noRot="1" noChangeAspect="1"/>
+          </p:cNvSpPr>
+          <p:nvPr>
+            <p:ph type="sldImg"/>
+          </p:nvPr>
+        </p:nvSpPr>
+        <p:spPr/>
+      </p:sp>
+      <p:sp>
+        <p:nvSpPr>
+          <p:cNvPr id="3" name="Notes Placeholder 2">
+            <a:extLst>
+              <a:ext uri="{FF2B5EF4-FFF2-40B4-BE49-F238E27FC236}">
+                <a16:creationId xmlns:a16="http://schemas.microsoft.com/office/drawing/2014/main" id="{A6F88763-6211-3FAA-9A33-7407DE07FC6D}"/>
+              </a:ext>
+            </a:extLst>
+          </p:cNvPr>
+          <p:cNvSpPr>
+            <a:spLocks noGrp="1"/>
+          </p:cNvSpPr>
+          <p:nvPr>
+            <p:ph type="body" idx="1"/>
+          </p:nvPr>
+        </p:nvSpPr>
+        <p:spPr/>
+        <p:txBody>
+          <a:bodyPr/>
+          <a:lstStyle/>
+          <a:p>
+            <a:endParaRPr lang="en-US" dirty="0"/>
+          </a:p>
+        </p:txBody>
+      </p:sp>
+      <p:sp>
+        <p:nvSpPr>
+          <p:cNvPr id="4" name="Slide Number Placeholder 3">
+            <a:extLst>
+              <a:ext uri="{FF2B5EF4-FFF2-40B4-BE49-F238E27FC236}">
+                <a16:creationId xmlns:a16="http://schemas.microsoft.com/office/drawing/2014/main" id="{CB1914FB-CF23-D3EE-BF10-05EB0C3E1C11}"/>
+              </a:ext>
+            </a:extLst>
+          </p:cNvPr>
+          <p:cNvSpPr>
+            <a:spLocks noGrp="1"/>
+          </p:cNvSpPr>
+          <p:nvPr>
+            <p:ph type="sldNum" sz="quarter" idx="5"/>
+          </p:nvPr>
+        </p:nvSpPr>
+        <p:spPr/>
+        <p:txBody>
+          <a:bodyPr/>
+          <a:lstStyle/>
+          <a:p>
+            <a:fld id="{789453B0-9DF3-4847-AF80-E61FDDFE7134}" type="slidenum">
+              <a:rPr lang="zh-TW" altLang="en-US" smtClean="0"/>
+              <a:t>6</a:t>
+            </a:fld>
+            <a:endParaRPr lang="zh-TW" altLang="en-US"/>
+          </a:p>
+        </p:txBody>
+      </p:sp>
+    </p:spTree>
+    <p:extLst>
+      <p:ext uri="{BB962C8B-B14F-4D97-AF65-F5344CB8AC3E}">
+        <p14:creationId xmlns:p14="http://schemas.microsoft.com/office/powerpoint/2010/main" val="2091376735"/>
+      </p:ext>
+    </p:extLst>
+  </p:cSld>
+  <p:clrMapOvr>
+    <a:masterClrMapping/>
+  </p:clrMapOvr>
+</p:notes>
+</file>
+
+<file path=ppt/notesSlides/notesSlide6.xml><?xml version="1.0" encoding="utf-8"?>
+<p:notes xmlns:a="http://schemas.openxmlformats.org/drawingml/2006/main" xmlns:r="http://schemas.openxmlformats.org/officeDocument/2006/relationships" xmlns:p="http://schemas.openxmlformats.org/presentationml/2006/main">
+  <p:cSld>
+    <p:spTree>
+      <p:nvGrpSpPr>
+        <p:cNvPr id="1" name="">
+          <a:extLst>
+            <a:ext uri="{FF2B5EF4-FFF2-40B4-BE49-F238E27FC236}">
+              <a16:creationId xmlns:a16="http://schemas.microsoft.com/office/drawing/2014/main" id="{5F59202F-9387-7A82-3C00-A79EE2FC2293}"/>
+            </a:ext>
+          </a:extLst>
+        </p:cNvPr>
+        <p:cNvGrpSpPr/>
+        <p:nvPr/>
+      </p:nvGrpSpPr>
+      <p:grpSpPr>
+        <a:xfrm>
+          <a:off x="0" y="0"/>
+          <a:ext cx="0" cy="0"/>
+          <a:chOff x="0" y="0"/>
+          <a:chExt cx="0" cy="0"/>
+        </a:xfrm>
+      </p:grpSpPr>
+      <p:sp>
+        <p:nvSpPr>
+          <p:cNvPr id="2" name="Slide Image Placeholder 1">
+            <a:extLst>
+              <a:ext uri="{FF2B5EF4-FFF2-40B4-BE49-F238E27FC236}">
+                <a16:creationId xmlns:a16="http://schemas.microsoft.com/office/drawing/2014/main" id="{F6EEC70E-446E-7DEC-1237-6EB0F15995FA}"/>
+              </a:ext>
+            </a:extLst>
+          </p:cNvPr>
+          <p:cNvSpPr>
+            <a:spLocks noGrp="1" noRot="1" noChangeAspect="1"/>
+          </p:cNvSpPr>
+          <p:nvPr>
+            <p:ph type="sldImg"/>
+          </p:nvPr>
+        </p:nvSpPr>
+        <p:spPr/>
+      </p:sp>
+      <p:sp>
+        <p:nvSpPr>
+          <p:cNvPr id="3" name="Notes Placeholder 2">
+            <a:extLst>
+              <a:ext uri="{FF2B5EF4-FFF2-40B4-BE49-F238E27FC236}">
+                <a16:creationId xmlns:a16="http://schemas.microsoft.com/office/drawing/2014/main" id="{DD62E333-41F5-BA01-02CA-6EF1A5F03255}"/>
+              </a:ext>
+            </a:extLst>
+          </p:cNvPr>
+          <p:cNvSpPr>
+            <a:spLocks noGrp="1"/>
+          </p:cNvSpPr>
+          <p:nvPr>
+            <p:ph type="body" idx="1"/>
+          </p:nvPr>
+        </p:nvSpPr>
+        <p:spPr/>
+        <p:txBody>
+          <a:bodyPr/>
+          <a:lstStyle/>
+          <a:p>
+            <a:endParaRPr lang="en-US" dirty="0"/>
+          </a:p>
+        </p:txBody>
+      </p:sp>
+      <p:sp>
+        <p:nvSpPr>
+          <p:cNvPr id="4" name="Slide Number Placeholder 3">
+            <a:extLst>
+              <a:ext uri="{FF2B5EF4-FFF2-40B4-BE49-F238E27FC236}">
+                <a16:creationId xmlns:a16="http://schemas.microsoft.com/office/drawing/2014/main" id="{3A33A6D3-4694-9A15-99D2-0FEAB05BF10E}"/>
+              </a:ext>
+            </a:extLst>
+          </p:cNvPr>
+          <p:cNvSpPr>
+            <a:spLocks noGrp="1"/>
+          </p:cNvSpPr>
+          <p:nvPr>
+            <p:ph type="sldNum" sz="quarter" idx="5"/>
+          </p:nvPr>
+        </p:nvSpPr>
+        <p:spPr/>
+        <p:txBody>
+          <a:bodyPr/>
+          <a:lstStyle/>
+          <a:p>
+            <a:fld id="{789453B0-9DF3-4847-AF80-E61FDDFE7134}" type="slidenum">
+              <a:rPr lang="zh-TW" altLang="en-US" smtClean="0"/>
+              <a:t>7</a:t>
+            </a:fld>
+            <a:endParaRPr lang="zh-TW" altLang="en-US"/>
+          </a:p>
+        </p:txBody>
+      </p:sp>
+    </p:spTree>
+    <p:extLst>
+      <p:ext uri="{BB962C8B-B14F-4D97-AF65-F5344CB8AC3E}">
+        <p14:creationId xmlns:p14="http://schemas.microsoft.com/office/powerpoint/2010/main" val="3968712449"/>
+      </p:ext>
+    </p:extLst>
+  </p:cSld>
+  <p:clrMapOvr>
+    <a:masterClrMapping/>
+  </p:clrMapOvr>
+</p:notes>
+</file>
+
+<file path=ppt/notesSlides/notesSlide7.xml><?xml version="1.0" encoding="utf-8"?>
+<p:notes xmlns:a="http://schemas.openxmlformats.org/drawingml/2006/main" xmlns:r="http://schemas.openxmlformats.org/officeDocument/2006/relationships" xmlns:p="http://schemas.openxmlformats.org/presentationml/2006/main">
+  <p:cSld>
+    <p:spTree>
+      <p:nvGrpSpPr>
+        <p:cNvPr id="1" name="">
+          <a:extLst>
+            <a:ext uri="{FF2B5EF4-FFF2-40B4-BE49-F238E27FC236}">
+              <a16:creationId xmlns:a16="http://schemas.microsoft.com/office/drawing/2014/main" id="{D65654A6-9ABC-7240-48AC-7D6134E00296}"/>
+            </a:ext>
+          </a:extLst>
+        </p:cNvPr>
+        <p:cNvGrpSpPr/>
+        <p:nvPr/>
+      </p:nvGrpSpPr>
+      <p:grpSpPr>
+        <a:xfrm>
+          <a:off x="0" y="0"/>
+          <a:ext cx="0" cy="0"/>
+          <a:chOff x="0" y="0"/>
+          <a:chExt cx="0" cy="0"/>
+        </a:xfrm>
+      </p:grpSpPr>
+      <p:sp>
+        <p:nvSpPr>
+          <p:cNvPr id="2" name="Slide Image Placeholder 1">
+            <a:extLst>
+              <a:ext uri="{FF2B5EF4-FFF2-40B4-BE49-F238E27FC236}">
+                <a16:creationId xmlns:a16="http://schemas.microsoft.com/office/drawing/2014/main" id="{722091BA-E33B-B307-9981-DABB9BBE4374}"/>
+              </a:ext>
+            </a:extLst>
+          </p:cNvPr>
+          <p:cNvSpPr>
+            <a:spLocks noGrp="1" noRot="1" noChangeAspect="1"/>
+          </p:cNvSpPr>
+          <p:nvPr>
+            <p:ph type="sldImg"/>
+          </p:nvPr>
+        </p:nvSpPr>
+        <p:spPr/>
+      </p:sp>
+      <p:sp>
+        <p:nvSpPr>
+          <p:cNvPr id="3" name="Notes Placeholder 2">
+            <a:extLst>
+              <a:ext uri="{FF2B5EF4-FFF2-40B4-BE49-F238E27FC236}">
+                <a16:creationId xmlns:a16="http://schemas.microsoft.com/office/drawing/2014/main" id="{C52F6AB0-0BEE-8E5C-C386-BD4AAAAA76A9}"/>
+              </a:ext>
+            </a:extLst>
+          </p:cNvPr>
+          <p:cNvSpPr>
+            <a:spLocks noGrp="1"/>
+          </p:cNvSpPr>
+          <p:nvPr>
+            <p:ph type="body" idx="1"/>
+          </p:nvPr>
+        </p:nvSpPr>
+        <p:spPr/>
+        <p:txBody>
+          <a:bodyPr/>
+          <a:lstStyle/>
+          <a:p>
+            <a:endParaRPr lang="en-US" dirty="0"/>
+          </a:p>
+        </p:txBody>
+      </p:sp>
+      <p:sp>
+        <p:nvSpPr>
+          <p:cNvPr id="4" name="Slide Number Placeholder 3">
+            <a:extLst>
+              <a:ext uri="{FF2B5EF4-FFF2-40B4-BE49-F238E27FC236}">
+                <a16:creationId xmlns:a16="http://schemas.microsoft.com/office/drawing/2014/main" id="{02F6304A-1A25-29B8-4904-3B6B7CFB8BCA}"/>
+              </a:ext>
+            </a:extLst>
+          </p:cNvPr>
+          <p:cNvSpPr>
+            <a:spLocks noGrp="1"/>
+          </p:cNvSpPr>
+          <p:nvPr>
+            <p:ph type="sldNum" sz="quarter" idx="5"/>
+          </p:nvPr>
+        </p:nvSpPr>
+        <p:spPr/>
+        <p:txBody>
+          <a:bodyPr/>
+          <a:lstStyle/>
+          <a:p>
+            <a:fld id="{789453B0-9DF3-4847-AF80-E61FDDFE7134}" type="slidenum">
+              <a:rPr lang="zh-TW" altLang="en-US" smtClean="0"/>
+              <a:t>8</a:t>
+            </a:fld>
+            <a:endParaRPr lang="zh-TW" altLang="en-US"/>
+          </a:p>
+        </p:txBody>
+      </p:sp>
+    </p:spTree>
+    <p:extLst>
+      <p:ext uri="{BB962C8B-B14F-4D97-AF65-F5344CB8AC3E}">
+        <p14:creationId xmlns:p14="http://schemas.microsoft.com/office/powerpoint/2010/main" val="2471982083"/>
+      </p:ext>
+    </p:extLst>
+  </p:cSld>
+  <p:clrMapOvr>
+    <a:masterClrMapping/>
+  </p:clrMapOvr>
+</p:notes>
+</file>
+
+<file path=ppt/notesSlides/notesSlide8.xml><?xml version="1.0" encoding="utf-8"?>
+<p:notes xmlns:a="http://schemas.openxmlformats.org/drawingml/2006/main" xmlns:r="http://schemas.openxmlformats.org/officeDocument/2006/relationships" xmlns:p="http://schemas.openxmlformats.org/presentationml/2006/main">
+  <p:cSld>
+    <p:spTree>
+      <p:nvGrpSpPr>
+        <p:cNvPr id="1" name="">
+          <a:extLst>
+            <a:ext uri="{FF2B5EF4-FFF2-40B4-BE49-F238E27FC236}">
+              <a16:creationId xmlns:a16="http://schemas.microsoft.com/office/drawing/2014/main" id="{B4DE1C82-5100-5AF8-89F9-44063969C7A9}"/>
+            </a:ext>
+          </a:extLst>
+        </p:cNvPr>
+        <p:cNvGrpSpPr/>
+        <p:nvPr/>
+      </p:nvGrpSpPr>
+      <p:grpSpPr>
+        <a:xfrm>
+          <a:off x="0" y="0"/>
+          <a:ext cx="0" cy="0"/>
+          <a:chOff x="0" y="0"/>
+          <a:chExt cx="0" cy="0"/>
+        </a:xfrm>
+      </p:grpSpPr>
+      <p:sp>
+        <p:nvSpPr>
+          <p:cNvPr id="2" name="Slide Image Placeholder 1">
+            <a:extLst>
+              <a:ext uri="{FF2B5EF4-FFF2-40B4-BE49-F238E27FC236}">
+                <a16:creationId xmlns:a16="http://schemas.microsoft.com/office/drawing/2014/main" id="{A0EBF9D2-3213-BBCE-DB7C-01B96D98ADC7}"/>
+              </a:ext>
+            </a:extLst>
+          </p:cNvPr>
+          <p:cNvSpPr>
+            <a:spLocks noGrp="1" noRot="1" noChangeAspect="1"/>
+          </p:cNvSpPr>
+          <p:nvPr>
+            <p:ph type="sldImg"/>
+          </p:nvPr>
+        </p:nvSpPr>
+        <p:spPr/>
+      </p:sp>
+      <p:sp>
+        <p:nvSpPr>
+          <p:cNvPr id="3" name="Notes Placeholder 2">
+            <a:extLst>
+              <a:ext uri="{FF2B5EF4-FFF2-40B4-BE49-F238E27FC236}">
+                <a16:creationId xmlns:a16="http://schemas.microsoft.com/office/drawing/2014/main" id="{D8A1743F-9EEB-68EE-BB99-45327223E1DE}"/>
+              </a:ext>
+            </a:extLst>
+          </p:cNvPr>
+          <p:cNvSpPr>
+            <a:spLocks noGrp="1"/>
+          </p:cNvSpPr>
+          <p:nvPr>
+            <p:ph type="body" idx="1"/>
+          </p:nvPr>
+        </p:nvSpPr>
+        <p:spPr/>
+        <p:txBody>
+          <a:bodyPr/>
+          <a:lstStyle/>
+          <a:p>
+            <a:endParaRPr lang="en-US" dirty="0"/>
+          </a:p>
+        </p:txBody>
+      </p:sp>
+      <p:sp>
+        <p:nvSpPr>
+          <p:cNvPr id="4" name="Slide Number Placeholder 3">
+            <a:extLst>
+              <a:ext uri="{FF2B5EF4-FFF2-40B4-BE49-F238E27FC236}">
+                <a16:creationId xmlns:a16="http://schemas.microsoft.com/office/drawing/2014/main" id="{01DEE858-C96C-13A1-D5FF-E7A98AFD0C02}"/>
+              </a:ext>
+            </a:extLst>
+          </p:cNvPr>
+          <p:cNvSpPr>
+            <a:spLocks noGrp="1"/>
+          </p:cNvSpPr>
+          <p:nvPr>
+            <p:ph type="sldNum" sz="quarter" idx="5"/>
+          </p:nvPr>
+        </p:nvSpPr>
+        <p:spPr/>
+        <p:txBody>
+          <a:bodyPr/>
+          <a:lstStyle/>
+          <a:p>
+            <a:fld id="{789453B0-9DF3-4847-AF80-E61FDDFE7134}" type="slidenum">
+              <a:rPr lang="zh-TW" altLang="en-US" smtClean="0"/>
+              <a:t>9</a:t>
+            </a:fld>
+            <a:endParaRPr lang="zh-TW" altLang="en-US"/>
+          </a:p>
+        </p:txBody>
+      </p:sp>
+    </p:spTree>
+    <p:extLst>
+      <p:ext uri="{BB962C8B-B14F-4D97-AF65-F5344CB8AC3E}">
+        <p14:creationId xmlns:p14="http://schemas.microsoft.com/office/powerpoint/2010/main" val="193051853"/>
+      </p:ext>
+    </p:extLst>
+  </p:cSld>
+  <p:clrMapOvr>
+    <a:masterClrMapping/>
+  </p:clrMapOvr>
+</p:notes>
+</file>
+
+<file path=ppt/notesSlides/notesSlide9.xml><?xml version="1.0" encoding="utf-8"?>
+<p:notes xmlns:a="http://schemas.openxmlformats.org/drawingml/2006/main" xmlns:r="http://schemas.openxmlformats.org/officeDocument/2006/relationships" xmlns:p="http://schemas.openxmlformats.org/presentationml/2006/main">
+  <p:cSld>
+    <p:spTree>
+      <p:nvGrpSpPr>
+        <p:cNvPr id="1" name="">
+          <a:extLst>
+            <a:ext uri="{FF2B5EF4-FFF2-40B4-BE49-F238E27FC236}">
+              <a16:creationId xmlns:a16="http://schemas.microsoft.com/office/drawing/2014/main" id="{64869BB3-5B67-B67C-1BD2-1BE72F51A66B}"/>
+            </a:ext>
+          </a:extLst>
+        </p:cNvPr>
+        <p:cNvGrpSpPr/>
+        <p:nvPr/>
+      </p:nvGrpSpPr>
+      <p:grpSpPr>
+        <a:xfrm>
+          <a:off x="0" y="0"/>
+          <a:ext cx="0" cy="0"/>
+          <a:chOff x="0" y="0"/>
+          <a:chExt cx="0" cy="0"/>
+        </a:xfrm>
+      </p:grpSpPr>
+      <p:sp>
+        <p:nvSpPr>
+          <p:cNvPr id="2" name="Slide Image Placeholder 1">
+            <a:extLst>
+              <a:ext uri="{FF2B5EF4-FFF2-40B4-BE49-F238E27FC236}">
+                <a16:creationId xmlns:a16="http://schemas.microsoft.com/office/drawing/2014/main" id="{D490D240-5E40-8BA4-902A-1AE8FAF7A7FA}"/>
+              </a:ext>
+            </a:extLst>
+          </p:cNvPr>
+          <p:cNvSpPr>
+            <a:spLocks noGrp="1" noRot="1" noChangeAspect="1"/>
+          </p:cNvSpPr>
+          <p:nvPr>
+            <p:ph type="sldImg"/>
+          </p:nvPr>
+        </p:nvSpPr>
+        <p:spPr/>
+      </p:sp>
+      <p:sp>
+        <p:nvSpPr>
+          <p:cNvPr id="3" name="Notes Placeholder 2">
+            <a:extLst>
+              <a:ext uri="{FF2B5EF4-FFF2-40B4-BE49-F238E27FC236}">
+                <a16:creationId xmlns:a16="http://schemas.microsoft.com/office/drawing/2014/main" id="{30F92DEA-D36B-8610-DDF0-AFCBCE527405}"/>
+              </a:ext>
+            </a:extLst>
+          </p:cNvPr>
+          <p:cNvSpPr>
+            <a:spLocks noGrp="1"/>
+          </p:cNvSpPr>
+          <p:nvPr>
+            <p:ph type="body" idx="1"/>
+          </p:nvPr>
+        </p:nvSpPr>
+        <p:spPr/>
+        <p:txBody>
+          <a:bodyPr/>
+          <a:lstStyle/>
+          <a:p>
+            <a:endParaRPr lang="en-US" dirty="0"/>
+          </a:p>
+        </p:txBody>
+      </p:sp>
+      <p:sp>
+        <p:nvSpPr>
+          <p:cNvPr id="4" name="Slide Number Placeholder 3">
+            <a:extLst>
+              <a:ext uri="{FF2B5EF4-FFF2-40B4-BE49-F238E27FC236}">
+                <a16:creationId xmlns:a16="http://schemas.microsoft.com/office/drawing/2014/main" id="{8F095EF2-66AE-F4D2-AB0A-453A6DE0C1AF}"/>
+              </a:ext>
+            </a:extLst>
+          </p:cNvPr>
+          <p:cNvSpPr>
+            <a:spLocks noGrp="1"/>
+          </p:cNvSpPr>
+          <p:nvPr>
+            <p:ph type="sldNum" sz="quarter" idx="5"/>
+          </p:nvPr>
+        </p:nvSpPr>
+        <p:spPr/>
+        <p:txBody>
+          <a:bodyPr/>
+          <a:lstStyle/>
+          <a:p>
+            <a:fld id="{789453B0-9DF3-4847-AF80-E61FDDFE7134}" type="slidenum">
+              <a:rPr lang="zh-TW" altLang="en-US" smtClean="0"/>
+              <a:t>10</a:t>
+            </a:fld>
+            <a:endParaRPr lang="zh-TW" altLang="en-US"/>
+          </a:p>
+        </p:txBody>
+      </p:sp>
+    </p:spTree>
+    <p:extLst>
+      <p:ext uri="{BB962C8B-B14F-4D97-AF65-F5344CB8AC3E}">
+        <p14:creationId xmlns:p14="http://schemas.microsoft.com/office/powerpoint/2010/main" val="230103981"/>
+      </p:ext>
+    </p:extLst>
+  </p:cSld>
+  <p:clrMapOvr>
+    <a:masterClrMapping/>
+  </p:clrMapOvr>
+</p:notes>
+</file>
+
 <file path=ppt/slideLayouts/slideLayout1.xml><?xml version="1.0" encoding="utf-8"?>
 <p:sldLayout xmlns:a="http://schemas.openxmlformats.org/drawingml/2006/main" xmlns:r="http://schemas.openxmlformats.org/officeDocument/2006/relationships" xmlns:p="http://schemas.openxmlformats.org/presentationml/2006/main" type="title" preserve="1">
   <p:cSld name="標題投影片">
@@ -704,7 +2638,7 @@
           <a:lstStyle/>
           <a:p>
             <a:r>
-              <a:rPr lang="en-US" altLang="zh-TW" smtClean="0"/>
+              <a:rPr lang="en-US" altLang="zh-TW"/>
               <a:t>Click to edit Master title style</a:t>
             </a:r>
             <a:endParaRPr lang="zh-TW" altLang="en-US"/>
@@ -823,7 +2757,7 @@
           </a:lstStyle>
           <a:p>
             <a:r>
-              <a:rPr lang="en-US" altLang="zh-TW" smtClean="0"/>
+              <a:rPr lang="en-US" altLang="zh-TW"/>
               <a:t>Click to edit Master subtitle style</a:t>
             </a:r>
             <a:endParaRPr lang="zh-TW" altLang="en-US"/>
@@ -946,7 +2880,7 @@
           <a:lstStyle/>
           <a:p>
             <a:r>
-              <a:rPr lang="en-US" altLang="zh-TW" smtClean="0"/>
+              <a:rPr lang="en-US" altLang="zh-TW"/>
               <a:t>Click to edit Master title style</a:t>
             </a:r>
             <a:endParaRPr lang="zh-TW" altLang="en-US"/>
@@ -970,35 +2904,35 @@
           <a:p>
             <a:pPr lvl="0"/>
             <a:r>
-              <a:rPr lang="en-US" altLang="zh-TW" smtClean="0"/>
+              <a:rPr lang="en-US" altLang="zh-TW"/>
               <a:t>Edit Master text styles</a:t>
             </a:r>
           </a:p>
           <a:p>
             <a:pPr lvl="1"/>
             <a:r>
-              <a:rPr lang="en-US" altLang="zh-TW" smtClean="0"/>
+              <a:rPr lang="en-US" altLang="zh-TW"/>
               <a:t>Second level</a:t>
             </a:r>
           </a:p>
           <a:p>
             <a:pPr lvl="2"/>
             <a:r>
-              <a:rPr lang="en-US" altLang="zh-TW" smtClean="0"/>
+              <a:rPr lang="en-US" altLang="zh-TW"/>
               <a:t>Third level</a:t>
             </a:r>
           </a:p>
           <a:p>
             <a:pPr lvl="3"/>
             <a:r>
-              <a:rPr lang="en-US" altLang="zh-TW" smtClean="0"/>
+              <a:rPr lang="en-US" altLang="zh-TW"/>
               <a:t>Fourth level</a:t>
             </a:r>
           </a:p>
           <a:p>
             <a:pPr lvl="4"/>
             <a:r>
-              <a:rPr lang="en-US" altLang="zh-TW" smtClean="0"/>
+              <a:rPr lang="en-US" altLang="zh-TW"/>
               <a:t>Fifth level</a:t>
             </a:r>
             <a:endParaRPr lang="zh-TW" altLang="en-US"/>
@@ -1126,7 +3060,7 @@
           <a:lstStyle/>
           <a:p>
             <a:r>
-              <a:rPr lang="en-US" altLang="zh-TW" smtClean="0"/>
+              <a:rPr lang="en-US" altLang="zh-TW"/>
               <a:t>Click to edit Master title style</a:t>
             </a:r>
             <a:endParaRPr lang="zh-TW" altLang="en-US"/>
@@ -1155,35 +3089,35 @@
           <a:p>
             <a:pPr lvl="0"/>
             <a:r>
-              <a:rPr lang="en-US" altLang="zh-TW" smtClean="0"/>
+              <a:rPr lang="en-US" altLang="zh-TW"/>
               <a:t>Edit Master text styles</a:t>
             </a:r>
           </a:p>
           <a:p>
             <a:pPr lvl="1"/>
             <a:r>
-              <a:rPr lang="en-US" altLang="zh-TW" smtClean="0"/>
+              <a:rPr lang="en-US" altLang="zh-TW"/>
               <a:t>Second level</a:t>
             </a:r>
           </a:p>
           <a:p>
             <a:pPr lvl="2"/>
             <a:r>
-              <a:rPr lang="en-US" altLang="zh-TW" smtClean="0"/>
+              <a:rPr lang="en-US" altLang="zh-TW"/>
               <a:t>Third level</a:t>
             </a:r>
           </a:p>
           <a:p>
             <a:pPr lvl="3"/>
             <a:r>
-              <a:rPr lang="en-US" altLang="zh-TW" smtClean="0"/>
+              <a:rPr lang="en-US" altLang="zh-TW"/>
               <a:t>Fourth level</a:t>
             </a:r>
           </a:p>
           <a:p>
             <a:pPr lvl="4"/>
             <a:r>
-              <a:rPr lang="en-US" altLang="zh-TW" smtClean="0"/>
+              <a:rPr lang="en-US" altLang="zh-TW"/>
               <a:t>Fifth level</a:t>
             </a:r>
             <a:endParaRPr lang="zh-TW" altLang="en-US"/>
@@ -1306,7 +3240,7 @@
           <a:lstStyle/>
           <a:p>
             <a:r>
-              <a:rPr lang="en-US" altLang="zh-TW" smtClean="0"/>
+              <a:rPr lang="en-US" altLang="zh-TW"/>
               <a:t>Click to edit Master title style</a:t>
             </a:r>
             <a:endParaRPr lang="zh-TW" altLang="en-US"/>
@@ -1330,35 +3264,35 @@
           <a:p>
             <a:pPr lvl="0"/>
             <a:r>
-              <a:rPr lang="en-US" altLang="zh-TW" smtClean="0"/>
+              <a:rPr lang="en-US" altLang="zh-TW"/>
               <a:t>Edit Master text styles</a:t>
             </a:r>
           </a:p>
           <a:p>
             <a:pPr lvl="1"/>
             <a:r>
-              <a:rPr lang="en-US" altLang="zh-TW" smtClean="0"/>
+              <a:rPr lang="en-US" altLang="zh-TW"/>
               <a:t>Second level</a:t>
             </a:r>
           </a:p>
           <a:p>
             <a:pPr lvl="2"/>
             <a:r>
-              <a:rPr lang="en-US" altLang="zh-TW" smtClean="0"/>
+              <a:rPr lang="en-US" altLang="zh-TW"/>
               <a:t>Third level</a:t>
             </a:r>
           </a:p>
           <a:p>
             <a:pPr lvl="3"/>
             <a:r>
-              <a:rPr lang="en-US" altLang="zh-TW" smtClean="0"/>
+              <a:rPr lang="en-US" altLang="zh-TW"/>
               <a:t>Fourth level</a:t>
             </a:r>
           </a:p>
           <a:p>
             <a:pPr lvl="4"/>
             <a:r>
-              <a:rPr lang="en-US" altLang="zh-TW" smtClean="0"/>
+              <a:rPr lang="en-US" altLang="zh-TW"/>
               <a:t>Fifth level</a:t>
             </a:r>
             <a:endParaRPr lang="zh-TW" altLang="en-US"/>
@@ -1490,7 +3424,7 @@
           </a:lstStyle>
           <a:p>
             <a:r>
-              <a:rPr lang="en-US" altLang="zh-TW" smtClean="0"/>
+              <a:rPr lang="en-US" altLang="zh-TW"/>
               <a:t>Click to edit Master title style</a:t>
             </a:r>
             <a:endParaRPr lang="zh-TW" altLang="en-US"/>
@@ -1610,7 +3544,7 @@
           <a:p>
             <a:pPr lvl="0"/>
             <a:r>
-              <a:rPr lang="en-US" altLang="zh-TW" smtClean="0"/>
+              <a:rPr lang="en-US" altLang="zh-TW"/>
               <a:t>Edit Master text styles</a:t>
             </a:r>
           </a:p>
@@ -1732,7 +3666,7 @@
           <a:lstStyle/>
           <a:p>
             <a:r>
-              <a:rPr lang="en-US" altLang="zh-TW" smtClean="0"/>
+              <a:rPr lang="en-US" altLang="zh-TW"/>
               <a:t>Click to edit Master title style</a:t>
             </a:r>
             <a:endParaRPr lang="zh-TW" altLang="en-US"/>
@@ -1789,35 +3723,35 @@
           <a:p>
             <a:pPr lvl="0"/>
             <a:r>
-              <a:rPr lang="en-US" altLang="zh-TW" smtClean="0"/>
+              <a:rPr lang="en-US" altLang="zh-TW"/>
               <a:t>Edit Master text styles</a:t>
             </a:r>
           </a:p>
           <a:p>
             <a:pPr lvl="1"/>
             <a:r>
-              <a:rPr lang="en-US" altLang="zh-TW" smtClean="0"/>
+              <a:rPr lang="en-US" altLang="zh-TW"/>
               <a:t>Second level</a:t>
             </a:r>
           </a:p>
           <a:p>
             <a:pPr lvl="2"/>
             <a:r>
-              <a:rPr lang="en-US" altLang="zh-TW" smtClean="0"/>
+              <a:rPr lang="en-US" altLang="zh-TW"/>
               <a:t>Third level</a:t>
             </a:r>
           </a:p>
           <a:p>
             <a:pPr lvl="3"/>
             <a:r>
-              <a:rPr lang="en-US" altLang="zh-TW" smtClean="0"/>
+              <a:rPr lang="en-US" altLang="zh-TW"/>
               <a:t>Fourth level</a:t>
             </a:r>
           </a:p>
           <a:p>
             <a:pPr lvl="4"/>
             <a:r>
-              <a:rPr lang="en-US" altLang="zh-TW" smtClean="0"/>
+              <a:rPr lang="en-US" altLang="zh-TW"/>
               <a:t>Fifth level</a:t>
             </a:r>
             <a:endParaRPr lang="zh-TW" altLang="en-US"/>
@@ -1874,35 +3808,35 @@
           <a:p>
             <a:pPr lvl="0"/>
             <a:r>
-              <a:rPr lang="en-US" altLang="zh-TW" smtClean="0"/>
+              <a:rPr lang="en-US" altLang="zh-TW"/>
               <a:t>Edit Master text styles</a:t>
             </a:r>
           </a:p>
           <a:p>
             <a:pPr lvl="1"/>
             <a:r>
-              <a:rPr lang="en-US" altLang="zh-TW" smtClean="0"/>
+              <a:rPr lang="en-US" altLang="zh-TW"/>
               <a:t>Second level</a:t>
             </a:r>
           </a:p>
           <a:p>
             <a:pPr lvl="2"/>
             <a:r>
-              <a:rPr lang="en-US" altLang="zh-TW" smtClean="0"/>
+              <a:rPr lang="en-US" altLang="zh-TW"/>
               <a:t>Third level</a:t>
             </a:r>
           </a:p>
           <a:p>
             <a:pPr lvl="3"/>
             <a:r>
-              <a:rPr lang="en-US" altLang="zh-TW" smtClean="0"/>
+              <a:rPr lang="en-US" altLang="zh-TW"/>
               <a:t>Fourth level</a:t>
             </a:r>
           </a:p>
           <a:p>
             <a:pPr lvl="4"/>
             <a:r>
-              <a:rPr lang="en-US" altLang="zh-TW" smtClean="0"/>
+              <a:rPr lang="en-US" altLang="zh-TW"/>
               <a:t>Fifth level</a:t>
             </a:r>
             <a:endParaRPr lang="zh-TW" altLang="en-US"/>
@@ -2029,7 +3963,7 @@
           </a:lstStyle>
           <a:p>
             <a:r>
-              <a:rPr lang="en-US" altLang="zh-TW" smtClean="0"/>
+              <a:rPr lang="en-US" altLang="zh-TW"/>
               <a:t>Click to edit Master title style</a:t>
             </a:r>
             <a:endParaRPr lang="zh-TW" altLang="en-US"/>
@@ -2095,7 +4029,7 @@
           <a:p>
             <a:pPr lvl="0"/>
             <a:r>
-              <a:rPr lang="en-US" altLang="zh-TW" smtClean="0"/>
+              <a:rPr lang="en-US" altLang="zh-TW"/>
               <a:t>Edit Master text styles</a:t>
             </a:r>
           </a:p>
@@ -2151,35 +4085,35 @@
           <a:p>
             <a:pPr lvl="0"/>
             <a:r>
-              <a:rPr lang="en-US" altLang="zh-TW" smtClean="0"/>
+              <a:rPr lang="en-US" altLang="zh-TW"/>
               <a:t>Edit Master text styles</a:t>
             </a:r>
           </a:p>
           <a:p>
             <a:pPr lvl="1"/>
             <a:r>
-              <a:rPr lang="en-US" altLang="zh-TW" smtClean="0"/>
+              <a:rPr lang="en-US" altLang="zh-TW"/>
               <a:t>Second level</a:t>
             </a:r>
           </a:p>
           <a:p>
             <a:pPr lvl="2"/>
             <a:r>
-              <a:rPr lang="en-US" altLang="zh-TW" smtClean="0"/>
+              <a:rPr lang="en-US" altLang="zh-TW"/>
               <a:t>Third level</a:t>
             </a:r>
           </a:p>
           <a:p>
             <a:pPr lvl="3"/>
             <a:r>
-              <a:rPr lang="en-US" altLang="zh-TW" smtClean="0"/>
+              <a:rPr lang="en-US" altLang="zh-TW"/>
               <a:t>Fourth level</a:t>
             </a:r>
           </a:p>
           <a:p>
             <a:pPr lvl="4"/>
             <a:r>
-              <a:rPr lang="en-US" altLang="zh-TW" smtClean="0"/>
+              <a:rPr lang="en-US" altLang="zh-TW"/>
               <a:t>Fifth level</a:t>
             </a:r>
             <a:endParaRPr lang="zh-TW" altLang="en-US"/>
@@ -2245,7 +4179,7 @@
           <a:p>
             <a:pPr lvl="0"/>
             <a:r>
-              <a:rPr lang="en-US" altLang="zh-TW" smtClean="0"/>
+              <a:rPr lang="en-US" altLang="zh-TW"/>
               <a:t>Edit Master text styles</a:t>
             </a:r>
           </a:p>
@@ -2301,35 +4235,35 @@
           <a:p>
             <a:pPr lvl="0"/>
             <a:r>
-              <a:rPr lang="en-US" altLang="zh-TW" smtClean="0"/>
+              <a:rPr lang="en-US" altLang="zh-TW"/>
               <a:t>Edit Master text styles</a:t>
             </a:r>
           </a:p>
           <a:p>
             <a:pPr lvl="1"/>
             <a:r>
-              <a:rPr lang="en-US" altLang="zh-TW" smtClean="0"/>
+              <a:rPr lang="en-US" altLang="zh-TW"/>
               <a:t>Second level</a:t>
             </a:r>
           </a:p>
           <a:p>
             <a:pPr lvl="2"/>
             <a:r>
-              <a:rPr lang="en-US" altLang="zh-TW" smtClean="0"/>
+              <a:rPr lang="en-US" altLang="zh-TW"/>
               <a:t>Third level</a:t>
             </a:r>
           </a:p>
           <a:p>
             <a:pPr lvl="3"/>
             <a:r>
-              <a:rPr lang="en-US" altLang="zh-TW" smtClean="0"/>
+              <a:rPr lang="en-US" altLang="zh-TW"/>
               <a:t>Fourth level</a:t>
             </a:r>
           </a:p>
           <a:p>
             <a:pPr lvl="4"/>
             <a:r>
-              <a:rPr lang="en-US" altLang="zh-TW" smtClean="0"/>
+              <a:rPr lang="en-US" altLang="zh-TW"/>
               <a:t>Fifth level</a:t>
             </a:r>
             <a:endParaRPr lang="zh-TW" altLang="en-US"/>
@@ -2452,7 +4386,7 @@
           <a:lstStyle/>
           <a:p>
             <a:r>
-              <a:rPr lang="en-US" altLang="zh-TW" smtClean="0"/>
+              <a:rPr lang="en-US" altLang="zh-TW"/>
               <a:t>Click to edit Master title style</a:t>
             </a:r>
             <a:endParaRPr lang="zh-TW" altLang="en-US"/>
@@ -2684,7 +4618,7 @@
           </a:lstStyle>
           <a:p>
             <a:r>
-              <a:rPr lang="en-US" altLang="zh-TW" smtClean="0"/>
+              <a:rPr lang="en-US" altLang="zh-TW"/>
               <a:t>Click to edit Master title style</a:t>
             </a:r>
             <a:endParaRPr lang="zh-TW" altLang="en-US"/>
@@ -2741,35 +4675,35 @@
           <a:p>
             <a:pPr lvl="0"/>
             <a:r>
-              <a:rPr lang="en-US" altLang="zh-TW" smtClean="0"/>
+              <a:rPr lang="en-US" altLang="zh-TW"/>
               <a:t>Edit Master text styles</a:t>
             </a:r>
           </a:p>
           <a:p>
             <a:pPr lvl="1"/>
             <a:r>
-              <a:rPr lang="en-US" altLang="zh-TW" smtClean="0"/>
+              <a:rPr lang="en-US" altLang="zh-TW"/>
               <a:t>Second level</a:t>
             </a:r>
           </a:p>
           <a:p>
             <a:pPr lvl="2"/>
             <a:r>
-              <a:rPr lang="en-US" altLang="zh-TW" smtClean="0"/>
+              <a:rPr lang="en-US" altLang="zh-TW"/>
               <a:t>Third level</a:t>
             </a:r>
           </a:p>
           <a:p>
             <a:pPr lvl="3"/>
             <a:r>
-              <a:rPr lang="en-US" altLang="zh-TW" smtClean="0"/>
+              <a:rPr lang="en-US" altLang="zh-TW"/>
               <a:t>Fourth level</a:t>
             </a:r>
           </a:p>
           <a:p>
             <a:pPr lvl="4"/>
             <a:r>
-              <a:rPr lang="en-US" altLang="zh-TW" smtClean="0"/>
+              <a:rPr lang="en-US" altLang="zh-TW"/>
               <a:t>Fifth level</a:t>
             </a:r>
             <a:endParaRPr lang="zh-TW" altLang="en-US"/>
@@ -2835,7 +4769,7 @@
           <a:p>
             <a:pPr lvl="0"/>
             <a:r>
-              <a:rPr lang="en-US" altLang="zh-TW" smtClean="0"/>
+              <a:rPr lang="en-US" altLang="zh-TW"/>
               <a:t>Edit Master text styles</a:t>
             </a:r>
           </a:p>
@@ -2966,7 +4900,7 @@
           </a:lstStyle>
           <a:p>
             <a:r>
-              <a:rPr lang="en-US" altLang="zh-TW" smtClean="0"/>
+              <a:rPr lang="en-US" altLang="zh-TW"/>
               <a:t>Click to edit Master title style</a:t>
             </a:r>
             <a:endParaRPr lang="zh-TW" altLang="en-US"/>
@@ -3031,7 +4965,7 @@
           </a:lstStyle>
           <a:p>
             <a:r>
-              <a:rPr lang="en-US" altLang="zh-TW" smtClean="0"/>
+              <a:rPr lang="en-US" altLang="zh-TW"/>
               <a:t>Click icon to add picture</a:t>
             </a:r>
             <a:endParaRPr lang="zh-TW" altLang="en-US"/>
@@ -3097,7 +5031,7 @@
           <a:p>
             <a:pPr lvl="0"/>
             <a:r>
-              <a:rPr lang="en-US" altLang="zh-TW" smtClean="0"/>
+              <a:rPr lang="en-US" altLang="zh-TW"/>
               <a:t>Edit Master text styles</a:t>
             </a:r>
           </a:p>
@@ -3239,10 +5173,9 @@
           <a:lstStyle/>
           <a:p>
             <a:r>
-              <a:rPr lang="zh-TW" altLang="en-US" smtClean="0"/>
+              <a:rPr lang="zh-TW" altLang="en-US"/>
               <a:t>按一下以編輯母片標題樣式</a:t>
             </a:r>
-            <a:endParaRPr lang="zh-TW" altLang="en-US"/>
           </a:p>
         </p:txBody>
       </p:sp>
@@ -3273,38 +5206,37 @@
           <a:p>
             <a:pPr lvl="0"/>
             <a:r>
-              <a:rPr lang="zh-TW" altLang="en-US" smtClean="0"/>
+              <a:rPr lang="zh-TW" altLang="en-US"/>
               <a:t>按一下以編輯母片文字樣式</a:t>
             </a:r>
           </a:p>
           <a:p>
             <a:pPr lvl="1"/>
             <a:r>
-              <a:rPr lang="zh-TW" altLang="en-US" smtClean="0"/>
+              <a:rPr lang="zh-TW" altLang="en-US"/>
               <a:t>第二層</a:t>
             </a:r>
           </a:p>
           <a:p>
             <a:pPr lvl="2"/>
             <a:r>
-              <a:rPr lang="zh-TW" altLang="en-US" smtClean="0"/>
+              <a:rPr lang="zh-TW" altLang="en-US"/>
               <a:t>第三層</a:t>
             </a:r>
           </a:p>
           <a:p>
             <a:pPr lvl="3"/>
             <a:r>
-              <a:rPr lang="zh-TW" altLang="en-US" smtClean="0"/>
+              <a:rPr lang="zh-TW" altLang="en-US"/>
               <a:t>第四層</a:t>
             </a:r>
           </a:p>
           <a:p>
             <a:pPr lvl="4"/>
             <a:r>
-              <a:rPr lang="zh-TW" altLang="en-US" smtClean="0"/>
+              <a:rPr lang="zh-TW" altLang="en-US"/>
               <a:t>第五層</a:t>
             </a:r>
-            <a:endParaRPr lang="zh-TW" altLang="en-US"/>
           </a:p>
         </p:txBody>
       </p:sp>
@@ -3725,7 +5657,7 @@
       </p:grpSpPr>
       <p:sp>
         <p:nvSpPr>
-          <p:cNvPr id="4" name="Title 3"/>
+          <p:cNvPr id="4" name="標題 3"/>
           <p:cNvSpPr>
             <a:spLocks noGrp="1"/>
           </p:cNvSpPr>
@@ -3733,90 +5665,259 @@
             <p:ph type="title"/>
           </p:nvPr>
         </p:nvSpPr>
-        <p:spPr/>
+        <p:spPr>
+          <a:xfrm>
+            <a:off x="0" y="2660915"/>
+            <a:ext cx="12192000" cy="1143000"/>
+          </a:xfrm>
+        </p:spPr>
         <p:txBody>
           <a:bodyPr>
-            <a:normAutofit/>
+            <a:noAutofit/>
           </a:bodyPr>
           <a:lstStyle/>
           <a:p>
             <a:r>
-              <a:rPr lang="en-US" altLang="zh-CN" sz="4800" b="1" dirty="0">
+              <a:rPr lang="zh-CN" altLang="en-US" sz="5333" b="1" u="sng" dirty="0">
+                <a:solidFill>
+                  <a:srgbClr val="000066"/>
+                </a:solidFill>
+                <a:effectLst>
+                  <a:outerShdw blurRad="38100" dist="38100" dir="2700000" algn="tl">
+                    <a:srgbClr val="000000">
+                      <a:alpha val="43137"/>
+                    </a:srgbClr>
+                  </a:outerShdw>
+                </a:effectLst>
+                <a:latin typeface="微軟正黑體" pitchFamily="34" charset="-120"/>
+                <a:ea typeface="微軟正黑體" pitchFamily="34" charset="-120"/>
+              </a:rPr>
+              <a:t>宣道詩 </a:t>
+            </a:r>
+            <a:r>
+              <a:rPr lang="en-US" altLang="zh-CN" sz="5333" b="1" u="sng" dirty="0">
+                <a:solidFill>
+                  <a:srgbClr val="000066"/>
+                </a:solidFill>
+                <a:effectLst>
+                  <a:outerShdw blurRad="38100" dist="38100" dir="2700000" algn="tl">
+                    <a:srgbClr val="000000">
+                      <a:alpha val="43137"/>
+                    </a:srgbClr>
+                  </a:outerShdw>
+                </a:effectLst>
+                <a:latin typeface="微軟正黑體" pitchFamily="34" charset="-120"/>
+                <a:ea typeface="微軟正黑體" pitchFamily="34" charset="-120"/>
+              </a:rPr>
+              <a:t>244</a:t>
+            </a:r>
+            <a:br>
+              <a:rPr lang="en-US" altLang="zh-CN" sz="7200" b="1" i="1" dirty="0">
                 <a:solidFill>
                   <a:srgbClr val="660033"/>
                 </a:solidFill>
-                <a:latin typeface="Microsoft JhengHei" panose="020B0604030504040204" pitchFamily="34" charset="-120"/>
-                <a:ea typeface="Microsoft JhengHei" panose="020B0604030504040204" pitchFamily="34" charset="-120"/>
+                <a:effectLst>
+                  <a:outerShdw blurRad="38100" dist="38100" dir="2700000" algn="tl">
+                    <a:srgbClr val="000000">
+                      <a:alpha val="43137"/>
+                    </a:srgbClr>
+                  </a:outerShdw>
+                </a:effectLst>
+                <a:latin typeface="微軟正黑體" pitchFamily="34" charset="-120"/>
+                <a:ea typeface="微軟正黑體" pitchFamily="34" charset="-120"/>
               </a:rPr>
-              <a:t>【</a:t>
-            </a:r>
-            <a:r>
-              <a:rPr lang="zh-CN" altLang="en-US" sz="4800" b="1" dirty="0">
+            </a:br>
+            <a:r>
+              <a:rPr lang="zh-TW" altLang="en-US" sz="8000" b="1" dirty="0">
                 <a:solidFill>
                   <a:srgbClr val="660033"/>
                 </a:solidFill>
-                <a:latin typeface="Microsoft JhengHei" panose="020B0604030504040204" pitchFamily="34" charset="-120"/>
-                <a:ea typeface="Microsoft JhengHei" panose="020B0604030504040204" pitchFamily="34" charset="-120"/>
+                <a:effectLst>
+                  <a:outerShdw blurRad="38100" dist="38100" dir="2700000" algn="tl">
+                    <a:srgbClr val="000000">
+                      <a:alpha val="43137"/>
+                    </a:srgbClr>
+                  </a:outerShdw>
+                </a:effectLst>
+                <a:latin typeface="微軟正黑體" pitchFamily="34" charset="-120"/>
+                <a:ea typeface="微軟正黑體" pitchFamily="34" charset="-120"/>
               </a:rPr>
               <a:t>在主裏得勝</a:t>
             </a:r>
-            <a:r>
-              <a:rPr lang="en-US" altLang="zh-CN" sz="4800" b="1" dirty="0">
+          </a:p>
+        </p:txBody>
+      </p:sp>
+    </p:spTree>
+    <p:extLst>
+      <p:ext uri="{BB962C8B-B14F-4D97-AF65-F5344CB8AC3E}">
+        <p14:creationId xmlns:p14="http://schemas.microsoft.com/office/powerpoint/2010/main" val="3724263107"/>
+      </p:ext>
+    </p:extLst>
+  </p:cSld>
+  <p:clrMapOvr>
+    <a:masterClrMapping/>
+  </p:clrMapOvr>
+</p:sld>
+</file>
+
+<file path=ppt/slides/slide10.xml><?xml version="1.0" encoding="utf-8"?>
+<p:sld xmlns:a="http://schemas.openxmlformats.org/drawingml/2006/main" xmlns:r="http://schemas.openxmlformats.org/officeDocument/2006/relationships" xmlns:p="http://schemas.openxmlformats.org/presentationml/2006/main">
+  <p:cSld>
+    <p:spTree>
+      <p:nvGrpSpPr>
+        <p:cNvPr id="1" name="">
+          <a:extLst>
+            <a:ext uri="{FF2B5EF4-FFF2-40B4-BE49-F238E27FC236}">
+              <a16:creationId xmlns:a16="http://schemas.microsoft.com/office/drawing/2014/main" id="{37D4710E-6D1F-4812-F748-B20967D07F4E}"/>
+            </a:ext>
+          </a:extLst>
+        </p:cNvPr>
+        <p:cNvGrpSpPr/>
+        <p:nvPr/>
+      </p:nvGrpSpPr>
+      <p:grpSpPr>
+        <a:xfrm>
+          <a:off x="0" y="0"/>
+          <a:ext cx="0" cy="0"/>
+          <a:chOff x="0" y="0"/>
+          <a:chExt cx="0" cy="0"/>
+        </a:xfrm>
+      </p:grpSpPr>
+      <p:sp>
+        <p:nvSpPr>
+          <p:cNvPr id="5" name="內容版面配置區 4">
+            <a:extLst>
+              <a:ext uri="{FF2B5EF4-FFF2-40B4-BE49-F238E27FC236}">
+                <a16:creationId xmlns:a16="http://schemas.microsoft.com/office/drawing/2014/main" id="{4B6CC69D-CD59-B0BF-A34F-3DDC034F8D14}"/>
+              </a:ext>
+            </a:extLst>
+          </p:cNvPr>
+          <p:cNvSpPr>
+            <a:spLocks noGrp="1"/>
+          </p:cNvSpPr>
+          <p:nvPr>
+            <p:ph idx="1"/>
+          </p:nvPr>
+        </p:nvSpPr>
+        <p:spPr>
+          <a:xfrm>
+            <a:off x="0" y="2084851"/>
+            <a:ext cx="12192000" cy="2404863"/>
+          </a:xfrm>
+        </p:spPr>
+        <p:txBody>
+          <a:bodyPr anchor="ctr">
+            <a:normAutofit/>
+          </a:bodyPr>
+          <a:lstStyle/>
+          <a:p>
+            <a:pPr marL="0" indent="0" algn="ctr">
+              <a:buNone/>
+            </a:pPr>
+            <a:r>
+              <a:rPr lang="zh-TW" altLang="en-US" sz="6400" b="1" dirty="0">
                 <a:solidFill>
                   <a:srgbClr val="660033"/>
                 </a:solidFill>
-                <a:latin typeface="Microsoft JhengHei" panose="020B0604030504040204" pitchFamily="34" charset="-120"/>
-                <a:ea typeface="Microsoft JhengHei" panose="020B0604030504040204" pitchFamily="34" charset="-120"/>
+                <a:latin typeface="Microsoft JhengHei" pitchFamily="34" charset="-120"/>
+                <a:ea typeface="Microsoft JhengHei" pitchFamily="34" charset="-120"/>
               </a:rPr>
-              <a:t>】</a:t>
-            </a:r>
-          </a:p>
-        </p:txBody>
-      </p:sp>
-      <p:sp>
-        <p:nvSpPr>
-          <p:cNvPr id="5" name="Content Placeholder 4"/>
-          <p:cNvSpPr>
-            <a:spLocks noGrp="1"/>
-          </p:cNvSpPr>
-          <p:nvPr>
-            <p:ph idx="1"/>
-          </p:nvPr>
-        </p:nvSpPr>
-        <p:spPr/>
-        <p:txBody>
-          <a:bodyPr>
-            <a:noAutofit/>
-          </a:bodyPr>
-          <a:lstStyle/>
+              <a:t>在耶穌裏得勝  </a:t>
+            </a:r>
+          </a:p>
           <a:p>
             <a:pPr marL="0" indent="0" algn="ctr">
               <a:buNone/>
             </a:pPr>
             <a:r>
-              <a:rPr lang="zh-CN" altLang="zh-TW" sz="5400" b="1" dirty="0">
+              <a:rPr lang="zh-TW" altLang="en-US" sz="6400" b="1" dirty="0">
                 <a:solidFill>
                   <a:srgbClr val="660033"/>
                 </a:solidFill>
-                <a:latin typeface="Microsoft JhengHei" panose="020B0604030504040204" pitchFamily="34" charset="-120"/>
-                <a:ea typeface="Microsoft JhengHei" panose="020B0604030504040204" pitchFamily="34" charset="-120"/>
+                <a:latin typeface="Microsoft JhengHei" pitchFamily="34" charset="-120"/>
+                <a:ea typeface="Microsoft JhengHei" pitchFamily="34" charset="-120"/>
               </a:rPr>
-              <a:t>每遇畏怯憂傷愁容如雲遮擋</a:t>
-            </a:r>
-          </a:p>
+              <a:t>只要在耶穌裏纔得勝</a:t>
+            </a:r>
+          </a:p>
+        </p:txBody>
+      </p:sp>
+    </p:spTree>
+    <p:extLst>
+      <p:ext uri="{BB962C8B-B14F-4D97-AF65-F5344CB8AC3E}">
+        <p14:creationId xmlns:p14="http://schemas.microsoft.com/office/powerpoint/2010/main" val="3125494464"/>
+      </p:ext>
+    </p:extLst>
+  </p:cSld>
+  <p:clrMapOvr>
+    <a:masterClrMapping/>
+  </p:clrMapOvr>
+</p:sld>
+</file>
+
+<file path=ppt/slides/slide11.xml><?xml version="1.0" encoding="utf-8"?>
+<p:sld xmlns:a="http://schemas.openxmlformats.org/drawingml/2006/main" xmlns:r="http://schemas.openxmlformats.org/officeDocument/2006/relationships" xmlns:p="http://schemas.openxmlformats.org/presentationml/2006/main">
+  <p:cSld>
+    <p:spTree>
+      <p:nvGrpSpPr>
+        <p:cNvPr id="1" name="">
+          <a:extLst>
+            <a:ext uri="{FF2B5EF4-FFF2-40B4-BE49-F238E27FC236}">
+              <a16:creationId xmlns:a16="http://schemas.microsoft.com/office/drawing/2014/main" id="{A49AE300-AD24-D1C2-A0BC-756BFE3BC5DF}"/>
+            </a:ext>
+          </a:extLst>
+        </p:cNvPr>
+        <p:cNvGrpSpPr/>
+        <p:nvPr/>
+      </p:nvGrpSpPr>
+      <p:grpSpPr>
+        <a:xfrm>
+          <a:off x="0" y="0"/>
+          <a:ext cx="0" cy="0"/>
+          <a:chOff x="0" y="0"/>
+          <a:chExt cx="0" cy="0"/>
+        </a:xfrm>
+      </p:grpSpPr>
+      <p:sp>
+        <p:nvSpPr>
+          <p:cNvPr id="5" name="內容版面配置區 4">
+            <a:extLst>
+              <a:ext uri="{FF2B5EF4-FFF2-40B4-BE49-F238E27FC236}">
+                <a16:creationId xmlns:a16="http://schemas.microsoft.com/office/drawing/2014/main" id="{C06A83E8-26D1-09D4-B2AD-64E88D1F8D4F}"/>
+              </a:ext>
+            </a:extLst>
+          </p:cNvPr>
+          <p:cNvSpPr>
+            <a:spLocks noGrp="1"/>
+          </p:cNvSpPr>
+          <p:nvPr>
+            <p:ph idx="1"/>
+          </p:nvPr>
+        </p:nvSpPr>
+        <p:spPr>
+          <a:xfrm>
+            <a:off x="0" y="2084851"/>
+            <a:ext cx="12192000" cy="2404863"/>
+          </a:xfrm>
+        </p:spPr>
+        <p:txBody>
+          <a:bodyPr anchor="ctr">
+            <a:normAutofit/>
+          </a:bodyPr>
+          <a:lstStyle/>
           <a:p>
             <a:pPr marL="0" indent="0" algn="ctr">
               <a:buNone/>
             </a:pPr>
             <a:r>
-              <a:rPr lang="zh-CN" altLang="zh-TW" sz="5400" b="1" dirty="0">
+              <a:rPr lang="zh-TW" altLang="en-US" sz="6400" b="1" dirty="0">
                 <a:solidFill>
                   <a:srgbClr val="660033"/>
                 </a:solidFill>
-                <a:latin typeface="Microsoft JhengHei" panose="020B0604030504040204" pitchFamily="34" charset="-120"/>
-                <a:ea typeface="Microsoft JhengHei" panose="020B0604030504040204" pitchFamily="34" charset="-120"/>
+                <a:latin typeface="Microsoft JhengHei" pitchFamily="34" charset="-120"/>
+                <a:ea typeface="Microsoft JhengHei" pitchFamily="34" charset="-120"/>
               </a:rPr>
-              <a:t>試者大施計謀勇猛來征</a:t>
+              <a:t>上陣與敵交戰總不要驚</a:t>
             </a:r>
           </a:p>
           <a:p>
@@ -3824,115 +5925,876 @@
               <a:buNone/>
             </a:pPr>
             <a:r>
-              <a:rPr lang="zh-CN" altLang="zh-TW" sz="5400" b="1" dirty="0">
+              <a:rPr lang="zh-TW" altLang="en-US" sz="6400" b="1" dirty="0">
                 <a:solidFill>
                   <a:srgbClr val="660033"/>
                 </a:solidFill>
-                <a:latin typeface="Microsoft JhengHei" panose="020B0604030504040204" pitchFamily="34" charset="-120"/>
-                <a:ea typeface="Microsoft JhengHei" panose="020B0604030504040204" pitchFamily="34" charset="-120"/>
+                <a:latin typeface="Microsoft JhengHei" pitchFamily="34" charset="-120"/>
+                <a:ea typeface="Microsoft JhengHei" pitchFamily="34" charset="-120"/>
               </a:rPr>
-              <a:t>不要怕競爭雖</a:t>
-            </a:r>
-            <a:r>
-              <a:rPr lang="zh-CN" altLang="zh-TW" sz="5400" b="1" dirty="0">
+              <a:t>因主在前領此路最顯明</a:t>
+            </a:r>
+          </a:p>
+        </p:txBody>
+      </p:sp>
+    </p:spTree>
+    <p:extLst>
+      <p:ext uri="{BB962C8B-B14F-4D97-AF65-F5344CB8AC3E}">
+        <p14:creationId xmlns:p14="http://schemas.microsoft.com/office/powerpoint/2010/main" val="2511518828"/>
+      </p:ext>
+    </p:extLst>
+  </p:cSld>
+  <p:clrMapOvr>
+    <a:masterClrMapping/>
+  </p:clrMapOvr>
+</p:sld>
+</file>
+
+<file path=ppt/slides/slide12.xml><?xml version="1.0" encoding="utf-8"?>
+<p:sld xmlns:a="http://schemas.openxmlformats.org/drawingml/2006/main" xmlns:r="http://schemas.openxmlformats.org/officeDocument/2006/relationships" xmlns:p="http://schemas.openxmlformats.org/presentationml/2006/main">
+  <p:cSld>
+    <p:spTree>
+      <p:nvGrpSpPr>
+        <p:cNvPr id="1" name="">
+          <a:extLst>
+            <a:ext uri="{FF2B5EF4-FFF2-40B4-BE49-F238E27FC236}">
+              <a16:creationId xmlns:a16="http://schemas.microsoft.com/office/drawing/2014/main" id="{E5595EB1-51CF-2577-3E9A-E92381C579B2}"/>
+            </a:ext>
+          </a:extLst>
+        </p:cNvPr>
+        <p:cNvGrpSpPr/>
+        <p:nvPr/>
+      </p:nvGrpSpPr>
+      <p:grpSpPr>
+        <a:xfrm>
+          <a:off x="0" y="0"/>
+          <a:ext cx="0" cy="0"/>
+          <a:chOff x="0" y="0"/>
+          <a:chExt cx="0" cy="0"/>
+        </a:xfrm>
+      </p:grpSpPr>
+      <p:sp>
+        <p:nvSpPr>
+          <p:cNvPr id="5" name="內容版面配置區 4">
+            <a:extLst>
+              <a:ext uri="{FF2B5EF4-FFF2-40B4-BE49-F238E27FC236}">
+                <a16:creationId xmlns:a16="http://schemas.microsoft.com/office/drawing/2014/main" id="{2A940456-3831-3182-DC80-2F053F76C905}"/>
+              </a:ext>
+            </a:extLst>
+          </p:cNvPr>
+          <p:cNvSpPr>
+            <a:spLocks noGrp="1"/>
+          </p:cNvSpPr>
+          <p:nvPr>
+            <p:ph idx="1"/>
+          </p:nvPr>
+        </p:nvSpPr>
+        <p:spPr>
+          <a:xfrm>
+            <a:off x="0" y="2084851"/>
+            <a:ext cx="12192000" cy="2404863"/>
+          </a:xfrm>
+        </p:spPr>
+        <p:txBody>
+          <a:bodyPr anchor="ctr">
+            <a:normAutofit/>
+          </a:bodyPr>
+          <a:lstStyle/>
+          <a:p>
+            <a:pPr marL="0" indent="0" algn="ctr">
+              <a:buNone/>
+            </a:pPr>
+            <a:r>
+              <a:rPr lang="zh-TW" altLang="en-US" sz="6400" b="1" dirty="0">
                 <a:solidFill>
                   <a:srgbClr val="660033"/>
                 </a:solidFill>
-                <a:latin typeface="Microsoft JhengHei" panose="020B0604030504040204" pitchFamily="34" charset="-120"/>
-                <a:ea typeface="Microsoft JhengHei" panose="020B0604030504040204" pitchFamily="34" charset="-120"/>
+                <a:latin typeface="Microsoft JhengHei" pitchFamily="34" charset="-120"/>
+                <a:ea typeface="Microsoft JhengHei" pitchFamily="34" charset="-120"/>
               </a:rPr>
-              <a:t>長</a:t>
-            </a:r>
-            <a:r>
-              <a:rPr lang="en-US" altLang="zh-CN" sz="5400" b="1" dirty="0">
+              <a:t>謹聽呀“我與你居住到永遠”</a:t>
+            </a:r>
+          </a:p>
+          <a:p>
+            <a:pPr marL="0" indent="0" algn="ctr">
+              <a:buNone/>
+            </a:pPr>
+            <a:r>
+              <a:rPr lang="zh-TW" altLang="en-US" sz="6400" b="1" dirty="0">
                 <a:solidFill>
                   <a:srgbClr val="660033"/>
                 </a:solidFill>
-                <a:latin typeface="Microsoft JhengHei" panose="020B0604030504040204" pitchFamily="34" charset="-120"/>
-                <a:ea typeface="Microsoft JhengHei" panose="020B0604030504040204" pitchFamily="34" charset="-120"/>
+                <a:latin typeface="Microsoft JhengHei" pitchFamily="34" charset="-120"/>
+                <a:ea typeface="Microsoft JhengHei" pitchFamily="34" charset="-120"/>
               </a:rPr>
-              <a:t>  </a:t>
-            </a:r>
-            <a:r>
-              <a:rPr lang="zh-CN" altLang="zh-TW" sz="5400" b="1" dirty="0">
+              <a:t>靠主必不驚打仗風聲 </a:t>
+            </a:r>
+          </a:p>
+        </p:txBody>
+      </p:sp>
+    </p:spTree>
+    <p:extLst>
+      <p:ext uri="{BB962C8B-B14F-4D97-AF65-F5344CB8AC3E}">
+        <p14:creationId xmlns:p14="http://schemas.microsoft.com/office/powerpoint/2010/main" val="1490410005"/>
+      </p:ext>
+    </p:extLst>
+  </p:cSld>
+  <p:clrMapOvr>
+    <a:masterClrMapping/>
+  </p:clrMapOvr>
+</p:sld>
+</file>
+
+<file path=ppt/slides/slide13.xml><?xml version="1.0" encoding="utf-8"?>
+<p:sld xmlns:a="http://schemas.openxmlformats.org/drawingml/2006/main" xmlns:r="http://schemas.openxmlformats.org/officeDocument/2006/relationships" xmlns:p="http://schemas.openxmlformats.org/presentationml/2006/main">
+  <p:cSld>
+    <p:spTree>
+      <p:nvGrpSpPr>
+        <p:cNvPr id="1" name="">
+          <a:extLst>
+            <a:ext uri="{FF2B5EF4-FFF2-40B4-BE49-F238E27FC236}">
+              <a16:creationId xmlns:a16="http://schemas.microsoft.com/office/drawing/2014/main" id="{B202E87D-4088-B86A-DEE9-C936CA444488}"/>
+            </a:ext>
+          </a:extLst>
+        </p:cNvPr>
+        <p:cNvGrpSpPr/>
+        <p:nvPr/>
+      </p:nvGrpSpPr>
+      <p:grpSpPr>
+        <a:xfrm>
+          <a:off x="0" y="0"/>
+          <a:ext cx="0" cy="0"/>
+          <a:chOff x="0" y="0"/>
+          <a:chExt cx="0" cy="0"/>
+        </a:xfrm>
+      </p:grpSpPr>
+      <p:sp>
+        <p:nvSpPr>
+          <p:cNvPr id="5" name="內容版面配置區 4">
+            <a:extLst>
+              <a:ext uri="{FF2B5EF4-FFF2-40B4-BE49-F238E27FC236}">
+                <a16:creationId xmlns:a16="http://schemas.microsoft.com/office/drawing/2014/main" id="{76B377A7-9CD0-2674-E30F-77D8B7C11174}"/>
+              </a:ext>
+            </a:extLst>
+          </p:cNvPr>
+          <p:cNvSpPr>
+            <a:spLocks noGrp="1"/>
+          </p:cNvSpPr>
+          <p:nvPr>
+            <p:ph idx="1"/>
+          </p:nvPr>
+        </p:nvSpPr>
+        <p:spPr>
+          <a:xfrm>
+            <a:off x="0" y="2084851"/>
+            <a:ext cx="12192000" cy="2404863"/>
+          </a:xfrm>
+        </p:spPr>
+        <p:txBody>
+          <a:bodyPr anchor="ctr">
+            <a:normAutofit/>
+          </a:bodyPr>
+          <a:lstStyle/>
+          <a:p>
+            <a:pPr marL="0" indent="0" algn="ctr">
+              <a:buNone/>
+            </a:pPr>
+            <a:r>
+              <a:rPr lang="zh-TW" altLang="en-US" sz="6400" b="1" dirty="0">
                 <a:solidFill>
                   <a:srgbClr val="660033"/>
                 </a:solidFill>
-                <a:latin typeface="Microsoft JhengHei" panose="020B0604030504040204" pitchFamily="34" charset="-120"/>
-                <a:ea typeface="Microsoft JhengHei" panose="020B0604030504040204" pitchFamily="34" charset="-120"/>
+                <a:latin typeface="Microsoft JhengHei" pitchFamily="34" charset="-120"/>
+                <a:ea typeface="Microsoft JhengHei" pitchFamily="34" charset="-120"/>
               </a:rPr>
-              <a:t>難</a:t>
-            </a:r>
-            <a:r>
-              <a:rPr lang="zh-CN" altLang="zh-TW" sz="5400" b="1" dirty="0">
+              <a:t>進前打勝仗</a:t>
+            </a:r>
+          </a:p>
+          <a:p>
+            <a:pPr marL="0" indent="0" algn="ctr">
+              <a:buNone/>
+            </a:pPr>
+            <a:r>
+              <a:rPr lang="zh-TW" altLang="en-US" sz="6400" b="1" dirty="0">
                 <a:solidFill>
                   <a:srgbClr val="660033"/>
                 </a:solidFill>
-                <a:latin typeface="Microsoft JhengHei" panose="020B0604030504040204" pitchFamily="34" charset="-120"/>
-                <a:ea typeface="Microsoft JhengHei" panose="020B0604030504040204" pitchFamily="34" charset="-120"/>
+                <a:latin typeface="Microsoft JhengHei" pitchFamily="34" charset="-120"/>
+                <a:ea typeface="Microsoft JhengHei" pitchFamily="34" charset="-120"/>
               </a:rPr>
-              <a:t>久抗但主强壯</a:t>
-            </a:r>
-          </a:p>
+              <a:t>同主快樂一直到永遠</a:t>
+            </a:r>
+          </a:p>
+        </p:txBody>
+      </p:sp>
+    </p:spTree>
+    <p:extLst>
+      <p:ext uri="{BB962C8B-B14F-4D97-AF65-F5344CB8AC3E}">
+        <p14:creationId xmlns:p14="http://schemas.microsoft.com/office/powerpoint/2010/main" val="2555921062"/>
+      </p:ext>
+    </p:extLst>
+  </p:cSld>
+  <p:clrMapOvr>
+    <a:masterClrMapping/>
+  </p:clrMapOvr>
+</p:sld>
+</file>
+
+<file path=ppt/slides/slide14.xml><?xml version="1.0" encoding="utf-8"?>
+<p:sld xmlns:a="http://schemas.openxmlformats.org/drawingml/2006/main" xmlns:r="http://schemas.openxmlformats.org/officeDocument/2006/relationships" xmlns:p="http://schemas.openxmlformats.org/presentationml/2006/main">
+  <p:cSld>
+    <p:spTree>
+      <p:nvGrpSpPr>
+        <p:cNvPr id="1" name="">
+          <a:extLst>
+            <a:ext uri="{FF2B5EF4-FFF2-40B4-BE49-F238E27FC236}">
+              <a16:creationId xmlns:a16="http://schemas.microsoft.com/office/drawing/2014/main" id="{0BE8B63E-0F63-78E5-1E22-2595F48DF551}"/>
+            </a:ext>
+          </a:extLst>
+        </p:cNvPr>
+        <p:cNvGrpSpPr/>
+        <p:nvPr/>
+      </p:nvGrpSpPr>
+      <p:grpSpPr>
+        <a:xfrm>
+          <a:off x="0" y="0"/>
+          <a:ext cx="0" cy="0"/>
+          <a:chOff x="0" y="0"/>
+          <a:chExt cx="0" cy="0"/>
+        </a:xfrm>
+      </p:grpSpPr>
+      <p:sp>
+        <p:nvSpPr>
+          <p:cNvPr id="5" name="內容版面配置區 4">
+            <a:extLst>
+              <a:ext uri="{FF2B5EF4-FFF2-40B4-BE49-F238E27FC236}">
+                <a16:creationId xmlns:a16="http://schemas.microsoft.com/office/drawing/2014/main" id="{FD922797-EE21-682C-B768-724CEDD8FEAE}"/>
+              </a:ext>
+            </a:extLst>
+          </p:cNvPr>
+          <p:cNvSpPr>
+            <a:spLocks noGrp="1"/>
+          </p:cNvSpPr>
+          <p:nvPr>
+            <p:ph idx="1"/>
+          </p:nvPr>
+        </p:nvSpPr>
+        <p:spPr>
+          <a:xfrm>
+            <a:off x="0" y="2084851"/>
+            <a:ext cx="12192000" cy="2404863"/>
+          </a:xfrm>
+        </p:spPr>
+        <p:txBody>
+          <a:bodyPr anchor="ctr">
+            <a:normAutofit/>
+          </a:bodyPr>
+          <a:lstStyle/>
           <a:p>
             <a:pPr marL="0" indent="0" algn="ctr">
               <a:buNone/>
             </a:pPr>
             <a:r>
-              <a:rPr lang="zh-CN" altLang="zh-TW" sz="5400" b="1" dirty="0">
+              <a:rPr lang="zh-TW" altLang="en-US" sz="6400" b="1" dirty="0">
                 <a:solidFill>
                   <a:srgbClr val="660033"/>
                 </a:solidFill>
-                <a:latin typeface="Microsoft JhengHei" panose="020B0604030504040204" pitchFamily="34" charset="-120"/>
-                <a:ea typeface="Microsoft JhengHei" panose="020B0604030504040204" pitchFamily="34" charset="-120"/>
+                <a:latin typeface="Microsoft JhengHei" pitchFamily="34" charset="-120"/>
+                <a:ea typeface="Microsoft JhengHei" pitchFamily="34" charset="-120"/>
               </a:rPr>
-              <a:t>靠主勇往向前爭戰必然得勝</a:t>
-            </a:r>
-          </a:p>
-        </p:txBody>
-      </p:sp>
-      <p:sp>
-        <p:nvSpPr>
-          <p:cNvPr id="6" name="Text Box 1"/>
+              <a:t>主權能足靠投主必為我報仇</a:t>
+            </a:r>
+          </a:p>
+          <a:p>
+            <a:pPr marL="0" indent="0" algn="ctr">
+              <a:buNone/>
+            </a:pPr>
+            <a:r>
+              <a:rPr lang="zh-TW" altLang="en-US" sz="6400" b="1" dirty="0">
+                <a:solidFill>
+                  <a:srgbClr val="660033"/>
+                </a:solidFill>
+                <a:latin typeface="Microsoft JhengHei" pitchFamily="34" charset="-120"/>
+                <a:ea typeface="Microsoft JhengHei" pitchFamily="34" charset="-120"/>
+              </a:rPr>
+              <a:t>因主應許“我永不離開你”</a:t>
+            </a:r>
+          </a:p>
+        </p:txBody>
+      </p:sp>
+      <p:sp>
+        <p:nvSpPr>
+          <p:cNvPr id="3" name="TextBox 2">
+            <a:extLst>
+              <a:ext uri="{FF2B5EF4-FFF2-40B4-BE49-F238E27FC236}">
+                <a16:creationId xmlns:a16="http://schemas.microsoft.com/office/drawing/2014/main" id="{0F694C2F-9BAF-521D-97A7-33BEACD20FAC}"/>
+              </a:ext>
+            </a:extLst>
+          </p:cNvPr>
           <p:cNvSpPr txBox="1"/>
           <p:nvPr/>
         </p:nvSpPr>
         <p:spPr>
           <a:xfrm>
-            <a:off x="407368" y="1700808"/>
-            <a:ext cx="1055440" cy="923330"/>
+            <a:off x="0" y="5061182"/>
+            <a:ext cx="12192000" cy="584775"/>
           </a:xfrm>
           <a:prstGeom prst="rect">
             <a:avLst/>
           </a:prstGeom>
           <a:noFill/>
-          <a:ln w="9525">
-            <a:noFill/>
-            <a:miter lim="800000"/>
-          </a:ln>
         </p:spPr>
         <p:txBody>
-          <a:bodyPr wrap="square">
+          <a:bodyPr wrap="square" rtlCol="0">
             <a:spAutoFit/>
           </a:bodyPr>
           <a:lstStyle/>
           <a:p>
             <a:pPr algn="ctr"/>
             <a:r>
-              <a:rPr lang="en-US" sz="5400" b="1" dirty="0">
+              <a:rPr lang="en-US" sz="3200" b="1" dirty="0">
                 <a:solidFill>
                   <a:srgbClr val="660033"/>
                 </a:solidFill>
+                <a:latin typeface="+mj-lt"/>
               </a:rPr>
-              <a:t>1.</a:t>
-            </a:r>
+              <a:t>( 3 / 3 )</a:t>
+            </a:r>
+            <a:endParaRPr lang="vi-VN" sz="3200" b="1" dirty="0">
+              <a:solidFill>
+                <a:srgbClr val="660033"/>
+              </a:solidFill>
+              <a:latin typeface="+mj-lt"/>
+            </a:endParaRPr>
           </a:p>
         </p:txBody>
       </p:sp>
     </p:spTree>
     <p:extLst>
       <p:ext uri="{BB962C8B-B14F-4D97-AF65-F5344CB8AC3E}">
-        <p14:creationId xmlns:p14="http://schemas.microsoft.com/office/powerpoint/2010/main" val="1043781580"/>
+        <p14:creationId xmlns:p14="http://schemas.microsoft.com/office/powerpoint/2010/main" val="877787926"/>
+      </p:ext>
+    </p:extLst>
+  </p:cSld>
+  <p:clrMapOvr>
+    <a:masterClrMapping/>
+  </p:clrMapOvr>
+</p:sld>
+</file>
+
+<file path=ppt/slides/slide15.xml><?xml version="1.0" encoding="utf-8"?>
+<p:sld xmlns:a="http://schemas.openxmlformats.org/drawingml/2006/main" xmlns:r="http://schemas.openxmlformats.org/officeDocument/2006/relationships" xmlns:p="http://schemas.openxmlformats.org/presentationml/2006/main">
+  <p:cSld>
+    <p:spTree>
+      <p:nvGrpSpPr>
+        <p:cNvPr id="1" name="">
+          <a:extLst>
+            <a:ext uri="{FF2B5EF4-FFF2-40B4-BE49-F238E27FC236}">
+              <a16:creationId xmlns:a16="http://schemas.microsoft.com/office/drawing/2014/main" id="{38BB08FD-BD37-05C3-C007-DC6957E3C999}"/>
+            </a:ext>
+          </a:extLst>
+        </p:cNvPr>
+        <p:cNvGrpSpPr/>
+        <p:nvPr/>
+      </p:nvGrpSpPr>
+      <p:grpSpPr>
+        <a:xfrm>
+          <a:off x="0" y="0"/>
+          <a:ext cx="0" cy="0"/>
+          <a:chOff x="0" y="0"/>
+          <a:chExt cx="0" cy="0"/>
+        </a:xfrm>
+      </p:grpSpPr>
+      <p:sp>
+        <p:nvSpPr>
+          <p:cNvPr id="5" name="內容版面配置區 4">
+            <a:extLst>
+              <a:ext uri="{FF2B5EF4-FFF2-40B4-BE49-F238E27FC236}">
+                <a16:creationId xmlns:a16="http://schemas.microsoft.com/office/drawing/2014/main" id="{130D0365-2888-6175-685C-072E77CEB2D0}"/>
+              </a:ext>
+            </a:extLst>
+          </p:cNvPr>
+          <p:cNvSpPr>
+            <a:spLocks noGrp="1"/>
+          </p:cNvSpPr>
+          <p:nvPr>
+            <p:ph idx="1"/>
+          </p:nvPr>
+        </p:nvSpPr>
+        <p:spPr>
+          <a:xfrm>
+            <a:off x="0" y="2084851"/>
+            <a:ext cx="12192000" cy="2404863"/>
+          </a:xfrm>
+        </p:spPr>
+        <p:txBody>
+          <a:bodyPr anchor="ctr">
+            <a:normAutofit/>
+          </a:bodyPr>
+          <a:lstStyle/>
+          <a:p>
+            <a:pPr marL="0" indent="0" algn="ctr">
+              <a:buNone/>
+            </a:pPr>
+            <a:r>
+              <a:rPr lang="zh-TW" altLang="en-US" sz="6400" b="1" dirty="0">
+                <a:solidFill>
+                  <a:srgbClr val="660033"/>
+                </a:solidFill>
+                <a:latin typeface="Microsoft JhengHei" pitchFamily="34" charset="-120"/>
+                <a:ea typeface="Microsoft JhengHei" pitchFamily="34" charset="-120"/>
+              </a:rPr>
+              <a:t>主要賜予大能力  魔軍消散且敗逃</a:t>
+            </a:r>
+          </a:p>
+          <a:p>
+            <a:pPr marL="0" indent="0" algn="ctr">
+              <a:buNone/>
+            </a:pPr>
+            <a:r>
+              <a:rPr lang="zh-TW" altLang="en-US" sz="6400" b="1" dirty="0">
+                <a:solidFill>
+                  <a:srgbClr val="660033"/>
+                </a:solidFill>
+                <a:latin typeface="Microsoft JhengHei" pitchFamily="34" charset="-120"/>
+                <a:ea typeface="Microsoft JhengHei" pitchFamily="34" charset="-120"/>
+              </a:rPr>
+              <a:t>從此安然無慮靠主得勝有餘</a:t>
+            </a:r>
+          </a:p>
+        </p:txBody>
+      </p:sp>
+      <p:sp>
+        <p:nvSpPr>
+          <p:cNvPr id="3" name="TextBox 2">
+            <a:extLst>
+              <a:ext uri="{FF2B5EF4-FFF2-40B4-BE49-F238E27FC236}">
+                <a16:creationId xmlns:a16="http://schemas.microsoft.com/office/drawing/2014/main" id="{DB69AB10-7043-E336-F08F-9C247151E66D}"/>
+              </a:ext>
+            </a:extLst>
+          </p:cNvPr>
+          <p:cNvSpPr txBox="1"/>
+          <p:nvPr/>
+        </p:nvSpPr>
+        <p:spPr>
+          <a:xfrm>
+            <a:off x="0" y="5061182"/>
+            <a:ext cx="12192000" cy="584775"/>
+          </a:xfrm>
+          <a:prstGeom prst="rect">
+            <a:avLst/>
+          </a:prstGeom>
+          <a:noFill/>
+        </p:spPr>
+        <p:txBody>
+          <a:bodyPr wrap="square" rtlCol="0">
+            <a:spAutoFit/>
+          </a:bodyPr>
+          <a:lstStyle/>
+          <a:p>
+            <a:pPr algn="ctr"/>
+            <a:r>
+              <a:rPr lang="en-US" sz="3200" b="1" dirty="0">
+                <a:solidFill>
+                  <a:srgbClr val="660033"/>
+                </a:solidFill>
+                <a:latin typeface="+mj-lt"/>
+              </a:rPr>
+              <a:t>( 3 / 3 )</a:t>
+            </a:r>
+            <a:endParaRPr lang="vi-VN" sz="3200" b="1" dirty="0">
+              <a:solidFill>
+                <a:srgbClr val="660033"/>
+              </a:solidFill>
+              <a:latin typeface="+mj-lt"/>
+            </a:endParaRPr>
+          </a:p>
+        </p:txBody>
+      </p:sp>
+    </p:spTree>
+    <p:extLst>
+      <p:ext uri="{BB962C8B-B14F-4D97-AF65-F5344CB8AC3E}">
+        <p14:creationId xmlns:p14="http://schemas.microsoft.com/office/powerpoint/2010/main" val="2029641196"/>
+      </p:ext>
+    </p:extLst>
+  </p:cSld>
+  <p:clrMapOvr>
+    <a:masterClrMapping/>
+  </p:clrMapOvr>
+</p:sld>
+</file>
+
+<file path=ppt/slides/slide16.xml><?xml version="1.0" encoding="utf-8"?>
+<p:sld xmlns:a="http://schemas.openxmlformats.org/drawingml/2006/main" xmlns:r="http://schemas.openxmlformats.org/officeDocument/2006/relationships" xmlns:p="http://schemas.openxmlformats.org/presentationml/2006/main">
+  <p:cSld>
+    <p:spTree>
+      <p:nvGrpSpPr>
+        <p:cNvPr id="1" name="">
+          <a:extLst>
+            <a:ext uri="{FF2B5EF4-FFF2-40B4-BE49-F238E27FC236}">
+              <a16:creationId xmlns:a16="http://schemas.microsoft.com/office/drawing/2014/main" id="{403160C1-5853-18BA-CD87-B4372C05C442}"/>
+            </a:ext>
+          </a:extLst>
+        </p:cNvPr>
+        <p:cNvGrpSpPr/>
+        <p:nvPr/>
+      </p:nvGrpSpPr>
+      <p:grpSpPr>
+        <a:xfrm>
+          <a:off x="0" y="0"/>
+          <a:ext cx="0" cy="0"/>
+          <a:chOff x="0" y="0"/>
+          <a:chExt cx="0" cy="0"/>
+        </a:xfrm>
+      </p:grpSpPr>
+      <p:sp>
+        <p:nvSpPr>
+          <p:cNvPr id="5" name="內容版面配置區 4">
+            <a:extLst>
+              <a:ext uri="{FF2B5EF4-FFF2-40B4-BE49-F238E27FC236}">
+                <a16:creationId xmlns:a16="http://schemas.microsoft.com/office/drawing/2014/main" id="{62C60F7D-5E32-9455-3AFB-C1AEDA047F73}"/>
+              </a:ext>
+            </a:extLst>
+          </p:cNvPr>
+          <p:cNvSpPr>
+            <a:spLocks noGrp="1"/>
+          </p:cNvSpPr>
+          <p:nvPr>
+            <p:ph idx="1"/>
+          </p:nvPr>
+        </p:nvSpPr>
+        <p:spPr>
+          <a:xfrm>
+            <a:off x="0" y="2084851"/>
+            <a:ext cx="12192000" cy="2404863"/>
+          </a:xfrm>
+        </p:spPr>
+        <p:txBody>
+          <a:bodyPr anchor="ctr">
+            <a:normAutofit/>
+          </a:bodyPr>
+          <a:lstStyle/>
+          <a:p>
+            <a:pPr marL="0" indent="0" algn="ctr">
+              <a:buNone/>
+            </a:pPr>
+            <a:r>
+              <a:rPr lang="zh-TW" altLang="en-US" sz="6400" b="1" dirty="0">
+                <a:solidFill>
+                  <a:srgbClr val="660033"/>
+                </a:solidFill>
+                <a:latin typeface="Microsoft JhengHei" pitchFamily="34" charset="-120"/>
+                <a:ea typeface="Microsoft JhengHei" pitchFamily="34" charset="-120"/>
+              </a:rPr>
+              <a:t>在耶穌裏得勝  </a:t>
+            </a:r>
+          </a:p>
+          <a:p>
+            <a:pPr marL="0" indent="0" algn="ctr">
+              <a:buNone/>
+            </a:pPr>
+            <a:r>
+              <a:rPr lang="zh-TW" altLang="en-US" sz="6400" b="1" dirty="0">
+                <a:solidFill>
+                  <a:srgbClr val="660033"/>
+                </a:solidFill>
+                <a:latin typeface="Microsoft JhengHei" pitchFamily="34" charset="-120"/>
+                <a:ea typeface="Microsoft JhengHei" pitchFamily="34" charset="-120"/>
+              </a:rPr>
+              <a:t>只要在耶穌裏纔得勝</a:t>
+            </a:r>
+          </a:p>
+        </p:txBody>
+      </p:sp>
+    </p:spTree>
+    <p:extLst>
+      <p:ext uri="{BB962C8B-B14F-4D97-AF65-F5344CB8AC3E}">
+        <p14:creationId xmlns:p14="http://schemas.microsoft.com/office/powerpoint/2010/main" val="2058880563"/>
+      </p:ext>
+    </p:extLst>
+  </p:cSld>
+  <p:clrMapOvr>
+    <a:masterClrMapping/>
+  </p:clrMapOvr>
+</p:sld>
+</file>
+
+<file path=ppt/slides/slide17.xml><?xml version="1.0" encoding="utf-8"?>
+<p:sld xmlns:a="http://schemas.openxmlformats.org/drawingml/2006/main" xmlns:r="http://schemas.openxmlformats.org/officeDocument/2006/relationships" xmlns:p="http://schemas.openxmlformats.org/presentationml/2006/main">
+  <p:cSld>
+    <p:spTree>
+      <p:nvGrpSpPr>
+        <p:cNvPr id="1" name="">
+          <a:extLst>
+            <a:ext uri="{FF2B5EF4-FFF2-40B4-BE49-F238E27FC236}">
+              <a16:creationId xmlns:a16="http://schemas.microsoft.com/office/drawing/2014/main" id="{45CE05B9-18D8-0946-42AA-35183D9E4F48}"/>
+            </a:ext>
+          </a:extLst>
+        </p:cNvPr>
+        <p:cNvGrpSpPr/>
+        <p:nvPr/>
+      </p:nvGrpSpPr>
+      <p:grpSpPr>
+        <a:xfrm>
+          <a:off x="0" y="0"/>
+          <a:ext cx="0" cy="0"/>
+          <a:chOff x="0" y="0"/>
+          <a:chExt cx="0" cy="0"/>
+        </a:xfrm>
+      </p:grpSpPr>
+      <p:sp>
+        <p:nvSpPr>
+          <p:cNvPr id="5" name="內容版面配置區 4">
+            <a:extLst>
+              <a:ext uri="{FF2B5EF4-FFF2-40B4-BE49-F238E27FC236}">
+                <a16:creationId xmlns:a16="http://schemas.microsoft.com/office/drawing/2014/main" id="{45143C14-774A-C0B1-A1FA-AE418971F96D}"/>
+              </a:ext>
+            </a:extLst>
+          </p:cNvPr>
+          <p:cNvSpPr>
+            <a:spLocks noGrp="1"/>
+          </p:cNvSpPr>
+          <p:nvPr>
+            <p:ph idx="1"/>
+          </p:nvPr>
+        </p:nvSpPr>
+        <p:spPr>
+          <a:xfrm>
+            <a:off x="0" y="2084851"/>
+            <a:ext cx="12192000" cy="2404863"/>
+          </a:xfrm>
+        </p:spPr>
+        <p:txBody>
+          <a:bodyPr anchor="ctr">
+            <a:normAutofit/>
+          </a:bodyPr>
+          <a:lstStyle/>
+          <a:p>
+            <a:pPr marL="0" indent="0" algn="ctr">
+              <a:buNone/>
+            </a:pPr>
+            <a:r>
+              <a:rPr lang="zh-TW" altLang="en-US" sz="6400" b="1" dirty="0">
+                <a:solidFill>
+                  <a:srgbClr val="660033"/>
+                </a:solidFill>
+                <a:latin typeface="Microsoft JhengHei" pitchFamily="34" charset="-120"/>
+                <a:ea typeface="Microsoft JhengHei" pitchFamily="34" charset="-120"/>
+              </a:rPr>
+              <a:t>上陣與敵交戰總不要驚</a:t>
+            </a:r>
+          </a:p>
+          <a:p>
+            <a:pPr marL="0" indent="0" algn="ctr">
+              <a:buNone/>
+            </a:pPr>
+            <a:r>
+              <a:rPr lang="zh-TW" altLang="en-US" sz="6400" b="1" dirty="0">
+                <a:solidFill>
+                  <a:srgbClr val="660033"/>
+                </a:solidFill>
+                <a:latin typeface="Microsoft JhengHei" pitchFamily="34" charset="-120"/>
+                <a:ea typeface="Microsoft JhengHei" pitchFamily="34" charset="-120"/>
+              </a:rPr>
+              <a:t>因主在前領此路最顯明</a:t>
+            </a:r>
+          </a:p>
+        </p:txBody>
+      </p:sp>
+    </p:spTree>
+    <p:extLst>
+      <p:ext uri="{BB962C8B-B14F-4D97-AF65-F5344CB8AC3E}">
+        <p14:creationId xmlns:p14="http://schemas.microsoft.com/office/powerpoint/2010/main" val="2285625673"/>
+      </p:ext>
+    </p:extLst>
+  </p:cSld>
+  <p:clrMapOvr>
+    <a:masterClrMapping/>
+  </p:clrMapOvr>
+</p:sld>
+</file>
+
+<file path=ppt/slides/slide18.xml><?xml version="1.0" encoding="utf-8"?>
+<p:sld xmlns:a="http://schemas.openxmlformats.org/drawingml/2006/main" xmlns:r="http://schemas.openxmlformats.org/officeDocument/2006/relationships" xmlns:p="http://schemas.openxmlformats.org/presentationml/2006/main">
+  <p:cSld>
+    <p:spTree>
+      <p:nvGrpSpPr>
+        <p:cNvPr id="1" name="">
+          <a:extLst>
+            <a:ext uri="{FF2B5EF4-FFF2-40B4-BE49-F238E27FC236}">
+              <a16:creationId xmlns:a16="http://schemas.microsoft.com/office/drawing/2014/main" id="{4B0C7125-ABB8-3797-0E6F-040FC1453AF4}"/>
+            </a:ext>
+          </a:extLst>
+        </p:cNvPr>
+        <p:cNvGrpSpPr/>
+        <p:nvPr/>
+      </p:nvGrpSpPr>
+      <p:grpSpPr>
+        <a:xfrm>
+          <a:off x="0" y="0"/>
+          <a:ext cx="0" cy="0"/>
+          <a:chOff x="0" y="0"/>
+          <a:chExt cx="0" cy="0"/>
+        </a:xfrm>
+      </p:grpSpPr>
+      <p:sp>
+        <p:nvSpPr>
+          <p:cNvPr id="5" name="內容版面配置區 4">
+            <a:extLst>
+              <a:ext uri="{FF2B5EF4-FFF2-40B4-BE49-F238E27FC236}">
+                <a16:creationId xmlns:a16="http://schemas.microsoft.com/office/drawing/2014/main" id="{E501B20B-1CC3-7A96-07FA-206E2786843A}"/>
+              </a:ext>
+            </a:extLst>
+          </p:cNvPr>
+          <p:cNvSpPr>
+            <a:spLocks noGrp="1"/>
+          </p:cNvSpPr>
+          <p:nvPr>
+            <p:ph idx="1"/>
+          </p:nvPr>
+        </p:nvSpPr>
+        <p:spPr>
+          <a:xfrm>
+            <a:off x="0" y="2084851"/>
+            <a:ext cx="12192000" cy="2404863"/>
+          </a:xfrm>
+        </p:spPr>
+        <p:txBody>
+          <a:bodyPr anchor="ctr">
+            <a:normAutofit/>
+          </a:bodyPr>
+          <a:lstStyle/>
+          <a:p>
+            <a:pPr marL="0" indent="0" algn="ctr">
+              <a:buNone/>
+            </a:pPr>
+            <a:r>
+              <a:rPr lang="zh-TW" altLang="en-US" sz="6400" b="1" dirty="0">
+                <a:solidFill>
+                  <a:srgbClr val="660033"/>
+                </a:solidFill>
+                <a:latin typeface="Microsoft JhengHei" pitchFamily="34" charset="-120"/>
+                <a:ea typeface="Microsoft JhengHei" pitchFamily="34" charset="-120"/>
+              </a:rPr>
+              <a:t>謹聽呀“我與你居住到永遠”</a:t>
+            </a:r>
+          </a:p>
+          <a:p>
+            <a:pPr marL="0" indent="0" algn="ctr">
+              <a:buNone/>
+            </a:pPr>
+            <a:r>
+              <a:rPr lang="zh-TW" altLang="en-US" sz="6400" b="1" dirty="0">
+                <a:solidFill>
+                  <a:srgbClr val="660033"/>
+                </a:solidFill>
+                <a:latin typeface="Microsoft JhengHei" pitchFamily="34" charset="-120"/>
+                <a:ea typeface="Microsoft JhengHei" pitchFamily="34" charset="-120"/>
+              </a:rPr>
+              <a:t>靠主必不驚打仗風聲 </a:t>
+            </a:r>
+          </a:p>
+        </p:txBody>
+      </p:sp>
+    </p:spTree>
+    <p:extLst>
+      <p:ext uri="{BB962C8B-B14F-4D97-AF65-F5344CB8AC3E}">
+        <p14:creationId xmlns:p14="http://schemas.microsoft.com/office/powerpoint/2010/main" val="1252033444"/>
+      </p:ext>
+    </p:extLst>
+  </p:cSld>
+  <p:clrMapOvr>
+    <a:masterClrMapping/>
+  </p:clrMapOvr>
+</p:sld>
+</file>
+
+<file path=ppt/slides/slide19.xml><?xml version="1.0" encoding="utf-8"?>
+<p:sld xmlns:a="http://schemas.openxmlformats.org/drawingml/2006/main" xmlns:r="http://schemas.openxmlformats.org/officeDocument/2006/relationships" xmlns:p="http://schemas.openxmlformats.org/presentationml/2006/main">
+  <p:cSld>
+    <p:spTree>
+      <p:nvGrpSpPr>
+        <p:cNvPr id="1" name="">
+          <a:extLst>
+            <a:ext uri="{FF2B5EF4-FFF2-40B4-BE49-F238E27FC236}">
+              <a16:creationId xmlns:a16="http://schemas.microsoft.com/office/drawing/2014/main" id="{339844FC-F476-CD41-DC1B-BDFB3DE08E27}"/>
+            </a:ext>
+          </a:extLst>
+        </p:cNvPr>
+        <p:cNvGrpSpPr/>
+        <p:nvPr/>
+      </p:nvGrpSpPr>
+      <p:grpSpPr>
+        <a:xfrm>
+          <a:off x="0" y="0"/>
+          <a:ext cx="0" cy="0"/>
+          <a:chOff x="0" y="0"/>
+          <a:chExt cx="0" cy="0"/>
+        </a:xfrm>
+      </p:grpSpPr>
+      <p:sp>
+        <p:nvSpPr>
+          <p:cNvPr id="5" name="內容版面配置區 4">
+            <a:extLst>
+              <a:ext uri="{FF2B5EF4-FFF2-40B4-BE49-F238E27FC236}">
+                <a16:creationId xmlns:a16="http://schemas.microsoft.com/office/drawing/2014/main" id="{6E2DE30D-15B9-9B5A-70C8-FB0D9ACD5D7F}"/>
+              </a:ext>
+            </a:extLst>
+          </p:cNvPr>
+          <p:cNvSpPr>
+            <a:spLocks noGrp="1"/>
+          </p:cNvSpPr>
+          <p:nvPr>
+            <p:ph idx="1"/>
+          </p:nvPr>
+        </p:nvSpPr>
+        <p:spPr>
+          <a:xfrm>
+            <a:off x="0" y="2084851"/>
+            <a:ext cx="12192000" cy="2404863"/>
+          </a:xfrm>
+        </p:spPr>
+        <p:txBody>
+          <a:bodyPr anchor="ctr">
+            <a:normAutofit/>
+          </a:bodyPr>
+          <a:lstStyle/>
+          <a:p>
+            <a:pPr marL="0" indent="0" algn="ctr">
+              <a:buNone/>
+            </a:pPr>
+            <a:r>
+              <a:rPr lang="zh-TW" altLang="en-US" sz="6400" b="1" dirty="0">
+                <a:solidFill>
+                  <a:srgbClr val="660033"/>
+                </a:solidFill>
+                <a:latin typeface="Microsoft JhengHei" pitchFamily="34" charset="-120"/>
+                <a:ea typeface="Microsoft JhengHei" pitchFamily="34" charset="-120"/>
+              </a:rPr>
+              <a:t>進前打勝仗</a:t>
+            </a:r>
+          </a:p>
+          <a:p>
+            <a:pPr marL="0" indent="0" algn="ctr">
+              <a:buNone/>
+            </a:pPr>
+            <a:r>
+              <a:rPr lang="zh-TW" altLang="en-US" sz="6400" b="1" dirty="0">
+                <a:solidFill>
+                  <a:srgbClr val="660033"/>
+                </a:solidFill>
+                <a:latin typeface="Microsoft JhengHei" pitchFamily="34" charset="-120"/>
+                <a:ea typeface="Microsoft JhengHei" pitchFamily="34" charset="-120"/>
+              </a:rPr>
+              <a:t>同主快樂一直到永遠</a:t>
+            </a:r>
+          </a:p>
+        </p:txBody>
+      </p:sp>
+    </p:spTree>
+    <p:extLst>
+      <p:ext uri="{BB962C8B-B14F-4D97-AF65-F5344CB8AC3E}">
+        <p14:creationId xmlns:p14="http://schemas.microsoft.com/office/powerpoint/2010/main" val="1737365956"/>
       </p:ext>
     </p:extLst>
   </p:cSld>
@@ -3961,200 +6823,94 @@
       </p:grpSpPr>
       <p:sp>
         <p:nvSpPr>
-          <p:cNvPr id="4" name="Title 3"/>
-          <p:cNvSpPr>
-            <a:spLocks noGrp="1"/>
-          </p:cNvSpPr>
-          <p:nvPr>
-            <p:ph type="title"/>
-          </p:nvPr>
-        </p:nvSpPr>
-        <p:spPr/>
-        <p:txBody>
-          <a:bodyPr>
+          <p:cNvPr id="5" name="內容版面配置區 4"/>
+          <p:cNvSpPr>
+            <a:spLocks noGrp="1"/>
+          </p:cNvSpPr>
+          <p:nvPr>
+            <p:ph idx="1"/>
+          </p:nvPr>
+        </p:nvSpPr>
+        <p:spPr>
+          <a:xfrm>
+            <a:off x="0" y="2084851"/>
+            <a:ext cx="12192000" cy="2404863"/>
+          </a:xfrm>
+        </p:spPr>
+        <p:txBody>
+          <a:bodyPr anchor="ctr">
             <a:normAutofit/>
           </a:bodyPr>
           <a:lstStyle/>
           <a:p>
-            <a:r>
-              <a:rPr lang="en-US" altLang="zh-CN" sz="4800" b="1" dirty="0">
+            <a:pPr marL="0" indent="0" algn="ctr">
+              <a:buNone/>
+            </a:pPr>
+            <a:r>
+              <a:rPr lang="zh-TW" altLang="en-US" sz="6400" b="1" dirty="0">
                 <a:solidFill>
                   <a:srgbClr val="660033"/>
                 </a:solidFill>
-                <a:latin typeface="Microsoft JhengHei" panose="020B0604030504040204" pitchFamily="34" charset="-120"/>
-                <a:ea typeface="Microsoft JhengHei" panose="020B0604030504040204" pitchFamily="34" charset="-120"/>
+                <a:latin typeface="Microsoft JhengHei" pitchFamily="34" charset="-120"/>
+                <a:ea typeface="Microsoft JhengHei" pitchFamily="34" charset="-120"/>
               </a:rPr>
-              <a:t>【</a:t>
-            </a:r>
-            <a:r>
-              <a:rPr lang="zh-CN" altLang="en-US" sz="4800" b="1" dirty="0">
+              <a:t>每遇畏怯憂傷愁容如雲遮擋</a:t>
+            </a:r>
+          </a:p>
+          <a:p>
+            <a:pPr marL="0" indent="0" algn="ctr">
+              <a:buNone/>
+            </a:pPr>
+            <a:r>
+              <a:rPr lang="zh-TW" altLang="en-US" sz="6400" b="1" dirty="0">
                 <a:solidFill>
                   <a:srgbClr val="660033"/>
                 </a:solidFill>
-                <a:latin typeface="Microsoft JhengHei" panose="020B0604030504040204" pitchFamily="34" charset="-120"/>
-                <a:ea typeface="Microsoft JhengHei" panose="020B0604030504040204" pitchFamily="34" charset="-120"/>
+                <a:latin typeface="Microsoft JhengHei" pitchFamily="34" charset="-120"/>
+                <a:ea typeface="Microsoft JhengHei" pitchFamily="34" charset="-120"/>
               </a:rPr>
-              <a:t>在主裏得勝</a:t>
-            </a:r>
-            <a:r>
-              <a:rPr lang="en-US" altLang="zh-CN" sz="4800" b="1" dirty="0">
+              <a:t>試者大施計謀勇猛來征</a:t>
+            </a:r>
+          </a:p>
+        </p:txBody>
+      </p:sp>
+      <p:sp>
+        <p:nvSpPr>
+          <p:cNvPr id="3" name="TextBox 2"/>
+          <p:cNvSpPr txBox="1"/>
+          <p:nvPr/>
+        </p:nvSpPr>
+        <p:spPr>
+          <a:xfrm>
+            <a:off x="0" y="5061182"/>
+            <a:ext cx="12192000" cy="584775"/>
+          </a:xfrm>
+          <a:prstGeom prst="rect">
+            <a:avLst/>
+          </a:prstGeom>
+          <a:noFill/>
+        </p:spPr>
+        <p:txBody>
+          <a:bodyPr wrap="square" rtlCol="0">
+            <a:spAutoFit/>
+          </a:bodyPr>
+          <a:lstStyle/>
+          <a:p>
+            <a:pPr algn="ctr"/>
+            <a:r>
+              <a:rPr lang="en-US" sz="3200" b="1" dirty="0">
                 <a:solidFill>
                   <a:srgbClr val="660033"/>
                 </a:solidFill>
-                <a:latin typeface="Microsoft JhengHei" panose="020B0604030504040204" pitchFamily="34" charset="-120"/>
-                <a:ea typeface="Microsoft JhengHei" panose="020B0604030504040204" pitchFamily="34" charset="-120"/>
+                <a:latin typeface="+mj-lt"/>
               </a:rPr>
-              <a:t>】</a:t>
-            </a:r>
-          </a:p>
-        </p:txBody>
-      </p:sp>
-      <p:sp>
-        <p:nvSpPr>
-          <p:cNvPr id="5" name="Content Placeholder 4"/>
-          <p:cNvSpPr>
-            <a:spLocks noGrp="1"/>
-          </p:cNvSpPr>
-          <p:nvPr>
-            <p:ph idx="1"/>
-          </p:nvPr>
-        </p:nvSpPr>
-        <p:spPr/>
-        <p:txBody>
-          <a:bodyPr>
-            <a:noAutofit/>
-          </a:bodyPr>
-          <a:lstStyle/>
-          <a:p>
-            <a:pPr marL="0" indent="0" algn="ctr">
-              <a:buNone/>
-            </a:pPr>
-            <a:r>
-              <a:rPr lang="zh-CN" altLang="zh-TW" sz="5400" b="1" dirty="0">
-                <a:solidFill>
-                  <a:srgbClr val="660033"/>
-                </a:solidFill>
-                <a:latin typeface="Microsoft JhengHei" panose="020B0604030504040204" pitchFamily="34" charset="-120"/>
-                <a:ea typeface="Microsoft JhengHei" panose="020B0604030504040204" pitchFamily="34" charset="-120"/>
-              </a:rPr>
-              <a:t>在耶穌裏得</a:t>
-            </a:r>
-            <a:r>
-              <a:rPr lang="zh-CN" altLang="zh-TW" sz="5400" b="1" dirty="0">
-                <a:solidFill>
-                  <a:srgbClr val="660033"/>
-                </a:solidFill>
-                <a:latin typeface="Microsoft JhengHei" panose="020B0604030504040204" pitchFamily="34" charset="-120"/>
-                <a:ea typeface="Microsoft JhengHei" panose="020B0604030504040204" pitchFamily="34" charset="-120"/>
-              </a:rPr>
-              <a:t>勝</a:t>
-            </a:r>
-            <a:r>
-              <a:rPr lang="en-US" altLang="zh-CN" sz="5400" b="1" dirty="0">
-                <a:solidFill>
-                  <a:srgbClr val="660033"/>
-                </a:solidFill>
-                <a:latin typeface="Microsoft JhengHei" panose="020B0604030504040204" pitchFamily="34" charset="-120"/>
-                <a:ea typeface="Microsoft JhengHei" panose="020B0604030504040204" pitchFamily="34" charset="-120"/>
-              </a:rPr>
-              <a:t>  </a:t>
-            </a:r>
-          </a:p>
-          <a:p>
-            <a:pPr marL="0" indent="0" algn="ctr">
-              <a:buNone/>
-            </a:pPr>
-            <a:r>
-              <a:rPr lang="zh-CN" altLang="zh-TW" sz="5400" b="1" dirty="0">
-                <a:solidFill>
-                  <a:srgbClr val="660033"/>
-                </a:solidFill>
-                <a:latin typeface="Microsoft JhengHei" panose="020B0604030504040204" pitchFamily="34" charset="-120"/>
-                <a:ea typeface="Microsoft JhengHei" panose="020B0604030504040204" pitchFamily="34" charset="-120"/>
-              </a:rPr>
-              <a:t>只</a:t>
-            </a:r>
-            <a:r>
-              <a:rPr lang="zh-CN" altLang="zh-TW" sz="5400" b="1" dirty="0">
-                <a:solidFill>
-                  <a:srgbClr val="660033"/>
-                </a:solidFill>
-                <a:latin typeface="Microsoft JhengHei" panose="020B0604030504040204" pitchFamily="34" charset="-120"/>
-                <a:ea typeface="Microsoft JhengHei" panose="020B0604030504040204" pitchFamily="34" charset="-120"/>
-              </a:rPr>
-              <a:t>要在耶穌裏纔得勝</a:t>
-            </a:r>
-          </a:p>
-          <a:p>
-            <a:pPr marL="0" indent="0" algn="ctr">
-              <a:buNone/>
-            </a:pPr>
-            <a:r>
-              <a:rPr lang="zh-CN" altLang="zh-TW" sz="5400" b="1" dirty="0">
-                <a:solidFill>
-                  <a:srgbClr val="660033"/>
-                </a:solidFill>
-                <a:latin typeface="Microsoft JhengHei" panose="020B0604030504040204" pitchFamily="34" charset="-120"/>
-                <a:ea typeface="Microsoft JhengHei" panose="020B0604030504040204" pitchFamily="34" charset="-120"/>
-              </a:rPr>
-              <a:t>上陣與敵交戰總不要驚</a:t>
-            </a:r>
-          </a:p>
-          <a:p>
-            <a:pPr marL="0" indent="0" algn="ctr">
-              <a:buNone/>
-            </a:pPr>
-            <a:r>
-              <a:rPr lang="zh-CN" altLang="zh-TW" sz="5400" b="1" dirty="0">
-                <a:solidFill>
-                  <a:srgbClr val="660033"/>
-                </a:solidFill>
-                <a:latin typeface="Microsoft JhengHei" panose="020B0604030504040204" pitchFamily="34" charset="-120"/>
-                <a:ea typeface="Microsoft JhengHei" panose="020B0604030504040204" pitchFamily="34" charset="-120"/>
-                <a:sym typeface="+mn-ea"/>
-              </a:rPr>
-              <a:t>因主在前</a:t>
-            </a:r>
-            <a:r>
-              <a:rPr lang="zh-CN" altLang="zh-TW" sz="5400" b="1" dirty="0">
-                <a:solidFill>
-                  <a:srgbClr val="660033"/>
-                </a:solidFill>
-                <a:latin typeface="Microsoft JhengHei" panose="020B0604030504040204" pitchFamily="34" charset="-120"/>
-                <a:ea typeface="Microsoft JhengHei" panose="020B0604030504040204" pitchFamily="34" charset="-120"/>
-                <a:sym typeface="+mn-ea"/>
-              </a:rPr>
-              <a:t>領此</a:t>
-            </a:r>
-            <a:r>
-              <a:rPr lang="zh-CN" altLang="zh-TW" sz="5400" b="1" dirty="0">
-                <a:solidFill>
-                  <a:srgbClr val="660033"/>
-                </a:solidFill>
-                <a:latin typeface="Microsoft JhengHei" panose="020B0604030504040204" pitchFamily="34" charset="-120"/>
-                <a:ea typeface="Microsoft JhengHei" panose="020B0604030504040204" pitchFamily="34" charset="-120"/>
-                <a:sym typeface="+mn-ea"/>
-              </a:rPr>
-              <a:t>路最顯</a:t>
-            </a:r>
-            <a:r>
-              <a:rPr lang="zh-CN" altLang="zh-TW" sz="5400" b="1" dirty="0">
-                <a:solidFill>
-                  <a:srgbClr val="660033"/>
-                </a:solidFill>
-                <a:latin typeface="Microsoft JhengHei" panose="020B0604030504040204" pitchFamily="34" charset="-120"/>
-                <a:ea typeface="Microsoft JhengHei" panose="020B0604030504040204" pitchFamily="34" charset="-120"/>
-                <a:sym typeface="+mn-ea"/>
-              </a:rPr>
-              <a:t>明</a:t>
-            </a:r>
-            <a:endParaRPr lang="en-US" altLang="zh-CN" sz="5400" b="1" dirty="0">
+              <a:t>( 1 / 3 )</a:t>
+            </a:r>
+            <a:endParaRPr lang="vi-VN" sz="3200" b="1" dirty="0">
               <a:solidFill>
                 <a:srgbClr val="660033"/>
               </a:solidFill>
-              <a:latin typeface="Microsoft JhengHei" panose="020B0604030504040204" pitchFamily="34" charset="-120"/>
-              <a:ea typeface="Microsoft JhengHei" panose="020B0604030504040204" pitchFamily="34" charset="-120"/>
-              <a:sym typeface="+mn-ea"/>
+              <a:latin typeface="+mj-lt"/>
             </a:endParaRPr>
           </a:p>
         </p:txBody>
@@ -4162,7 +6918,7 @@
     </p:spTree>
     <p:extLst>
       <p:ext uri="{BB962C8B-B14F-4D97-AF65-F5344CB8AC3E}">
-        <p14:creationId xmlns:p14="http://schemas.microsoft.com/office/powerpoint/2010/main" val="1034232711"/>
+        <p14:creationId xmlns:p14="http://schemas.microsoft.com/office/powerpoint/2010/main" val="1407003638"/>
       </p:ext>
     </p:extLst>
   </p:cSld>
@@ -4177,7 +6933,13 @@
   <p:cSld>
     <p:spTree>
       <p:nvGrpSpPr>
-        <p:cNvPr id="1" name=""/>
+        <p:cNvPr id="1" name="">
+          <a:extLst>
+            <a:ext uri="{FF2B5EF4-FFF2-40B4-BE49-F238E27FC236}">
+              <a16:creationId xmlns:a16="http://schemas.microsoft.com/office/drawing/2014/main" id="{0B6E3D5C-60CF-0B86-EFFA-AD7D51DE0EDA}"/>
+            </a:ext>
+          </a:extLst>
+        </p:cNvPr>
         <p:cNvGrpSpPr/>
         <p:nvPr/>
       </p:nvGrpSpPr>
@@ -4191,222 +6953,106 @@
       </p:grpSpPr>
       <p:sp>
         <p:nvSpPr>
-          <p:cNvPr id="4" name="Title 3"/>
-          <p:cNvSpPr>
-            <a:spLocks noGrp="1"/>
-          </p:cNvSpPr>
-          <p:nvPr>
-            <p:ph type="title"/>
-          </p:nvPr>
-        </p:nvSpPr>
-        <p:spPr/>
-        <p:txBody>
-          <a:bodyPr>
+          <p:cNvPr id="5" name="內容版面配置區 4">
+            <a:extLst>
+              <a:ext uri="{FF2B5EF4-FFF2-40B4-BE49-F238E27FC236}">
+                <a16:creationId xmlns:a16="http://schemas.microsoft.com/office/drawing/2014/main" id="{BEA531C1-A6C2-C235-8E3D-AA9A25FE0570}"/>
+              </a:ext>
+            </a:extLst>
+          </p:cNvPr>
+          <p:cNvSpPr>
+            <a:spLocks noGrp="1"/>
+          </p:cNvSpPr>
+          <p:nvPr>
+            <p:ph idx="1"/>
+          </p:nvPr>
+        </p:nvSpPr>
+        <p:spPr>
+          <a:xfrm>
+            <a:off x="0" y="2084851"/>
+            <a:ext cx="12192000" cy="2404863"/>
+          </a:xfrm>
+        </p:spPr>
+        <p:txBody>
+          <a:bodyPr anchor="ctr">
             <a:normAutofit/>
           </a:bodyPr>
           <a:lstStyle/>
           <a:p>
-            <a:r>
-              <a:rPr lang="en-US" altLang="zh-CN" sz="4800" b="1" dirty="0">
+            <a:pPr marL="0" indent="0" algn="ctr">
+              <a:buNone/>
+            </a:pPr>
+            <a:r>
+              <a:rPr lang="zh-TW" altLang="en-US" sz="6400" b="1" dirty="0">
                 <a:solidFill>
                   <a:srgbClr val="660033"/>
                 </a:solidFill>
-                <a:latin typeface="Microsoft JhengHei" panose="020B0604030504040204" pitchFamily="34" charset="-120"/>
-                <a:ea typeface="Microsoft JhengHei" panose="020B0604030504040204" pitchFamily="34" charset="-120"/>
+                <a:latin typeface="Microsoft JhengHei" pitchFamily="34" charset="-120"/>
+                <a:ea typeface="Microsoft JhengHei" pitchFamily="34" charset="-120"/>
               </a:rPr>
-              <a:t>【</a:t>
-            </a:r>
-            <a:r>
-              <a:rPr lang="zh-CN" altLang="en-US" sz="4800" b="1" dirty="0">
+              <a:t>不要怕競爭雖長  難久抗但主强壯</a:t>
+            </a:r>
+          </a:p>
+          <a:p>
+            <a:pPr marL="0" indent="0" algn="ctr">
+              <a:buNone/>
+            </a:pPr>
+            <a:r>
+              <a:rPr lang="zh-TW" altLang="en-US" sz="6400" b="1" dirty="0">
                 <a:solidFill>
                   <a:srgbClr val="660033"/>
                 </a:solidFill>
-                <a:latin typeface="Microsoft JhengHei" panose="020B0604030504040204" pitchFamily="34" charset="-120"/>
-                <a:ea typeface="Microsoft JhengHei" panose="020B0604030504040204" pitchFamily="34" charset="-120"/>
+                <a:latin typeface="Microsoft JhengHei" pitchFamily="34" charset="-120"/>
+                <a:ea typeface="Microsoft JhengHei" pitchFamily="34" charset="-120"/>
               </a:rPr>
-              <a:t>在主裏得勝</a:t>
-            </a:r>
-            <a:r>
-              <a:rPr lang="en-US" altLang="zh-CN" sz="4800" b="1" dirty="0">
+              <a:t>靠主勇往向前爭戰必然得勝</a:t>
+            </a:r>
+          </a:p>
+        </p:txBody>
+      </p:sp>
+      <p:sp>
+        <p:nvSpPr>
+          <p:cNvPr id="3" name="TextBox 2">
+            <a:extLst>
+              <a:ext uri="{FF2B5EF4-FFF2-40B4-BE49-F238E27FC236}">
+                <a16:creationId xmlns:a16="http://schemas.microsoft.com/office/drawing/2014/main" id="{73F61934-3E69-D02F-66CB-7CA8D03AC2F7}"/>
+              </a:ext>
+            </a:extLst>
+          </p:cNvPr>
+          <p:cNvSpPr txBox="1"/>
+          <p:nvPr/>
+        </p:nvSpPr>
+        <p:spPr>
+          <a:xfrm>
+            <a:off x="0" y="5061182"/>
+            <a:ext cx="12192000" cy="584775"/>
+          </a:xfrm>
+          <a:prstGeom prst="rect">
+            <a:avLst/>
+          </a:prstGeom>
+          <a:noFill/>
+        </p:spPr>
+        <p:txBody>
+          <a:bodyPr wrap="square" rtlCol="0">
+            <a:spAutoFit/>
+          </a:bodyPr>
+          <a:lstStyle/>
+          <a:p>
+            <a:pPr algn="ctr"/>
+            <a:r>
+              <a:rPr lang="en-US" sz="3200" b="1" dirty="0">
                 <a:solidFill>
                   <a:srgbClr val="660033"/>
                 </a:solidFill>
-                <a:latin typeface="Microsoft JhengHei" panose="020B0604030504040204" pitchFamily="34" charset="-120"/>
-                <a:ea typeface="Microsoft JhengHei" panose="020B0604030504040204" pitchFamily="34" charset="-120"/>
+                <a:latin typeface="+mj-lt"/>
               </a:rPr>
-              <a:t>】</a:t>
-            </a:r>
-          </a:p>
-        </p:txBody>
-      </p:sp>
-      <p:sp>
-        <p:nvSpPr>
-          <p:cNvPr id="5" name="Content Placeholder 4"/>
-          <p:cNvSpPr>
-            <a:spLocks noGrp="1"/>
-          </p:cNvSpPr>
-          <p:nvPr>
-            <p:ph idx="1"/>
-          </p:nvPr>
-        </p:nvSpPr>
-        <p:spPr/>
-        <p:txBody>
-          <a:bodyPr>
-            <a:noAutofit/>
-          </a:bodyPr>
-          <a:lstStyle/>
-          <a:p>
-            <a:pPr marL="0" indent="0" algn="ctr">
-              <a:buNone/>
-            </a:pPr>
-            <a:r>
-              <a:rPr lang="zh-CN" altLang="zh-TW" sz="5400" b="1" dirty="0">
-                <a:solidFill>
-                  <a:srgbClr val="660033"/>
-                </a:solidFill>
-                <a:latin typeface="Microsoft JhengHei" panose="020B0604030504040204" pitchFamily="34" charset="-120"/>
-                <a:ea typeface="Microsoft JhengHei" panose="020B0604030504040204" pitchFamily="34" charset="-120"/>
-              </a:rPr>
-              <a:t>謹</a:t>
-            </a:r>
-            <a:r>
-              <a:rPr lang="zh-CN" altLang="zh-TW" sz="5400" b="1" dirty="0">
-                <a:solidFill>
-                  <a:srgbClr val="660033"/>
-                </a:solidFill>
-                <a:latin typeface="Microsoft JhengHei" panose="020B0604030504040204" pitchFamily="34" charset="-120"/>
-                <a:ea typeface="Microsoft JhengHei" panose="020B0604030504040204" pitchFamily="34" charset="-120"/>
-              </a:rPr>
-              <a:t>聽</a:t>
-            </a:r>
-            <a:r>
-              <a:rPr lang="zh-CN" altLang="zh-TW" sz="5400" b="1" dirty="0" smtClean="0">
-                <a:solidFill>
-                  <a:srgbClr val="660033"/>
-                </a:solidFill>
-                <a:latin typeface="Microsoft JhengHei" panose="020B0604030504040204" pitchFamily="34" charset="-120"/>
-                <a:ea typeface="Microsoft JhengHei" panose="020B0604030504040204" pitchFamily="34" charset="-120"/>
-              </a:rPr>
-              <a:t>呀</a:t>
-            </a:r>
-            <a:r>
-              <a:rPr lang="en-US" altLang="zh-CN" sz="5400" b="1" dirty="0" smtClean="0">
-                <a:solidFill>
-                  <a:srgbClr val="660033"/>
-                </a:solidFill>
-                <a:latin typeface="Microsoft JhengHei" panose="020B0604030504040204" pitchFamily="34" charset="-120"/>
-                <a:ea typeface="Microsoft JhengHei" panose="020B0604030504040204" pitchFamily="34" charset="-120"/>
-              </a:rPr>
-              <a:t>“</a:t>
-            </a:r>
-            <a:r>
-              <a:rPr lang="zh-CN" altLang="en-US" sz="5400" b="1" dirty="0">
-                <a:solidFill>
-                  <a:srgbClr val="660033"/>
-                </a:solidFill>
-                <a:latin typeface="Microsoft JhengHei" panose="020B0604030504040204" pitchFamily="34" charset="-120"/>
-                <a:ea typeface="Microsoft JhengHei" panose="020B0604030504040204" pitchFamily="34" charset="-120"/>
-              </a:rPr>
-              <a:t>我與你居住到永遠</a:t>
-            </a:r>
-            <a:r>
-              <a:rPr lang="en-US" altLang="zh-CN" sz="5400" b="1" dirty="0">
-                <a:solidFill>
-                  <a:srgbClr val="660033"/>
-                </a:solidFill>
-                <a:latin typeface="Microsoft JhengHei" panose="020B0604030504040204" pitchFamily="34" charset="-120"/>
-                <a:ea typeface="Microsoft JhengHei" panose="020B0604030504040204" pitchFamily="34" charset="-120"/>
-              </a:rPr>
-              <a:t>”</a:t>
-            </a:r>
-          </a:p>
-          <a:p>
-            <a:pPr marL="0" indent="0" algn="ctr">
-              <a:buNone/>
-            </a:pPr>
-            <a:r>
-              <a:rPr lang="zh-CN" altLang="en-US" sz="5400" b="1" dirty="0">
-                <a:solidFill>
-                  <a:srgbClr val="660033"/>
-                </a:solidFill>
-                <a:latin typeface="Microsoft JhengHei" panose="020B0604030504040204" pitchFamily="34" charset="-120"/>
-                <a:ea typeface="Microsoft JhengHei" panose="020B0604030504040204" pitchFamily="34" charset="-120"/>
-              </a:rPr>
-              <a:t>靠主必不驚打仗風</a:t>
-            </a:r>
-            <a:r>
-              <a:rPr lang="zh-CN" altLang="en-US" sz="5400" b="1" dirty="0">
-                <a:solidFill>
-                  <a:srgbClr val="660033"/>
-                </a:solidFill>
-                <a:latin typeface="Microsoft JhengHei" panose="020B0604030504040204" pitchFamily="34" charset="-120"/>
-                <a:ea typeface="Microsoft JhengHei" panose="020B0604030504040204" pitchFamily="34" charset="-120"/>
-              </a:rPr>
-              <a:t>聲  </a:t>
-            </a:r>
-            <a:endParaRPr lang="en-US" altLang="zh-CN" sz="5400" b="1" dirty="0">
+              <a:t>( 1 / 3 )</a:t>
+            </a:r>
+            <a:endParaRPr lang="vi-VN" sz="3200" b="1" dirty="0">
               <a:solidFill>
                 <a:srgbClr val="660033"/>
               </a:solidFill>
-              <a:latin typeface="Microsoft JhengHei" panose="020B0604030504040204" pitchFamily="34" charset="-120"/>
-              <a:ea typeface="Microsoft JhengHei" panose="020B0604030504040204" pitchFamily="34" charset="-120"/>
-            </a:endParaRPr>
-          </a:p>
-          <a:p>
-            <a:pPr marL="0" indent="0" algn="ctr">
-              <a:buNone/>
-            </a:pPr>
-            <a:r>
-              <a:rPr lang="zh-CN" altLang="en-US" sz="5400" b="1" dirty="0">
-                <a:solidFill>
-                  <a:srgbClr val="660033"/>
-                </a:solidFill>
-                <a:latin typeface="Microsoft JhengHei" panose="020B0604030504040204" pitchFamily="34" charset="-120"/>
-                <a:ea typeface="Microsoft JhengHei" panose="020B0604030504040204" pitchFamily="34" charset="-120"/>
-              </a:rPr>
-              <a:t>進</a:t>
-            </a:r>
-            <a:r>
-              <a:rPr lang="zh-CN" altLang="en-US" sz="5400" b="1" dirty="0">
-                <a:solidFill>
-                  <a:srgbClr val="660033"/>
-                </a:solidFill>
-                <a:latin typeface="Microsoft JhengHei" panose="020B0604030504040204" pitchFamily="34" charset="-120"/>
-                <a:ea typeface="Microsoft JhengHei" panose="020B0604030504040204" pitchFamily="34" charset="-120"/>
-              </a:rPr>
-              <a:t>前打勝仗</a:t>
-            </a:r>
-          </a:p>
-          <a:p>
-            <a:pPr marL="0" indent="0" algn="ctr">
-              <a:buNone/>
-            </a:pPr>
-            <a:r>
-              <a:rPr lang="zh-CN" altLang="en-US" sz="5400" b="1" dirty="0">
-                <a:solidFill>
-                  <a:srgbClr val="660033"/>
-                </a:solidFill>
-                <a:latin typeface="Microsoft JhengHei" panose="020B0604030504040204" pitchFamily="34" charset="-120"/>
-                <a:ea typeface="Microsoft JhengHei" panose="020B0604030504040204" pitchFamily="34" charset="-120"/>
-              </a:rPr>
-              <a:t>同主快樂一直到永</a:t>
-            </a:r>
-            <a:r>
-              <a:rPr lang="zh-CN" altLang="en-US" sz="5400" b="1" dirty="0">
-                <a:solidFill>
-                  <a:srgbClr val="660033"/>
-                </a:solidFill>
-                <a:latin typeface="Microsoft JhengHei" panose="020B0604030504040204" pitchFamily="34" charset="-120"/>
-                <a:ea typeface="Microsoft JhengHei" panose="020B0604030504040204" pitchFamily="34" charset="-120"/>
-              </a:rPr>
-              <a:t>遠</a:t>
-            </a:r>
-            <a:endParaRPr lang="zh-CN" altLang="en-US" sz="5400" b="1" dirty="0">
-              <a:solidFill>
-                <a:srgbClr val="660033"/>
-              </a:solidFill>
-              <a:latin typeface="Microsoft JhengHei" panose="020B0604030504040204" pitchFamily="34" charset="-120"/>
-              <a:ea typeface="Microsoft JhengHei" panose="020B0604030504040204" pitchFamily="34" charset="-120"/>
+              <a:latin typeface="+mj-lt"/>
             </a:endParaRPr>
           </a:p>
         </p:txBody>
@@ -4414,7 +7060,7 @@
     </p:spTree>
     <p:extLst>
       <p:ext uri="{BB962C8B-B14F-4D97-AF65-F5344CB8AC3E}">
-        <p14:creationId xmlns:p14="http://schemas.microsoft.com/office/powerpoint/2010/main" val="3656394406"/>
+        <p14:creationId xmlns:p14="http://schemas.microsoft.com/office/powerpoint/2010/main" val="656524927"/>
       </p:ext>
     </p:extLst>
   </p:cSld>
@@ -4429,7 +7075,13 @@
   <p:cSld>
     <p:spTree>
       <p:nvGrpSpPr>
-        <p:cNvPr id="1" name=""/>
+        <p:cNvPr id="1" name="">
+          <a:extLst>
+            <a:ext uri="{FF2B5EF4-FFF2-40B4-BE49-F238E27FC236}">
+              <a16:creationId xmlns:a16="http://schemas.microsoft.com/office/drawing/2014/main" id="{2F18A314-0BAD-96E2-4DC9-10A58F06303E}"/>
+            </a:ext>
+          </a:extLst>
+        </p:cNvPr>
         <p:cNvGrpSpPr/>
         <p:nvPr/>
       </p:nvGrpSpPr>
@@ -4443,249 +7095,67 @@
       </p:grpSpPr>
       <p:sp>
         <p:nvSpPr>
-          <p:cNvPr id="4" name="Title 3"/>
-          <p:cNvSpPr>
-            <a:spLocks noGrp="1"/>
-          </p:cNvSpPr>
-          <p:nvPr>
-            <p:ph type="title"/>
-          </p:nvPr>
-        </p:nvSpPr>
-        <p:spPr/>
-        <p:txBody>
-          <a:bodyPr>
+          <p:cNvPr id="5" name="內容版面配置區 4">
+            <a:extLst>
+              <a:ext uri="{FF2B5EF4-FFF2-40B4-BE49-F238E27FC236}">
+                <a16:creationId xmlns:a16="http://schemas.microsoft.com/office/drawing/2014/main" id="{084D5C75-AF3A-2147-EC5E-8859B5D757FB}"/>
+              </a:ext>
+            </a:extLst>
+          </p:cNvPr>
+          <p:cNvSpPr>
+            <a:spLocks noGrp="1"/>
+          </p:cNvSpPr>
+          <p:nvPr>
+            <p:ph idx="1"/>
+          </p:nvPr>
+        </p:nvSpPr>
+        <p:spPr>
+          <a:xfrm>
+            <a:off x="0" y="2084851"/>
+            <a:ext cx="12192000" cy="2404863"/>
+          </a:xfrm>
+        </p:spPr>
+        <p:txBody>
+          <a:bodyPr anchor="ctr">
             <a:normAutofit/>
           </a:bodyPr>
           <a:lstStyle/>
           <a:p>
-            <a:r>
-              <a:rPr lang="en-US" altLang="zh-CN" sz="4800" b="1" dirty="0">
+            <a:pPr marL="0" indent="0" algn="ctr">
+              <a:buNone/>
+            </a:pPr>
+            <a:r>
+              <a:rPr lang="zh-TW" altLang="en-US" sz="6400" b="1" dirty="0">
                 <a:solidFill>
                   <a:srgbClr val="660033"/>
                 </a:solidFill>
-                <a:latin typeface="Microsoft JhengHei" panose="020B0604030504040204" pitchFamily="34" charset="-120"/>
-                <a:ea typeface="Microsoft JhengHei" panose="020B0604030504040204" pitchFamily="34" charset="-120"/>
+                <a:latin typeface="Microsoft JhengHei" pitchFamily="34" charset="-120"/>
+                <a:ea typeface="Microsoft JhengHei" pitchFamily="34" charset="-120"/>
               </a:rPr>
-              <a:t>【</a:t>
-            </a:r>
-            <a:r>
-              <a:rPr lang="zh-CN" altLang="en-US" sz="4800" b="1" dirty="0">
+              <a:t>在耶穌裏得勝  </a:t>
+            </a:r>
+          </a:p>
+          <a:p>
+            <a:pPr marL="0" indent="0" algn="ctr">
+              <a:buNone/>
+            </a:pPr>
+            <a:r>
+              <a:rPr lang="zh-TW" altLang="en-US" sz="6400" b="1" dirty="0">
                 <a:solidFill>
                   <a:srgbClr val="660033"/>
                 </a:solidFill>
-                <a:latin typeface="Microsoft JhengHei" panose="020B0604030504040204" pitchFamily="34" charset="-120"/>
-                <a:ea typeface="Microsoft JhengHei" panose="020B0604030504040204" pitchFamily="34" charset="-120"/>
+                <a:latin typeface="Microsoft JhengHei" pitchFamily="34" charset="-120"/>
+                <a:ea typeface="Microsoft JhengHei" pitchFamily="34" charset="-120"/>
               </a:rPr>
-              <a:t>在主裏得勝</a:t>
-            </a:r>
-            <a:r>
-              <a:rPr lang="en-US" altLang="zh-CN" sz="4800" b="1" dirty="0">
-                <a:solidFill>
-                  <a:srgbClr val="660033"/>
-                </a:solidFill>
-                <a:latin typeface="Microsoft JhengHei" panose="020B0604030504040204" pitchFamily="34" charset="-120"/>
-                <a:ea typeface="Microsoft JhengHei" panose="020B0604030504040204" pitchFamily="34" charset="-120"/>
-              </a:rPr>
-              <a:t>】</a:t>
-            </a:r>
-          </a:p>
-        </p:txBody>
-      </p:sp>
-      <p:sp>
-        <p:nvSpPr>
-          <p:cNvPr id="5" name="Content Placeholder 4"/>
-          <p:cNvSpPr>
-            <a:spLocks noGrp="1"/>
-          </p:cNvSpPr>
-          <p:nvPr>
-            <p:ph idx="1"/>
-          </p:nvPr>
-        </p:nvSpPr>
-        <p:spPr/>
-        <p:txBody>
-          <a:bodyPr>
-            <a:noAutofit/>
-          </a:bodyPr>
-          <a:lstStyle/>
-          <a:p>
-            <a:pPr marL="0" indent="0" algn="ctr">
-              <a:buNone/>
-            </a:pPr>
-            <a:r>
-              <a:rPr lang="zh-CN" altLang="zh-TW" sz="5400" b="1" dirty="0">
-                <a:solidFill>
-                  <a:srgbClr val="660033"/>
-                </a:solidFill>
-                <a:latin typeface="Microsoft JhengHei" panose="020B0604030504040204" pitchFamily="34" charset="-120"/>
-                <a:ea typeface="Microsoft JhengHei" panose="020B0604030504040204" pitchFamily="34" charset="-120"/>
-              </a:rPr>
-              <a:t>有時勇氣挫磨將被仇敵勝過</a:t>
-            </a:r>
-          </a:p>
-          <a:p>
-            <a:pPr marL="0" indent="0" algn="ctr">
-              <a:buNone/>
-            </a:pPr>
-            <a:r>
-              <a:rPr lang="zh-CN" altLang="zh-TW" sz="5400" b="1" dirty="0">
-                <a:solidFill>
-                  <a:srgbClr val="660033"/>
-                </a:solidFill>
-                <a:latin typeface="Microsoft JhengHei" panose="020B0604030504040204" pitchFamily="34" charset="-120"/>
-                <a:ea typeface="Microsoft JhengHei" panose="020B0604030504040204" pitchFamily="34" charset="-120"/>
-              </a:rPr>
-              <a:t>信靠神莫須怕亦莫須慮</a:t>
-            </a:r>
-          </a:p>
-          <a:p>
-            <a:pPr marL="0" indent="0" algn="ctr">
-              <a:buNone/>
-            </a:pPr>
-            <a:r>
-              <a:rPr lang="zh-CN" altLang="zh-TW" sz="5400" b="1" dirty="0">
-                <a:solidFill>
-                  <a:srgbClr val="660033"/>
-                </a:solidFill>
-                <a:latin typeface="Microsoft JhengHei" panose="020B0604030504040204" pitchFamily="34" charset="-120"/>
-                <a:ea typeface="Microsoft JhengHei" panose="020B0604030504040204" pitchFamily="34" charset="-120"/>
-                <a:sym typeface="+mn-ea"/>
-              </a:rPr>
-              <a:t>謹聽救主呼喚</a:t>
-            </a:r>
-            <a:r>
-              <a:rPr lang="zh-CN" altLang="zh-TW" sz="5400" b="1" dirty="0">
-                <a:solidFill>
-                  <a:srgbClr val="660033"/>
-                </a:solidFill>
-                <a:latin typeface="Microsoft JhengHei" panose="020B0604030504040204" pitchFamily="34" charset="-120"/>
-                <a:ea typeface="Microsoft JhengHei" panose="020B0604030504040204" pitchFamily="34" charset="-120"/>
-                <a:sym typeface="+mn-ea"/>
-              </a:rPr>
-              <a:t>聲</a:t>
-            </a:r>
-            <a:r>
-              <a:rPr lang="en-US" altLang="zh-CN" sz="5400" b="1" dirty="0">
-                <a:solidFill>
-                  <a:srgbClr val="660033"/>
-                </a:solidFill>
-                <a:latin typeface="Microsoft JhengHei" panose="020B0604030504040204" pitchFamily="34" charset="-120"/>
-                <a:ea typeface="Microsoft JhengHei" panose="020B0604030504040204" pitchFamily="34" charset="-120"/>
-                <a:sym typeface="+mn-ea"/>
-              </a:rPr>
-              <a:t>  </a:t>
-            </a:r>
-            <a:r>
-              <a:rPr lang="zh-CN" altLang="zh-TW" sz="5400" b="1" dirty="0">
-                <a:solidFill>
-                  <a:srgbClr val="660033"/>
-                </a:solidFill>
-                <a:latin typeface="Microsoft JhengHei" panose="020B0604030504040204" pitchFamily="34" charset="-120"/>
-                <a:ea typeface="Microsoft JhengHei" panose="020B0604030504040204" pitchFamily="34" charset="-120"/>
-                <a:sym typeface="+mn-ea"/>
-              </a:rPr>
-              <a:t>我</a:t>
-            </a:r>
-            <a:r>
-              <a:rPr lang="zh-CN" altLang="zh-TW" sz="5400" b="1" dirty="0">
-                <a:solidFill>
-                  <a:srgbClr val="660033"/>
-                </a:solidFill>
-                <a:latin typeface="Microsoft JhengHei" panose="020B0604030504040204" pitchFamily="34" charset="-120"/>
-                <a:ea typeface="Microsoft JhengHei" panose="020B0604030504040204" pitchFamily="34" charset="-120"/>
-                <a:sym typeface="+mn-ea"/>
-              </a:rPr>
-              <a:t>永不使你失落</a:t>
-            </a:r>
-            <a:endParaRPr lang="en-US" altLang="zh-CN" sz="5400" b="1" dirty="0">
-              <a:solidFill>
-                <a:srgbClr val="660033"/>
-              </a:solidFill>
-              <a:latin typeface="Microsoft JhengHei" panose="020B0604030504040204" pitchFamily="34" charset="-120"/>
-              <a:ea typeface="Microsoft JhengHei" panose="020B0604030504040204" pitchFamily="34" charset="-120"/>
-              <a:sym typeface="+mn-ea"/>
-            </a:endParaRPr>
-          </a:p>
-          <a:p>
-            <a:pPr marL="0" indent="0" algn="ctr">
-              <a:buNone/>
-            </a:pPr>
-            <a:r>
-              <a:rPr lang="zh-CN" altLang="zh-TW" sz="5400" b="1" dirty="0">
-                <a:solidFill>
-                  <a:srgbClr val="660033"/>
-                </a:solidFill>
-                <a:latin typeface="Microsoft JhengHei" panose="020B0604030504040204" pitchFamily="34" charset="-120"/>
-                <a:ea typeface="Microsoft JhengHei" panose="020B0604030504040204" pitchFamily="34" charset="-120"/>
-                <a:sym typeface="+mn-ea"/>
-              </a:rPr>
-              <a:t>不要怕我是你所盼望你所依</a:t>
-            </a:r>
-            <a:endParaRPr lang="en-US" altLang="zh-CN" sz="5400" b="1" dirty="0">
-              <a:solidFill>
-                <a:srgbClr val="660033"/>
-              </a:solidFill>
-              <a:latin typeface="Microsoft JhengHei" panose="020B0604030504040204" pitchFamily="34" charset="-120"/>
-              <a:ea typeface="Microsoft JhengHei" panose="020B0604030504040204" pitchFamily="34" charset="-120"/>
-              <a:sym typeface="+mn-ea"/>
-            </a:endParaRPr>
-          </a:p>
-        </p:txBody>
-      </p:sp>
-      <p:sp>
-        <p:nvSpPr>
-          <p:cNvPr id="6" name="Text Box 1"/>
-          <p:cNvSpPr txBox="1"/>
-          <p:nvPr/>
-        </p:nvSpPr>
-        <p:spPr>
-          <a:xfrm>
-            <a:off x="407368" y="1700808"/>
-            <a:ext cx="1055440" cy="923330"/>
-          </a:xfrm>
-          <a:prstGeom prst="rect">
-            <a:avLst/>
-          </a:prstGeom>
-          <a:noFill/>
-          <a:ln w="9525">
-            <a:noFill/>
-            <a:miter lim="800000"/>
-          </a:ln>
-        </p:spPr>
-        <p:txBody>
-          <a:bodyPr wrap="square">
-            <a:spAutoFit/>
-          </a:bodyPr>
-          <a:lstStyle/>
-          <a:p>
-            <a:pPr algn="ctr"/>
-            <a:r>
-              <a:rPr lang="en-US" sz="5400" b="1" dirty="0">
-                <a:solidFill>
-                  <a:srgbClr val="660033"/>
-                </a:solidFill>
-              </a:rPr>
-              <a:t>2</a:t>
-            </a:r>
-            <a:r>
-              <a:rPr lang="en-US" sz="5400" b="1" dirty="0" smtClean="0">
-                <a:solidFill>
-                  <a:srgbClr val="660033"/>
-                </a:solidFill>
-              </a:rPr>
-              <a:t>.</a:t>
-            </a:r>
-            <a:endParaRPr lang="en-US" sz="5400" b="1" dirty="0">
-              <a:solidFill>
-                <a:srgbClr val="660033"/>
-              </a:solidFill>
-            </a:endParaRPr>
+              <a:t>只要在耶穌裏纔得勝</a:t>
+            </a:r>
           </a:p>
         </p:txBody>
       </p:sp>
     </p:spTree>
     <p:extLst>
       <p:ext uri="{BB962C8B-B14F-4D97-AF65-F5344CB8AC3E}">
-        <p14:creationId xmlns:p14="http://schemas.microsoft.com/office/powerpoint/2010/main" val="3045680444"/>
+        <p14:creationId xmlns:p14="http://schemas.microsoft.com/office/powerpoint/2010/main" val="1898122194"/>
       </p:ext>
     </p:extLst>
   </p:cSld>
@@ -4700,7 +7170,13 @@
   <p:cSld>
     <p:spTree>
       <p:nvGrpSpPr>
-        <p:cNvPr id="1" name=""/>
+        <p:cNvPr id="1" name="">
+          <a:extLst>
+            <a:ext uri="{FF2B5EF4-FFF2-40B4-BE49-F238E27FC236}">
+              <a16:creationId xmlns:a16="http://schemas.microsoft.com/office/drawing/2014/main" id="{EF8DF6F3-FC29-B7F1-35A0-1FD20CE63C7A}"/>
+            </a:ext>
+          </a:extLst>
+        </p:cNvPr>
         <p:cNvGrpSpPr/>
         <p:nvPr/>
       </p:nvGrpSpPr>
@@ -4714,208 +7190,67 @@
       </p:grpSpPr>
       <p:sp>
         <p:nvSpPr>
-          <p:cNvPr id="4" name="Title 3"/>
-          <p:cNvSpPr>
-            <a:spLocks noGrp="1"/>
-          </p:cNvSpPr>
-          <p:nvPr>
-            <p:ph type="title"/>
-          </p:nvPr>
-        </p:nvSpPr>
-        <p:spPr/>
-        <p:txBody>
-          <a:bodyPr>
+          <p:cNvPr id="5" name="內容版面配置區 4">
+            <a:extLst>
+              <a:ext uri="{FF2B5EF4-FFF2-40B4-BE49-F238E27FC236}">
+                <a16:creationId xmlns:a16="http://schemas.microsoft.com/office/drawing/2014/main" id="{338D39D5-CF4A-D0BC-CACD-715C9FF31E9B}"/>
+              </a:ext>
+            </a:extLst>
+          </p:cNvPr>
+          <p:cNvSpPr>
+            <a:spLocks noGrp="1"/>
+          </p:cNvSpPr>
+          <p:nvPr>
+            <p:ph idx="1"/>
+          </p:nvPr>
+        </p:nvSpPr>
+        <p:spPr>
+          <a:xfrm>
+            <a:off x="0" y="2084851"/>
+            <a:ext cx="12192000" cy="2404863"/>
+          </a:xfrm>
+        </p:spPr>
+        <p:txBody>
+          <a:bodyPr anchor="ctr">
             <a:normAutofit/>
           </a:bodyPr>
           <a:lstStyle/>
           <a:p>
-            <a:r>
-              <a:rPr lang="en-US" altLang="zh-CN" sz="4800" b="1" dirty="0">
+            <a:pPr marL="0" indent="0" algn="ctr">
+              <a:buNone/>
+            </a:pPr>
+            <a:r>
+              <a:rPr lang="zh-TW" altLang="en-US" sz="6400" b="1" dirty="0">
                 <a:solidFill>
                   <a:srgbClr val="660033"/>
                 </a:solidFill>
-                <a:latin typeface="Microsoft JhengHei" panose="020B0604030504040204" pitchFamily="34" charset="-120"/>
-                <a:ea typeface="Microsoft JhengHei" panose="020B0604030504040204" pitchFamily="34" charset="-120"/>
+                <a:latin typeface="Microsoft JhengHei" pitchFamily="34" charset="-120"/>
+                <a:ea typeface="Microsoft JhengHei" pitchFamily="34" charset="-120"/>
               </a:rPr>
-              <a:t>【</a:t>
-            </a:r>
-            <a:r>
-              <a:rPr lang="zh-CN" altLang="en-US" sz="4800" b="1" dirty="0">
+              <a:t>上陣與敵交戰總不要驚</a:t>
+            </a:r>
+          </a:p>
+          <a:p>
+            <a:pPr marL="0" indent="0" algn="ctr">
+              <a:buNone/>
+            </a:pPr>
+            <a:r>
+              <a:rPr lang="zh-TW" altLang="en-US" sz="6400" b="1" dirty="0">
                 <a:solidFill>
                   <a:srgbClr val="660033"/>
                 </a:solidFill>
-                <a:latin typeface="Microsoft JhengHei" panose="020B0604030504040204" pitchFamily="34" charset="-120"/>
-                <a:ea typeface="Microsoft JhengHei" panose="020B0604030504040204" pitchFamily="34" charset="-120"/>
+                <a:latin typeface="Microsoft JhengHei" pitchFamily="34" charset="-120"/>
+                <a:ea typeface="Microsoft JhengHei" pitchFamily="34" charset="-120"/>
               </a:rPr>
-              <a:t>在主裏得勝</a:t>
-            </a:r>
-            <a:r>
-              <a:rPr lang="en-US" altLang="zh-CN" sz="4800" b="1" dirty="0">
-                <a:solidFill>
-                  <a:srgbClr val="660033"/>
-                </a:solidFill>
-                <a:latin typeface="Microsoft JhengHei" panose="020B0604030504040204" pitchFamily="34" charset="-120"/>
-                <a:ea typeface="Microsoft JhengHei" panose="020B0604030504040204" pitchFamily="34" charset="-120"/>
-              </a:rPr>
-              <a:t>】</a:t>
-            </a:r>
-          </a:p>
-        </p:txBody>
-      </p:sp>
-      <p:sp>
-        <p:nvSpPr>
-          <p:cNvPr id="5" name="Content Placeholder 4"/>
-          <p:cNvSpPr>
-            <a:spLocks noGrp="1"/>
-          </p:cNvSpPr>
-          <p:nvPr>
-            <p:ph idx="1"/>
-          </p:nvPr>
-        </p:nvSpPr>
-        <p:spPr/>
-        <p:txBody>
-          <a:bodyPr>
-            <a:noAutofit/>
-          </a:bodyPr>
-          <a:lstStyle/>
-          <a:p>
-            <a:pPr marL="0" indent="0" algn="ctr">
-              <a:buNone/>
-            </a:pPr>
-            <a:r>
-              <a:rPr lang="zh-CN" altLang="zh-TW" sz="5400" b="1" dirty="0">
-                <a:solidFill>
-                  <a:srgbClr val="660033"/>
-                </a:solidFill>
-                <a:latin typeface="Microsoft JhengHei" panose="020B0604030504040204" pitchFamily="34" charset="-120"/>
-                <a:ea typeface="Microsoft JhengHei" panose="020B0604030504040204" pitchFamily="34" charset="-120"/>
-              </a:rPr>
-              <a:t>在耶穌裏得</a:t>
-            </a:r>
-            <a:r>
-              <a:rPr lang="zh-CN" altLang="zh-TW" sz="5400" b="1" dirty="0">
-                <a:solidFill>
-                  <a:srgbClr val="660033"/>
-                </a:solidFill>
-                <a:latin typeface="Microsoft JhengHei" panose="020B0604030504040204" pitchFamily="34" charset="-120"/>
-                <a:ea typeface="Microsoft JhengHei" panose="020B0604030504040204" pitchFamily="34" charset="-120"/>
-              </a:rPr>
-              <a:t>勝</a:t>
-            </a:r>
-            <a:r>
-              <a:rPr lang="en-US" altLang="zh-CN" sz="5400" b="1" dirty="0">
-                <a:solidFill>
-                  <a:srgbClr val="660033"/>
-                </a:solidFill>
-                <a:latin typeface="Microsoft JhengHei" panose="020B0604030504040204" pitchFamily="34" charset="-120"/>
-                <a:ea typeface="Microsoft JhengHei" panose="020B0604030504040204" pitchFamily="34" charset="-120"/>
-              </a:rPr>
-              <a:t>  </a:t>
-            </a:r>
-          </a:p>
-          <a:p>
-            <a:pPr marL="0" indent="0" algn="ctr">
-              <a:buNone/>
-            </a:pPr>
-            <a:r>
-              <a:rPr lang="zh-CN" altLang="zh-TW" sz="5400" b="1" dirty="0">
-                <a:solidFill>
-                  <a:srgbClr val="660033"/>
-                </a:solidFill>
-                <a:latin typeface="Microsoft JhengHei" panose="020B0604030504040204" pitchFamily="34" charset="-120"/>
-                <a:ea typeface="Microsoft JhengHei" panose="020B0604030504040204" pitchFamily="34" charset="-120"/>
-              </a:rPr>
-              <a:t>只</a:t>
-            </a:r>
-            <a:r>
-              <a:rPr lang="zh-CN" altLang="zh-TW" sz="5400" b="1" dirty="0">
-                <a:solidFill>
-                  <a:srgbClr val="660033"/>
-                </a:solidFill>
-                <a:latin typeface="Microsoft JhengHei" panose="020B0604030504040204" pitchFamily="34" charset="-120"/>
-                <a:ea typeface="Microsoft JhengHei" panose="020B0604030504040204" pitchFamily="34" charset="-120"/>
-              </a:rPr>
-              <a:t>要在耶穌裏纔得勝</a:t>
-            </a:r>
-          </a:p>
-          <a:p>
-            <a:pPr marL="0" indent="0" algn="ctr">
-              <a:buNone/>
-            </a:pPr>
-            <a:r>
-              <a:rPr lang="zh-CN" altLang="zh-TW" sz="5400" b="1" dirty="0">
-                <a:solidFill>
-                  <a:srgbClr val="660033"/>
-                </a:solidFill>
-                <a:latin typeface="Microsoft JhengHei" panose="020B0604030504040204" pitchFamily="34" charset="-120"/>
-                <a:ea typeface="Microsoft JhengHei" panose="020B0604030504040204" pitchFamily="34" charset="-120"/>
-              </a:rPr>
-              <a:t>上陣與敵交戰總不要驚</a:t>
-            </a:r>
-          </a:p>
-          <a:p>
-            <a:pPr marL="0" indent="0" algn="ctr">
-              <a:buNone/>
-            </a:pPr>
-            <a:r>
-              <a:rPr lang="zh-CN" altLang="zh-TW" sz="5400" b="1" dirty="0">
-                <a:solidFill>
-                  <a:srgbClr val="660033"/>
-                </a:solidFill>
-                <a:latin typeface="Microsoft JhengHei" panose="020B0604030504040204" pitchFamily="34" charset="-120"/>
-                <a:ea typeface="Microsoft JhengHei" panose="020B0604030504040204" pitchFamily="34" charset="-120"/>
-                <a:sym typeface="+mn-ea"/>
-              </a:rPr>
-              <a:t>因主在前</a:t>
-            </a:r>
-            <a:r>
-              <a:rPr lang="zh-CN" altLang="zh-TW" sz="5400" b="1" dirty="0">
-                <a:solidFill>
-                  <a:srgbClr val="660033"/>
-                </a:solidFill>
-                <a:latin typeface="Microsoft JhengHei" panose="020B0604030504040204" pitchFamily="34" charset="-120"/>
-                <a:ea typeface="Microsoft JhengHei" panose="020B0604030504040204" pitchFamily="34" charset="-120"/>
-                <a:sym typeface="+mn-ea"/>
-              </a:rPr>
-              <a:t>領此</a:t>
-            </a:r>
-            <a:r>
-              <a:rPr lang="zh-CN" altLang="zh-TW" sz="5400" b="1" dirty="0">
-                <a:solidFill>
-                  <a:srgbClr val="660033"/>
-                </a:solidFill>
-                <a:latin typeface="Microsoft JhengHei" panose="020B0604030504040204" pitchFamily="34" charset="-120"/>
-                <a:ea typeface="Microsoft JhengHei" panose="020B0604030504040204" pitchFamily="34" charset="-120"/>
-                <a:sym typeface="+mn-ea"/>
-              </a:rPr>
-              <a:t>路最顯</a:t>
-            </a:r>
-            <a:r>
-              <a:rPr lang="zh-CN" altLang="zh-TW" sz="5400" b="1" dirty="0">
-                <a:solidFill>
-                  <a:srgbClr val="660033"/>
-                </a:solidFill>
-                <a:latin typeface="Microsoft JhengHei" panose="020B0604030504040204" pitchFamily="34" charset="-120"/>
-                <a:ea typeface="Microsoft JhengHei" panose="020B0604030504040204" pitchFamily="34" charset="-120"/>
-                <a:sym typeface="+mn-ea"/>
-              </a:rPr>
-              <a:t>明</a:t>
-            </a:r>
-            <a:endParaRPr lang="en-US" altLang="zh-CN" sz="5400" b="1" dirty="0">
-              <a:solidFill>
-                <a:srgbClr val="660033"/>
-              </a:solidFill>
-              <a:latin typeface="Microsoft JhengHei" panose="020B0604030504040204" pitchFamily="34" charset="-120"/>
-              <a:ea typeface="Microsoft JhengHei" panose="020B0604030504040204" pitchFamily="34" charset="-120"/>
-              <a:sym typeface="+mn-ea"/>
-            </a:endParaRPr>
+              <a:t>因主在前領此路最顯明</a:t>
+            </a:r>
           </a:p>
         </p:txBody>
       </p:sp>
     </p:spTree>
     <p:extLst>
       <p:ext uri="{BB962C8B-B14F-4D97-AF65-F5344CB8AC3E}">
-        <p14:creationId xmlns:p14="http://schemas.microsoft.com/office/powerpoint/2010/main" val="416358762"/>
+        <p14:creationId xmlns:p14="http://schemas.microsoft.com/office/powerpoint/2010/main" val="888401908"/>
       </p:ext>
     </p:extLst>
   </p:cSld>
@@ -4930,7 +7265,13 @@
   <p:cSld>
     <p:spTree>
       <p:nvGrpSpPr>
-        <p:cNvPr id="1" name=""/>
+        <p:cNvPr id="1" name="">
+          <a:extLst>
+            <a:ext uri="{FF2B5EF4-FFF2-40B4-BE49-F238E27FC236}">
+              <a16:creationId xmlns:a16="http://schemas.microsoft.com/office/drawing/2014/main" id="{94A1813E-826B-F9A7-E44D-201002968145}"/>
+            </a:ext>
+          </a:extLst>
+        </p:cNvPr>
         <p:cNvGrpSpPr/>
         <p:nvPr/>
       </p:nvGrpSpPr>
@@ -4944,230 +7285,67 @@
       </p:grpSpPr>
       <p:sp>
         <p:nvSpPr>
-          <p:cNvPr id="4" name="Title 3"/>
-          <p:cNvSpPr>
-            <a:spLocks noGrp="1"/>
-          </p:cNvSpPr>
-          <p:nvPr>
-            <p:ph type="title"/>
-          </p:nvPr>
-        </p:nvSpPr>
-        <p:spPr/>
-        <p:txBody>
-          <a:bodyPr>
+          <p:cNvPr id="5" name="內容版面配置區 4">
+            <a:extLst>
+              <a:ext uri="{FF2B5EF4-FFF2-40B4-BE49-F238E27FC236}">
+                <a16:creationId xmlns:a16="http://schemas.microsoft.com/office/drawing/2014/main" id="{9D1FC99E-BC66-0070-A980-B0DE68E8F1F8}"/>
+              </a:ext>
+            </a:extLst>
+          </p:cNvPr>
+          <p:cNvSpPr>
+            <a:spLocks noGrp="1"/>
+          </p:cNvSpPr>
+          <p:nvPr>
+            <p:ph idx="1"/>
+          </p:nvPr>
+        </p:nvSpPr>
+        <p:spPr>
+          <a:xfrm>
+            <a:off x="0" y="2084851"/>
+            <a:ext cx="12192000" cy="2404863"/>
+          </a:xfrm>
+        </p:spPr>
+        <p:txBody>
+          <a:bodyPr anchor="ctr">
             <a:normAutofit/>
           </a:bodyPr>
           <a:lstStyle/>
           <a:p>
-            <a:r>
-              <a:rPr lang="en-US" altLang="zh-CN" sz="4800" b="1" dirty="0">
+            <a:pPr marL="0" indent="0" algn="ctr">
+              <a:buNone/>
+            </a:pPr>
+            <a:r>
+              <a:rPr lang="zh-TW" altLang="en-US" sz="6400" b="1" dirty="0">
                 <a:solidFill>
                   <a:srgbClr val="660033"/>
                 </a:solidFill>
-                <a:latin typeface="Microsoft JhengHei" panose="020B0604030504040204" pitchFamily="34" charset="-120"/>
-                <a:ea typeface="Microsoft JhengHei" panose="020B0604030504040204" pitchFamily="34" charset="-120"/>
+                <a:latin typeface="Microsoft JhengHei" pitchFamily="34" charset="-120"/>
+                <a:ea typeface="Microsoft JhengHei" pitchFamily="34" charset="-120"/>
               </a:rPr>
-              <a:t>【</a:t>
-            </a:r>
-            <a:r>
-              <a:rPr lang="zh-CN" altLang="en-US" sz="4800" b="1" dirty="0">
+              <a:t>謹聽呀“我與你居住到永遠”</a:t>
+            </a:r>
+          </a:p>
+          <a:p>
+            <a:pPr marL="0" indent="0" algn="ctr">
+              <a:buNone/>
+            </a:pPr>
+            <a:r>
+              <a:rPr lang="zh-TW" altLang="en-US" sz="6400" b="1" dirty="0">
                 <a:solidFill>
                   <a:srgbClr val="660033"/>
                 </a:solidFill>
-                <a:latin typeface="Microsoft JhengHei" panose="020B0604030504040204" pitchFamily="34" charset="-120"/>
-                <a:ea typeface="Microsoft JhengHei" panose="020B0604030504040204" pitchFamily="34" charset="-120"/>
+                <a:latin typeface="Microsoft JhengHei" pitchFamily="34" charset="-120"/>
+                <a:ea typeface="Microsoft JhengHei" pitchFamily="34" charset="-120"/>
               </a:rPr>
-              <a:t>在主裏得勝</a:t>
-            </a:r>
-            <a:r>
-              <a:rPr lang="en-US" altLang="zh-CN" sz="4800" b="1" dirty="0">
-                <a:solidFill>
-                  <a:srgbClr val="660033"/>
-                </a:solidFill>
-                <a:latin typeface="Microsoft JhengHei" panose="020B0604030504040204" pitchFamily="34" charset="-120"/>
-                <a:ea typeface="Microsoft JhengHei" panose="020B0604030504040204" pitchFamily="34" charset="-120"/>
-              </a:rPr>
-              <a:t>】</a:t>
-            </a:r>
-          </a:p>
-        </p:txBody>
-      </p:sp>
-      <p:sp>
-        <p:nvSpPr>
-          <p:cNvPr id="5" name="Content Placeholder 4"/>
-          <p:cNvSpPr>
-            <a:spLocks noGrp="1"/>
-          </p:cNvSpPr>
-          <p:nvPr>
-            <p:ph idx="1"/>
-          </p:nvPr>
-        </p:nvSpPr>
-        <p:spPr/>
-        <p:txBody>
-          <a:bodyPr>
-            <a:noAutofit/>
-          </a:bodyPr>
-          <a:lstStyle/>
-          <a:p>
-            <a:pPr marL="0" indent="0" algn="ctr">
-              <a:buNone/>
-            </a:pPr>
-            <a:r>
-              <a:rPr lang="zh-CN" altLang="zh-TW" sz="5400" b="1" dirty="0">
-                <a:solidFill>
-                  <a:srgbClr val="660033"/>
-                </a:solidFill>
-                <a:latin typeface="Microsoft JhengHei" panose="020B0604030504040204" pitchFamily="34" charset="-120"/>
-                <a:ea typeface="Microsoft JhengHei" panose="020B0604030504040204" pitchFamily="34" charset="-120"/>
-              </a:rPr>
-              <a:t>謹</a:t>
-            </a:r>
-            <a:r>
-              <a:rPr lang="zh-CN" altLang="zh-TW" sz="5400" b="1" dirty="0">
-                <a:solidFill>
-                  <a:srgbClr val="660033"/>
-                </a:solidFill>
-                <a:latin typeface="Microsoft JhengHei" panose="020B0604030504040204" pitchFamily="34" charset="-120"/>
-                <a:ea typeface="Microsoft JhengHei" panose="020B0604030504040204" pitchFamily="34" charset="-120"/>
-              </a:rPr>
-              <a:t>聽</a:t>
-            </a:r>
-            <a:r>
-              <a:rPr lang="zh-CN" altLang="zh-TW" sz="5400" b="1" dirty="0" smtClean="0">
-                <a:solidFill>
-                  <a:srgbClr val="660033"/>
-                </a:solidFill>
-                <a:latin typeface="Microsoft JhengHei" panose="020B0604030504040204" pitchFamily="34" charset="-120"/>
-                <a:ea typeface="Microsoft JhengHei" panose="020B0604030504040204" pitchFamily="34" charset="-120"/>
-              </a:rPr>
-              <a:t>呀</a:t>
-            </a:r>
-            <a:r>
-              <a:rPr lang="en-US" altLang="zh-CN" sz="5400" b="1" dirty="0" smtClean="0">
-                <a:solidFill>
-                  <a:srgbClr val="660033"/>
-                </a:solidFill>
-                <a:latin typeface="Microsoft JhengHei" panose="020B0604030504040204" pitchFamily="34" charset="-120"/>
-                <a:ea typeface="Microsoft JhengHei" panose="020B0604030504040204" pitchFamily="34" charset="-120"/>
-              </a:rPr>
-              <a:t>“</a:t>
-            </a:r>
-            <a:r>
-              <a:rPr lang="zh-CN" altLang="en-US" sz="5400" b="1" dirty="0">
-                <a:solidFill>
-                  <a:srgbClr val="660033"/>
-                </a:solidFill>
-                <a:latin typeface="Microsoft JhengHei" panose="020B0604030504040204" pitchFamily="34" charset="-120"/>
-                <a:ea typeface="Microsoft JhengHei" panose="020B0604030504040204" pitchFamily="34" charset="-120"/>
-              </a:rPr>
-              <a:t>我與你居住到永遠</a:t>
-            </a:r>
-            <a:r>
-              <a:rPr lang="en-US" altLang="zh-CN" sz="5400" b="1" dirty="0">
-                <a:solidFill>
-                  <a:srgbClr val="660033"/>
-                </a:solidFill>
-                <a:latin typeface="Microsoft JhengHei" panose="020B0604030504040204" pitchFamily="34" charset="-120"/>
-                <a:ea typeface="Microsoft JhengHei" panose="020B0604030504040204" pitchFamily="34" charset="-120"/>
-              </a:rPr>
-              <a:t>”</a:t>
-            </a:r>
-          </a:p>
-          <a:p>
-            <a:pPr marL="0" indent="0" algn="ctr">
-              <a:buNone/>
-            </a:pPr>
-            <a:r>
-              <a:rPr lang="zh-CN" altLang="en-US" sz="5400" b="1" dirty="0">
-                <a:solidFill>
-                  <a:srgbClr val="660033"/>
-                </a:solidFill>
-                <a:latin typeface="Microsoft JhengHei" panose="020B0604030504040204" pitchFamily="34" charset="-120"/>
-                <a:ea typeface="Microsoft JhengHei" panose="020B0604030504040204" pitchFamily="34" charset="-120"/>
-              </a:rPr>
-              <a:t>靠主必不驚打仗風</a:t>
-            </a:r>
-            <a:r>
-              <a:rPr lang="zh-CN" altLang="en-US" sz="5400" b="1" dirty="0">
-                <a:solidFill>
-                  <a:srgbClr val="660033"/>
-                </a:solidFill>
-                <a:latin typeface="Microsoft JhengHei" panose="020B0604030504040204" pitchFamily="34" charset="-120"/>
-                <a:ea typeface="Microsoft JhengHei" panose="020B0604030504040204" pitchFamily="34" charset="-120"/>
-              </a:rPr>
-              <a:t>聲  </a:t>
-            </a:r>
-            <a:endParaRPr lang="en-US" altLang="zh-CN" sz="5400" b="1" dirty="0">
-              <a:solidFill>
-                <a:srgbClr val="660033"/>
-              </a:solidFill>
-              <a:latin typeface="Microsoft JhengHei" panose="020B0604030504040204" pitchFamily="34" charset="-120"/>
-              <a:ea typeface="Microsoft JhengHei" panose="020B0604030504040204" pitchFamily="34" charset="-120"/>
-            </a:endParaRPr>
-          </a:p>
-          <a:p>
-            <a:pPr marL="0" indent="0" algn="ctr">
-              <a:buNone/>
-            </a:pPr>
-            <a:r>
-              <a:rPr lang="zh-CN" altLang="en-US" sz="5400" b="1" dirty="0">
-                <a:solidFill>
-                  <a:srgbClr val="660033"/>
-                </a:solidFill>
-                <a:latin typeface="Microsoft JhengHei" panose="020B0604030504040204" pitchFamily="34" charset="-120"/>
-                <a:ea typeface="Microsoft JhengHei" panose="020B0604030504040204" pitchFamily="34" charset="-120"/>
-              </a:rPr>
-              <a:t>進</a:t>
-            </a:r>
-            <a:r>
-              <a:rPr lang="zh-CN" altLang="en-US" sz="5400" b="1" dirty="0">
-                <a:solidFill>
-                  <a:srgbClr val="660033"/>
-                </a:solidFill>
-                <a:latin typeface="Microsoft JhengHei" panose="020B0604030504040204" pitchFamily="34" charset="-120"/>
-                <a:ea typeface="Microsoft JhengHei" panose="020B0604030504040204" pitchFamily="34" charset="-120"/>
-              </a:rPr>
-              <a:t>前打勝仗</a:t>
-            </a:r>
-          </a:p>
-          <a:p>
-            <a:pPr marL="0" indent="0" algn="ctr">
-              <a:buNone/>
-            </a:pPr>
-            <a:r>
-              <a:rPr lang="zh-CN" altLang="en-US" sz="5400" b="1" dirty="0">
-                <a:solidFill>
-                  <a:srgbClr val="660033"/>
-                </a:solidFill>
-                <a:latin typeface="Microsoft JhengHei" panose="020B0604030504040204" pitchFamily="34" charset="-120"/>
-                <a:ea typeface="Microsoft JhengHei" panose="020B0604030504040204" pitchFamily="34" charset="-120"/>
-              </a:rPr>
-              <a:t>同主快樂一直到永</a:t>
-            </a:r>
-            <a:r>
-              <a:rPr lang="zh-CN" altLang="en-US" sz="5400" b="1" dirty="0">
-                <a:solidFill>
-                  <a:srgbClr val="660033"/>
-                </a:solidFill>
-                <a:latin typeface="Microsoft JhengHei" panose="020B0604030504040204" pitchFamily="34" charset="-120"/>
-                <a:ea typeface="Microsoft JhengHei" panose="020B0604030504040204" pitchFamily="34" charset="-120"/>
-              </a:rPr>
-              <a:t>遠</a:t>
-            </a:r>
-            <a:endParaRPr lang="zh-CN" altLang="en-US" sz="5400" b="1" dirty="0">
-              <a:solidFill>
-                <a:srgbClr val="660033"/>
-              </a:solidFill>
-              <a:latin typeface="Microsoft JhengHei" panose="020B0604030504040204" pitchFamily="34" charset="-120"/>
-              <a:ea typeface="Microsoft JhengHei" panose="020B0604030504040204" pitchFamily="34" charset="-120"/>
-            </a:endParaRPr>
+              <a:t>靠主必不驚打仗風聲 </a:t>
+            </a:r>
           </a:p>
         </p:txBody>
       </p:sp>
     </p:spTree>
     <p:extLst>
       <p:ext uri="{BB962C8B-B14F-4D97-AF65-F5344CB8AC3E}">
-        <p14:creationId xmlns:p14="http://schemas.microsoft.com/office/powerpoint/2010/main" val="1836214008"/>
+        <p14:creationId xmlns:p14="http://schemas.microsoft.com/office/powerpoint/2010/main" val="4107114124"/>
       </p:ext>
     </p:extLst>
   </p:cSld>
@@ -5182,7 +7360,13 @@
   <p:cSld>
     <p:spTree>
       <p:nvGrpSpPr>
-        <p:cNvPr id="1" name=""/>
+        <p:cNvPr id="1" name="">
+          <a:extLst>
+            <a:ext uri="{FF2B5EF4-FFF2-40B4-BE49-F238E27FC236}">
+              <a16:creationId xmlns:a16="http://schemas.microsoft.com/office/drawing/2014/main" id="{8E844CAD-75EE-2FED-1539-122DF2AF1C00}"/>
+            </a:ext>
+          </a:extLst>
+        </p:cNvPr>
         <p:cNvGrpSpPr/>
         <p:nvPr/>
       </p:nvGrpSpPr>
@@ -5196,237 +7380,67 @@
       </p:grpSpPr>
       <p:sp>
         <p:nvSpPr>
-          <p:cNvPr id="4" name="Title 3"/>
-          <p:cNvSpPr>
-            <a:spLocks noGrp="1"/>
-          </p:cNvSpPr>
-          <p:nvPr>
-            <p:ph type="title"/>
-          </p:nvPr>
-        </p:nvSpPr>
-        <p:spPr/>
-        <p:txBody>
-          <a:bodyPr>
+          <p:cNvPr id="5" name="內容版面配置區 4">
+            <a:extLst>
+              <a:ext uri="{FF2B5EF4-FFF2-40B4-BE49-F238E27FC236}">
+                <a16:creationId xmlns:a16="http://schemas.microsoft.com/office/drawing/2014/main" id="{183E4615-6EDF-CCB3-EBF7-AB0DBC1FB640}"/>
+              </a:ext>
+            </a:extLst>
+          </p:cNvPr>
+          <p:cNvSpPr>
+            <a:spLocks noGrp="1"/>
+          </p:cNvSpPr>
+          <p:nvPr>
+            <p:ph idx="1"/>
+          </p:nvPr>
+        </p:nvSpPr>
+        <p:spPr>
+          <a:xfrm>
+            <a:off x="0" y="2084851"/>
+            <a:ext cx="12192000" cy="2404863"/>
+          </a:xfrm>
+        </p:spPr>
+        <p:txBody>
+          <a:bodyPr anchor="ctr">
             <a:normAutofit/>
           </a:bodyPr>
           <a:lstStyle/>
           <a:p>
-            <a:r>
-              <a:rPr lang="en-US" altLang="zh-CN" sz="4800" b="1" dirty="0">
+            <a:pPr marL="0" indent="0" algn="ctr">
+              <a:buNone/>
+            </a:pPr>
+            <a:r>
+              <a:rPr lang="zh-TW" altLang="en-US" sz="6400" b="1" dirty="0">
                 <a:solidFill>
                   <a:srgbClr val="660033"/>
                 </a:solidFill>
-                <a:latin typeface="Microsoft JhengHei" panose="020B0604030504040204" pitchFamily="34" charset="-120"/>
-                <a:ea typeface="Microsoft JhengHei" panose="020B0604030504040204" pitchFamily="34" charset="-120"/>
+                <a:latin typeface="Microsoft JhengHei" pitchFamily="34" charset="-120"/>
+                <a:ea typeface="Microsoft JhengHei" pitchFamily="34" charset="-120"/>
               </a:rPr>
-              <a:t>【</a:t>
-            </a:r>
-            <a:r>
-              <a:rPr lang="zh-CN" altLang="en-US" sz="4800" b="1" dirty="0">
+              <a:t>進前打勝仗</a:t>
+            </a:r>
+          </a:p>
+          <a:p>
+            <a:pPr marL="0" indent="0" algn="ctr">
+              <a:buNone/>
+            </a:pPr>
+            <a:r>
+              <a:rPr lang="zh-TW" altLang="en-US" sz="6400" b="1" dirty="0">
                 <a:solidFill>
                   <a:srgbClr val="660033"/>
                 </a:solidFill>
-                <a:latin typeface="Microsoft JhengHei" panose="020B0604030504040204" pitchFamily="34" charset="-120"/>
-                <a:ea typeface="Microsoft JhengHei" panose="020B0604030504040204" pitchFamily="34" charset="-120"/>
+                <a:latin typeface="Microsoft JhengHei" pitchFamily="34" charset="-120"/>
+                <a:ea typeface="Microsoft JhengHei" pitchFamily="34" charset="-120"/>
               </a:rPr>
-              <a:t>在主裏得勝</a:t>
-            </a:r>
-            <a:r>
-              <a:rPr lang="en-US" altLang="zh-CN" sz="4800" b="1" dirty="0">
-                <a:solidFill>
-                  <a:srgbClr val="660033"/>
-                </a:solidFill>
-                <a:latin typeface="Microsoft JhengHei" panose="020B0604030504040204" pitchFamily="34" charset="-120"/>
-                <a:ea typeface="Microsoft JhengHei" panose="020B0604030504040204" pitchFamily="34" charset="-120"/>
-              </a:rPr>
-              <a:t>】</a:t>
-            </a:r>
-          </a:p>
-        </p:txBody>
-      </p:sp>
-      <p:sp>
-        <p:nvSpPr>
-          <p:cNvPr id="5" name="Content Placeholder 4"/>
-          <p:cNvSpPr>
-            <a:spLocks noGrp="1"/>
-          </p:cNvSpPr>
-          <p:nvPr>
-            <p:ph idx="1"/>
-          </p:nvPr>
-        </p:nvSpPr>
-        <p:spPr/>
-        <p:txBody>
-          <a:bodyPr>
-            <a:noAutofit/>
-          </a:bodyPr>
-          <a:lstStyle/>
-          <a:p>
-            <a:pPr marL="0" indent="0" algn="ctr">
-              <a:buNone/>
-            </a:pPr>
-            <a:r>
-              <a:rPr lang="zh-CN" altLang="zh-TW" sz="5400" b="1" dirty="0">
-                <a:solidFill>
-                  <a:srgbClr val="660033"/>
-                </a:solidFill>
-                <a:latin typeface="Microsoft JhengHei" panose="020B0604030504040204" pitchFamily="34" charset="-120"/>
-                <a:ea typeface="Microsoft JhengHei" panose="020B0604030504040204" pitchFamily="34" charset="-120"/>
-              </a:rPr>
-              <a:t>主權能足靠投主必為我報仇</a:t>
-            </a:r>
-          </a:p>
-          <a:p>
-            <a:pPr marL="0" indent="0" algn="ctr">
-              <a:buNone/>
-            </a:pPr>
-            <a:r>
-              <a:rPr lang="zh-CN" altLang="zh-TW" sz="5400" b="1" dirty="0">
-                <a:solidFill>
-                  <a:srgbClr val="660033"/>
-                </a:solidFill>
-                <a:latin typeface="Microsoft JhengHei" panose="020B0604030504040204" pitchFamily="34" charset="-120"/>
-                <a:ea typeface="Microsoft JhengHei" panose="020B0604030504040204" pitchFamily="34" charset="-120"/>
-              </a:rPr>
-              <a:t>因主應許</a:t>
-            </a:r>
-            <a:r>
-              <a:rPr lang="en-US" altLang="zh-CN" sz="5400" b="1" dirty="0">
-                <a:solidFill>
-                  <a:srgbClr val="660033"/>
-                </a:solidFill>
-                <a:latin typeface="Microsoft JhengHei" panose="020B0604030504040204" pitchFamily="34" charset="-120"/>
-                <a:ea typeface="Microsoft JhengHei" panose="020B0604030504040204" pitchFamily="34" charset="-120"/>
-              </a:rPr>
-              <a:t>“</a:t>
-            </a:r>
-            <a:r>
-              <a:rPr lang="zh-CN" altLang="en-US" sz="5400" b="1" dirty="0">
-                <a:solidFill>
-                  <a:srgbClr val="660033"/>
-                </a:solidFill>
-                <a:latin typeface="Microsoft JhengHei" panose="020B0604030504040204" pitchFamily="34" charset="-120"/>
-                <a:ea typeface="Microsoft JhengHei" panose="020B0604030504040204" pitchFamily="34" charset="-120"/>
-              </a:rPr>
-              <a:t>我永不離開你</a:t>
-            </a:r>
-            <a:r>
-              <a:rPr lang="en-US" altLang="zh-CN" sz="5400" b="1" dirty="0">
-                <a:solidFill>
-                  <a:srgbClr val="660033"/>
-                </a:solidFill>
-                <a:latin typeface="Microsoft JhengHei" panose="020B0604030504040204" pitchFamily="34" charset="-120"/>
-                <a:ea typeface="Microsoft JhengHei" panose="020B0604030504040204" pitchFamily="34" charset="-120"/>
-              </a:rPr>
-              <a:t>”</a:t>
-            </a:r>
-          </a:p>
-          <a:p>
-            <a:pPr marL="0" indent="0" algn="ctr">
-              <a:buNone/>
-            </a:pPr>
-            <a:r>
-              <a:rPr lang="zh-CN" altLang="en-US" sz="5400" b="1" dirty="0">
-                <a:solidFill>
-                  <a:srgbClr val="660033"/>
-                </a:solidFill>
-                <a:latin typeface="Microsoft JhengHei" panose="020B0604030504040204" pitchFamily="34" charset="-120"/>
-                <a:ea typeface="Microsoft JhengHei" panose="020B0604030504040204" pitchFamily="34" charset="-120"/>
-              </a:rPr>
-              <a:t>主要賜予大能</a:t>
-            </a:r>
-            <a:r>
-              <a:rPr lang="zh-CN" altLang="en-US" sz="5400" b="1" dirty="0">
-                <a:solidFill>
-                  <a:srgbClr val="660033"/>
-                </a:solidFill>
-                <a:latin typeface="Microsoft JhengHei" panose="020B0604030504040204" pitchFamily="34" charset="-120"/>
-                <a:ea typeface="Microsoft JhengHei" panose="020B0604030504040204" pitchFamily="34" charset="-120"/>
-              </a:rPr>
-              <a:t>力  魔</a:t>
-            </a:r>
-            <a:r>
-              <a:rPr lang="zh-CN" altLang="en-US" sz="5400" b="1" dirty="0">
-                <a:solidFill>
-                  <a:srgbClr val="660033"/>
-                </a:solidFill>
-                <a:latin typeface="Microsoft JhengHei" panose="020B0604030504040204" pitchFamily="34" charset="-120"/>
-                <a:ea typeface="Microsoft JhengHei" panose="020B0604030504040204" pitchFamily="34" charset="-120"/>
-              </a:rPr>
-              <a:t>軍消散且敗逃</a:t>
-            </a:r>
-          </a:p>
-          <a:p>
-            <a:pPr marL="0" indent="0" algn="ctr">
-              <a:buNone/>
-            </a:pPr>
-            <a:r>
-              <a:rPr lang="zh-CN" altLang="en-US" sz="5400" b="1" dirty="0">
-                <a:solidFill>
-                  <a:srgbClr val="660033"/>
-                </a:solidFill>
-                <a:latin typeface="Microsoft JhengHei" panose="020B0604030504040204" pitchFamily="34" charset="-120"/>
-                <a:ea typeface="Microsoft JhengHei" panose="020B0604030504040204" pitchFamily="34" charset="-120"/>
-              </a:rPr>
-              <a:t>從此安然無慮靠主得勝有餘</a:t>
-            </a:r>
-          </a:p>
-        </p:txBody>
-      </p:sp>
-      <p:sp>
-        <p:nvSpPr>
-          <p:cNvPr id="6" name="Text Box 1"/>
-          <p:cNvSpPr txBox="1"/>
-          <p:nvPr/>
-        </p:nvSpPr>
-        <p:spPr>
-          <a:xfrm>
-            <a:off x="407368" y="1700808"/>
-            <a:ext cx="1055440" cy="923330"/>
-          </a:xfrm>
-          <a:prstGeom prst="rect">
-            <a:avLst/>
-          </a:prstGeom>
-          <a:noFill/>
-          <a:ln w="9525">
-            <a:noFill/>
-            <a:miter lim="800000"/>
-          </a:ln>
-        </p:spPr>
-        <p:txBody>
-          <a:bodyPr wrap="square">
-            <a:spAutoFit/>
-          </a:bodyPr>
-          <a:lstStyle/>
-          <a:p>
-            <a:pPr algn="ctr"/>
-            <a:r>
-              <a:rPr lang="en-US" sz="5400" b="1" dirty="0">
-                <a:solidFill>
-                  <a:srgbClr val="660033"/>
-                </a:solidFill>
-              </a:rPr>
-              <a:t>3</a:t>
-            </a:r>
-            <a:r>
-              <a:rPr lang="en-US" sz="5400" b="1" dirty="0" smtClean="0">
-                <a:solidFill>
-                  <a:srgbClr val="660033"/>
-                </a:solidFill>
-              </a:rPr>
-              <a:t>.</a:t>
-            </a:r>
-            <a:endParaRPr lang="en-US" sz="5400" b="1" dirty="0">
-              <a:solidFill>
-                <a:srgbClr val="660033"/>
-              </a:solidFill>
-            </a:endParaRPr>
+              <a:t>同主快樂一直到永遠</a:t>
+            </a:r>
           </a:p>
         </p:txBody>
       </p:sp>
     </p:spTree>
     <p:extLst>
       <p:ext uri="{BB962C8B-B14F-4D97-AF65-F5344CB8AC3E}">
-        <p14:creationId xmlns:p14="http://schemas.microsoft.com/office/powerpoint/2010/main" val="3902127576"/>
+        <p14:creationId xmlns:p14="http://schemas.microsoft.com/office/powerpoint/2010/main" val="758909500"/>
       </p:ext>
     </p:extLst>
   </p:cSld>
@@ -5441,7 +7455,13 @@
   <p:cSld>
     <p:spTree>
       <p:nvGrpSpPr>
-        <p:cNvPr id="1" name=""/>
+        <p:cNvPr id="1" name="">
+          <a:extLst>
+            <a:ext uri="{FF2B5EF4-FFF2-40B4-BE49-F238E27FC236}">
+              <a16:creationId xmlns:a16="http://schemas.microsoft.com/office/drawing/2014/main" id="{BCA6A605-6C0A-5B11-A88F-5A2E0E628496}"/>
+            </a:ext>
+          </a:extLst>
+        </p:cNvPr>
         <p:cNvGrpSpPr/>
         <p:nvPr/>
       </p:nvGrpSpPr>
@@ -5455,200 +7475,106 @@
       </p:grpSpPr>
       <p:sp>
         <p:nvSpPr>
-          <p:cNvPr id="4" name="Title 3"/>
-          <p:cNvSpPr>
-            <a:spLocks noGrp="1"/>
-          </p:cNvSpPr>
-          <p:nvPr>
-            <p:ph type="title"/>
-          </p:nvPr>
-        </p:nvSpPr>
-        <p:spPr/>
-        <p:txBody>
-          <a:bodyPr>
+          <p:cNvPr id="5" name="內容版面配置區 4">
+            <a:extLst>
+              <a:ext uri="{FF2B5EF4-FFF2-40B4-BE49-F238E27FC236}">
+                <a16:creationId xmlns:a16="http://schemas.microsoft.com/office/drawing/2014/main" id="{48590679-CF7B-4E6B-408E-22562DA0ED15}"/>
+              </a:ext>
+            </a:extLst>
+          </p:cNvPr>
+          <p:cNvSpPr>
+            <a:spLocks noGrp="1"/>
+          </p:cNvSpPr>
+          <p:nvPr>
+            <p:ph idx="1"/>
+          </p:nvPr>
+        </p:nvSpPr>
+        <p:spPr>
+          <a:xfrm>
+            <a:off x="0" y="2084851"/>
+            <a:ext cx="12192000" cy="2404863"/>
+          </a:xfrm>
+        </p:spPr>
+        <p:txBody>
+          <a:bodyPr anchor="ctr">
             <a:normAutofit/>
           </a:bodyPr>
           <a:lstStyle/>
           <a:p>
-            <a:r>
-              <a:rPr lang="en-US" altLang="zh-CN" sz="4800" b="1" dirty="0">
+            <a:pPr marL="0" indent="0" algn="ctr">
+              <a:buNone/>
+            </a:pPr>
+            <a:r>
+              <a:rPr lang="zh-TW" altLang="en-US" sz="6400" b="1" dirty="0">
                 <a:solidFill>
                   <a:srgbClr val="660033"/>
                 </a:solidFill>
-                <a:latin typeface="Microsoft JhengHei" panose="020B0604030504040204" pitchFamily="34" charset="-120"/>
-                <a:ea typeface="Microsoft JhengHei" panose="020B0604030504040204" pitchFamily="34" charset="-120"/>
+                <a:latin typeface="Microsoft JhengHei" pitchFamily="34" charset="-120"/>
+                <a:ea typeface="Microsoft JhengHei" pitchFamily="34" charset="-120"/>
               </a:rPr>
-              <a:t>【</a:t>
-            </a:r>
-            <a:r>
-              <a:rPr lang="zh-CN" altLang="en-US" sz="4800" b="1" dirty="0">
+              <a:t>有時勇氣挫磨將被仇敵勝過</a:t>
+            </a:r>
+          </a:p>
+          <a:p>
+            <a:pPr marL="0" indent="0" algn="ctr">
+              <a:buNone/>
+            </a:pPr>
+            <a:r>
+              <a:rPr lang="zh-TW" altLang="en-US" sz="6400" b="1" dirty="0">
                 <a:solidFill>
                   <a:srgbClr val="660033"/>
                 </a:solidFill>
-                <a:latin typeface="Microsoft JhengHei" panose="020B0604030504040204" pitchFamily="34" charset="-120"/>
-                <a:ea typeface="Microsoft JhengHei" panose="020B0604030504040204" pitchFamily="34" charset="-120"/>
+                <a:latin typeface="Microsoft JhengHei" pitchFamily="34" charset="-120"/>
+                <a:ea typeface="Microsoft JhengHei" pitchFamily="34" charset="-120"/>
               </a:rPr>
-              <a:t>在主裏得勝</a:t>
-            </a:r>
-            <a:r>
-              <a:rPr lang="en-US" altLang="zh-CN" sz="4800" b="1" dirty="0">
+              <a:t>信靠神莫須怕亦莫須慮</a:t>
+            </a:r>
+          </a:p>
+        </p:txBody>
+      </p:sp>
+      <p:sp>
+        <p:nvSpPr>
+          <p:cNvPr id="3" name="TextBox 2">
+            <a:extLst>
+              <a:ext uri="{FF2B5EF4-FFF2-40B4-BE49-F238E27FC236}">
+                <a16:creationId xmlns:a16="http://schemas.microsoft.com/office/drawing/2014/main" id="{03F39BC5-4EF3-4535-9E71-E53ABE8DA626}"/>
+              </a:ext>
+            </a:extLst>
+          </p:cNvPr>
+          <p:cNvSpPr txBox="1"/>
+          <p:nvPr/>
+        </p:nvSpPr>
+        <p:spPr>
+          <a:xfrm>
+            <a:off x="0" y="5061182"/>
+            <a:ext cx="12192000" cy="584775"/>
+          </a:xfrm>
+          <a:prstGeom prst="rect">
+            <a:avLst/>
+          </a:prstGeom>
+          <a:noFill/>
+        </p:spPr>
+        <p:txBody>
+          <a:bodyPr wrap="square" rtlCol="0">
+            <a:spAutoFit/>
+          </a:bodyPr>
+          <a:lstStyle/>
+          <a:p>
+            <a:pPr algn="ctr"/>
+            <a:r>
+              <a:rPr lang="en-US" sz="3200" b="1" dirty="0">
                 <a:solidFill>
                   <a:srgbClr val="660033"/>
                 </a:solidFill>
-                <a:latin typeface="Microsoft JhengHei" panose="020B0604030504040204" pitchFamily="34" charset="-120"/>
-                <a:ea typeface="Microsoft JhengHei" panose="020B0604030504040204" pitchFamily="34" charset="-120"/>
+                <a:latin typeface="+mj-lt"/>
               </a:rPr>
-              <a:t>】</a:t>
-            </a:r>
-          </a:p>
-        </p:txBody>
-      </p:sp>
-      <p:sp>
-        <p:nvSpPr>
-          <p:cNvPr id="5" name="Content Placeholder 4"/>
-          <p:cNvSpPr>
-            <a:spLocks noGrp="1"/>
-          </p:cNvSpPr>
-          <p:nvPr>
-            <p:ph idx="1"/>
-          </p:nvPr>
-        </p:nvSpPr>
-        <p:spPr/>
-        <p:txBody>
-          <a:bodyPr>
-            <a:noAutofit/>
-          </a:bodyPr>
-          <a:lstStyle/>
-          <a:p>
-            <a:pPr marL="0" indent="0" algn="ctr">
-              <a:buNone/>
-            </a:pPr>
-            <a:r>
-              <a:rPr lang="zh-CN" altLang="zh-TW" sz="5400" b="1" dirty="0">
-                <a:solidFill>
-                  <a:srgbClr val="660033"/>
-                </a:solidFill>
-                <a:latin typeface="Microsoft JhengHei" panose="020B0604030504040204" pitchFamily="34" charset="-120"/>
-                <a:ea typeface="Microsoft JhengHei" panose="020B0604030504040204" pitchFamily="34" charset="-120"/>
-              </a:rPr>
-              <a:t>在耶穌裏得</a:t>
-            </a:r>
-            <a:r>
-              <a:rPr lang="zh-CN" altLang="zh-TW" sz="5400" b="1" dirty="0">
-                <a:solidFill>
-                  <a:srgbClr val="660033"/>
-                </a:solidFill>
-                <a:latin typeface="Microsoft JhengHei" panose="020B0604030504040204" pitchFamily="34" charset="-120"/>
-                <a:ea typeface="Microsoft JhengHei" panose="020B0604030504040204" pitchFamily="34" charset="-120"/>
-              </a:rPr>
-              <a:t>勝</a:t>
-            </a:r>
-            <a:r>
-              <a:rPr lang="en-US" altLang="zh-CN" sz="5400" b="1" dirty="0">
-                <a:solidFill>
-                  <a:srgbClr val="660033"/>
-                </a:solidFill>
-                <a:latin typeface="Microsoft JhengHei" panose="020B0604030504040204" pitchFamily="34" charset="-120"/>
-                <a:ea typeface="Microsoft JhengHei" panose="020B0604030504040204" pitchFamily="34" charset="-120"/>
-              </a:rPr>
-              <a:t>  </a:t>
-            </a:r>
-          </a:p>
-          <a:p>
-            <a:pPr marL="0" indent="0" algn="ctr">
-              <a:buNone/>
-            </a:pPr>
-            <a:r>
-              <a:rPr lang="zh-CN" altLang="zh-TW" sz="5400" b="1" dirty="0">
-                <a:solidFill>
-                  <a:srgbClr val="660033"/>
-                </a:solidFill>
-                <a:latin typeface="Microsoft JhengHei" panose="020B0604030504040204" pitchFamily="34" charset="-120"/>
-                <a:ea typeface="Microsoft JhengHei" panose="020B0604030504040204" pitchFamily="34" charset="-120"/>
-              </a:rPr>
-              <a:t>只</a:t>
-            </a:r>
-            <a:r>
-              <a:rPr lang="zh-CN" altLang="zh-TW" sz="5400" b="1" dirty="0">
-                <a:solidFill>
-                  <a:srgbClr val="660033"/>
-                </a:solidFill>
-                <a:latin typeface="Microsoft JhengHei" panose="020B0604030504040204" pitchFamily="34" charset="-120"/>
-                <a:ea typeface="Microsoft JhengHei" panose="020B0604030504040204" pitchFamily="34" charset="-120"/>
-              </a:rPr>
-              <a:t>要在耶穌裏纔得勝</a:t>
-            </a:r>
-          </a:p>
-          <a:p>
-            <a:pPr marL="0" indent="0" algn="ctr">
-              <a:buNone/>
-            </a:pPr>
-            <a:r>
-              <a:rPr lang="zh-CN" altLang="zh-TW" sz="5400" b="1" dirty="0">
-                <a:solidFill>
-                  <a:srgbClr val="660033"/>
-                </a:solidFill>
-                <a:latin typeface="Microsoft JhengHei" panose="020B0604030504040204" pitchFamily="34" charset="-120"/>
-                <a:ea typeface="Microsoft JhengHei" panose="020B0604030504040204" pitchFamily="34" charset="-120"/>
-              </a:rPr>
-              <a:t>上陣與敵交戰總不要驚</a:t>
-            </a:r>
-          </a:p>
-          <a:p>
-            <a:pPr marL="0" indent="0" algn="ctr">
-              <a:buNone/>
-            </a:pPr>
-            <a:r>
-              <a:rPr lang="zh-CN" altLang="zh-TW" sz="5400" b="1" dirty="0">
-                <a:solidFill>
-                  <a:srgbClr val="660033"/>
-                </a:solidFill>
-                <a:latin typeface="Microsoft JhengHei" panose="020B0604030504040204" pitchFamily="34" charset="-120"/>
-                <a:ea typeface="Microsoft JhengHei" panose="020B0604030504040204" pitchFamily="34" charset="-120"/>
-                <a:sym typeface="+mn-ea"/>
-              </a:rPr>
-              <a:t>因主在前</a:t>
-            </a:r>
-            <a:r>
-              <a:rPr lang="zh-CN" altLang="zh-TW" sz="5400" b="1" dirty="0">
-                <a:solidFill>
-                  <a:srgbClr val="660033"/>
-                </a:solidFill>
-                <a:latin typeface="Microsoft JhengHei" panose="020B0604030504040204" pitchFamily="34" charset="-120"/>
-                <a:ea typeface="Microsoft JhengHei" panose="020B0604030504040204" pitchFamily="34" charset="-120"/>
-                <a:sym typeface="+mn-ea"/>
-              </a:rPr>
-              <a:t>領此</a:t>
-            </a:r>
-            <a:r>
-              <a:rPr lang="zh-CN" altLang="zh-TW" sz="5400" b="1" dirty="0">
-                <a:solidFill>
-                  <a:srgbClr val="660033"/>
-                </a:solidFill>
-                <a:latin typeface="Microsoft JhengHei" panose="020B0604030504040204" pitchFamily="34" charset="-120"/>
-                <a:ea typeface="Microsoft JhengHei" panose="020B0604030504040204" pitchFamily="34" charset="-120"/>
-                <a:sym typeface="+mn-ea"/>
-              </a:rPr>
-              <a:t>路最顯</a:t>
-            </a:r>
-            <a:r>
-              <a:rPr lang="zh-CN" altLang="zh-TW" sz="5400" b="1" dirty="0">
-                <a:solidFill>
-                  <a:srgbClr val="660033"/>
-                </a:solidFill>
-                <a:latin typeface="Microsoft JhengHei" panose="020B0604030504040204" pitchFamily="34" charset="-120"/>
-                <a:ea typeface="Microsoft JhengHei" panose="020B0604030504040204" pitchFamily="34" charset="-120"/>
-                <a:sym typeface="+mn-ea"/>
-              </a:rPr>
-              <a:t>明</a:t>
-            </a:r>
-            <a:endParaRPr lang="en-US" altLang="zh-CN" sz="5400" b="1" dirty="0">
+              <a:t>( 2 / 3 )</a:t>
+            </a:r>
+            <a:endParaRPr lang="vi-VN" sz="3200" b="1" dirty="0">
               <a:solidFill>
                 <a:srgbClr val="660033"/>
               </a:solidFill>
-              <a:latin typeface="Microsoft JhengHei" panose="020B0604030504040204" pitchFamily="34" charset="-120"/>
-              <a:ea typeface="Microsoft JhengHei" panose="020B0604030504040204" pitchFamily="34" charset="-120"/>
-              <a:sym typeface="+mn-ea"/>
+              <a:latin typeface="+mj-lt"/>
             </a:endParaRPr>
           </a:p>
         </p:txBody>
@@ -5656,7 +7582,7 @@
     </p:spTree>
     <p:extLst>
       <p:ext uri="{BB962C8B-B14F-4D97-AF65-F5344CB8AC3E}">
-        <p14:creationId xmlns:p14="http://schemas.microsoft.com/office/powerpoint/2010/main" val="165974324"/>
+        <p14:creationId xmlns:p14="http://schemas.microsoft.com/office/powerpoint/2010/main" val="3680558687"/>
       </p:ext>
     </p:extLst>
   </p:cSld>
@@ -5671,7 +7597,13 @@
   <p:cSld>
     <p:spTree>
       <p:nvGrpSpPr>
-        <p:cNvPr id="1" name=""/>
+        <p:cNvPr id="1" name="">
+          <a:extLst>
+            <a:ext uri="{FF2B5EF4-FFF2-40B4-BE49-F238E27FC236}">
+              <a16:creationId xmlns:a16="http://schemas.microsoft.com/office/drawing/2014/main" id="{1948303A-49D7-478B-92F3-8C60EE82F291}"/>
+            </a:ext>
+          </a:extLst>
+        </p:cNvPr>
         <p:cNvGrpSpPr/>
         <p:nvPr/>
       </p:nvGrpSpPr>
@@ -5685,222 +7617,106 @@
       </p:grpSpPr>
       <p:sp>
         <p:nvSpPr>
-          <p:cNvPr id="4" name="Title 3"/>
-          <p:cNvSpPr>
-            <a:spLocks noGrp="1"/>
-          </p:cNvSpPr>
-          <p:nvPr>
-            <p:ph type="title"/>
-          </p:nvPr>
-        </p:nvSpPr>
-        <p:spPr/>
-        <p:txBody>
-          <a:bodyPr>
+          <p:cNvPr id="5" name="內容版面配置區 4">
+            <a:extLst>
+              <a:ext uri="{FF2B5EF4-FFF2-40B4-BE49-F238E27FC236}">
+                <a16:creationId xmlns:a16="http://schemas.microsoft.com/office/drawing/2014/main" id="{C8B39139-D5F9-8F4E-AFA5-05F1C201077C}"/>
+              </a:ext>
+            </a:extLst>
+          </p:cNvPr>
+          <p:cNvSpPr>
+            <a:spLocks noGrp="1"/>
+          </p:cNvSpPr>
+          <p:nvPr>
+            <p:ph idx="1"/>
+          </p:nvPr>
+        </p:nvSpPr>
+        <p:spPr>
+          <a:xfrm>
+            <a:off x="0" y="2084851"/>
+            <a:ext cx="12192000" cy="2404863"/>
+          </a:xfrm>
+        </p:spPr>
+        <p:txBody>
+          <a:bodyPr anchor="ctr">
             <a:normAutofit/>
           </a:bodyPr>
           <a:lstStyle/>
           <a:p>
-            <a:r>
-              <a:rPr lang="en-US" altLang="zh-CN" sz="4800" b="1" dirty="0">
+            <a:pPr marL="0" indent="0" algn="ctr">
+              <a:buNone/>
+            </a:pPr>
+            <a:r>
+              <a:rPr lang="zh-TW" altLang="en-US" sz="6400" b="1" dirty="0">
                 <a:solidFill>
                   <a:srgbClr val="660033"/>
                 </a:solidFill>
-                <a:latin typeface="Microsoft JhengHei" panose="020B0604030504040204" pitchFamily="34" charset="-120"/>
-                <a:ea typeface="Microsoft JhengHei" panose="020B0604030504040204" pitchFamily="34" charset="-120"/>
+                <a:latin typeface="Microsoft JhengHei" pitchFamily="34" charset="-120"/>
+                <a:ea typeface="Microsoft JhengHei" pitchFamily="34" charset="-120"/>
               </a:rPr>
-              <a:t>【</a:t>
-            </a:r>
-            <a:r>
-              <a:rPr lang="zh-CN" altLang="en-US" sz="4800" b="1" dirty="0">
+              <a:t>謹聽救主呼喚聲  我永不使你失落</a:t>
+            </a:r>
+          </a:p>
+          <a:p>
+            <a:pPr marL="0" indent="0" algn="ctr">
+              <a:buNone/>
+            </a:pPr>
+            <a:r>
+              <a:rPr lang="zh-TW" altLang="en-US" sz="6400" b="1" dirty="0">
                 <a:solidFill>
                   <a:srgbClr val="660033"/>
                 </a:solidFill>
-                <a:latin typeface="Microsoft JhengHei" panose="020B0604030504040204" pitchFamily="34" charset="-120"/>
-                <a:ea typeface="Microsoft JhengHei" panose="020B0604030504040204" pitchFamily="34" charset="-120"/>
+                <a:latin typeface="Microsoft JhengHei" pitchFamily="34" charset="-120"/>
+                <a:ea typeface="Microsoft JhengHei" pitchFamily="34" charset="-120"/>
               </a:rPr>
-              <a:t>在主裏得勝</a:t>
-            </a:r>
-            <a:r>
-              <a:rPr lang="en-US" altLang="zh-CN" sz="4800" b="1" dirty="0">
+              <a:t>不要怕我是你所盼望你所依</a:t>
+            </a:r>
+          </a:p>
+        </p:txBody>
+      </p:sp>
+      <p:sp>
+        <p:nvSpPr>
+          <p:cNvPr id="3" name="TextBox 2">
+            <a:extLst>
+              <a:ext uri="{FF2B5EF4-FFF2-40B4-BE49-F238E27FC236}">
+                <a16:creationId xmlns:a16="http://schemas.microsoft.com/office/drawing/2014/main" id="{C9FC3577-2867-A5BF-10FE-2FD644F44A28}"/>
+              </a:ext>
+            </a:extLst>
+          </p:cNvPr>
+          <p:cNvSpPr txBox="1"/>
+          <p:nvPr/>
+        </p:nvSpPr>
+        <p:spPr>
+          <a:xfrm>
+            <a:off x="0" y="5061182"/>
+            <a:ext cx="12192000" cy="584775"/>
+          </a:xfrm>
+          <a:prstGeom prst="rect">
+            <a:avLst/>
+          </a:prstGeom>
+          <a:noFill/>
+        </p:spPr>
+        <p:txBody>
+          <a:bodyPr wrap="square" rtlCol="0">
+            <a:spAutoFit/>
+          </a:bodyPr>
+          <a:lstStyle/>
+          <a:p>
+            <a:pPr algn="ctr"/>
+            <a:r>
+              <a:rPr lang="en-US" sz="3200" b="1" dirty="0">
                 <a:solidFill>
                   <a:srgbClr val="660033"/>
                 </a:solidFill>
-                <a:latin typeface="Microsoft JhengHei" panose="020B0604030504040204" pitchFamily="34" charset="-120"/>
-                <a:ea typeface="Microsoft JhengHei" panose="020B0604030504040204" pitchFamily="34" charset="-120"/>
+                <a:latin typeface="+mj-lt"/>
               </a:rPr>
-              <a:t>】</a:t>
-            </a:r>
-          </a:p>
-        </p:txBody>
-      </p:sp>
-      <p:sp>
-        <p:nvSpPr>
-          <p:cNvPr id="5" name="Content Placeholder 4"/>
-          <p:cNvSpPr>
-            <a:spLocks noGrp="1"/>
-          </p:cNvSpPr>
-          <p:nvPr>
-            <p:ph idx="1"/>
-          </p:nvPr>
-        </p:nvSpPr>
-        <p:spPr/>
-        <p:txBody>
-          <a:bodyPr>
-            <a:noAutofit/>
-          </a:bodyPr>
-          <a:lstStyle/>
-          <a:p>
-            <a:pPr marL="0" indent="0" algn="ctr">
-              <a:buNone/>
-            </a:pPr>
-            <a:r>
-              <a:rPr lang="zh-CN" altLang="zh-TW" sz="5400" b="1" dirty="0">
-                <a:solidFill>
-                  <a:srgbClr val="660033"/>
-                </a:solidFill>
-                <a:latin typeface="Microsoft JhengHei" panose="020B0604030504040204" pitchFamily="34" charset="-120"/>
-                <a:ea typeface="Microsoft JhengHei" panose="020B0604030504040204" pitchFamily="34" charset="-120"/>
-              </a:rPr>
-              <a:t>謹</a:t>
-            </a:r>
-            <a:r>
-              <a:rPr lang="zh-CN" altLang="zh-TW" sz="5400" b="1" dirty="0">
-                <a:solidFill>
-                  <a:srgbClr val="660033"/>
-                </a:solidFill>
-                <a:latin typeface="Microsoft JhengHei" panose="020B0604030504040204" pitchFamily="34" charset="-120"/>
-                <a:ea typeface="Microsoft JhengHei" panose="020B0604030504040204" pitchFamily="34" charset="-120"/>
-              </a:rPr>
-              <a:t>聽</a:t>
-            </a:r>
-            <a:r>
-              <a:rPr lang="zh-CN" altLang="zh-TW" sz="5400" b="1" dirty="0" smtClean="0">
-                <a:solidFill>
-                  <a:srgbClr val="660033"/>
-                </a:solidFill>
-                <a:latin typeface="Microsoft JhengHei" panose="020B0604030504040204" pitchFamily="34" charset="-120"/>
-                <a:ea typeface="Microsoft JhengHei" panose="020B0604030504040204" pitchFamily="34" charset="-120"/>
-              </a:rPr>
-              <a:t>呀</a:t>
-            </a:r>
-            <a:r>
-              <a:rPr lang="en-US" altLang="zh-CN" sz="5400" b="1" dirty="0" smtClean="0">
-                <a:solidFill>
-                  <a:srgbClr val="660033"/>
-                </a:solidFill>
-                <a:latin typeface="Microsoft JhengHei" panose="020B0604030504040204" pitchFamily="34" charset="-120"/>
-                <a:ea typeface="Microsoft JhengHei" panose="020B0604030504040204" pitchFamily="34" charset="-120"/>
-              </a:rPr>
-              <a:t>“</a:t>
-            </a:r>
-            <a:r>
-              <a:rPr lang="zh-CN" altLang="en-US" sz="5400" b="1" dirty="0">
-                <a:solidFill>
-                  <a:srgbClr val="660033"/>
-                </a:solidFill>
-                <a:latin typeface="Microsoft JhengHei" panose="020B0604030504040204" pitchFamily="34" charset="-120"/>
-                <a:ea typeface="Microsoft JhengHei" panose="020B0604030504040204" pitchFamily="34" charset="-120"/>
-              </a:rPr>
-              <a:t>我與你居住到永遠</a:t>
-            </a:r>
-            <a:r>
-              <a:rPr lang="en-US" altLang="zh-CN" sz="5400" b="1" dirty="0">
-                <a:solidFill>
-                  <a:srgbClr val="660033"/>
-                </a:solidFill>
-                <a:latin typeface="Microsoft JhengHei" panose="020B0604030504040204" pitchFamily="34" charset="-120"/>
-                <a:ea typeface="Microsoft JhengHei" panose="020B0604030504040204" pitchFamily="34" charset="-120"/>
-              </a:rPr>
-              <a:t>”</a:t>
-            </a:r>
-          </a:p>
-          <a:p>
-            <a:pPr marL="0" indent="0" algn="ctr">
-              <a:buNone/>
-            </a:pPr>
-            <a:r>
-              <a:rPr lang="zh-CN" altLang="en-US" sz="5400" b="1" dirty="0">
-                <a:solidFill>
-                  <a:srgbClr val="660033"/>
-                </a:solidFill>
-                <a:latin typeface="Microsoft JhengHei" panose="020B0604030504040204" pitchFamily="34" charset="-120"/>
-                <a:ea typeface="Microsoft JhengHei" panose="020B0604030504040204" pitchFamily="34" charset="-120"/>
-              </a:rPr>
-              <a:t>靠主必不驚打仗風</a:t>
-            </a:r>
-            <a:r>
-              <a:rPr lang="zh-CN" altLang="en-US" sz="5400" b="1" dirty="0">
-                <a:solidFill>
-                  <a:srgbClr val="660033"/>
-                </a:solidFill>
-                <a:latin typeface="Microsoft JhengHei" panose="020B0604030504040204" pitchFamily="34" charset="-120"/>
-                <a:ea typeface="Microsoft JhengHei" panose="020B0604030504040204" pitchFamily="34" charset="-120"/>
-              </a:rPr>
-              <a:t>聲  </a:t>
-            </a:r>
-            <a:endParaRPr lang="en-US" altLang="zh-CN" sz="5400" b="1" dirty="0">
+              <a:t>( 2 / 3 )</a:t>
+            </a:r>
+            <a:endParaRPr lang="vi-VN" sz="3200" b="1" dirty="0">
               <a:solidFill>
                 <a:srgbClr val="660033"/>
               </a:solidFill>
-              <a:latin typeface="Microsoft JhengHei" panose="020B0604030504040204" pitchFamily="34" charset="-120"/>
-              <a:ea typeface="Microsoft JhengHei" panose="020B0604030504040204" pitchFamily="34" charset="-120"/>
-            </a:endParaRPr>
-          </a:p>
-          <a:p>
-            <a:pPr marL="0" indent="0" algn="ctr">
-              <a:buNone/>
-            </a:pPr>
-            <a:r>
-              <a:rPr lang="zh-CN" altLang="en-US" sz="5400" b="1" dirty="0">
-                <a:solidFill>
-                  <a:srgbClr val="660033"/>
-                </a:solidFill>
-                <a:latin typeface="Microsoft JhengHei" panose="020B0604030504040204" pitchFamily="34" charset="-120"/>
-                <a:ea typeface="Microsoft JhengHei" panose="020B0604030504040204" pitchFamily="34" charset="-120"/>
-              </a:rPr>
-              <a:t>進</a:t>
-            </a:r>
-            <a:r>
-              <a:rPr lang="zh-CN" altLang="en-US" sz="5400" b="1" dirty="0">
-                <a:solidFill>
-                  <a:srgbClr val="660033"/>
-                </a:solidFill>
-                <a:latin typeface="Microsoft JhengHei" panose="020B0604030504040204" pitchFamily="34" charset="-120"/>
-                <a:ea typeface="Microsoft JhengHei" panose="020B0604030504040204" pitchFamily="34" charset="-120"/>
-              </a:rPr>
-              <a:t>前打勝仗</a:t>
-            </a:r>
-          </a:p>
-          <a:p>
-            <a:pPr marL="0" indent="0" algn="ctr">
-              <a:buNone/>
-            </a:pPr>
-            <a:r>
-              <a:rPr lang="zh-CN" altLang="en-US" sz="5400" b="1" dirty="0">
-                <a:solidFill>
-                  <a:srgbClr val="660033"/>
-                </a:solidFill>
-                <a:latin typeface="Microsoft JhengHei" panose="020B0604030504040204" pitchFamily="34" charset="-120"/>
-                <a:ea typeface="Microsoft JhengHei" panose="020B0604030504040204" pitchFamily="34" charset="-120"/>
-              </a:rPr>
-              <a:t>同主快樂一直到永</a:t>
-            </a:r>
-            <a:r>
-              <a:rPr lang="zh-CN" altLang="en-US" sz="5400" b="1" dirty="0">
-                <a:solidFill>
-                  <a:srgbClr val="660033"/>
-                </a:solidFill>
-                <a:latin typeface="Microsoft JhengHei" panose="020B0604030504040204" pitchFamily="34" charset="-120"/>
-                <a:ea typeface="Microsoft JhengHei" panose="020B0604030504040204" pitchFamily="34" charset="-120"/>
-              </a:rPr>
-              <a:t>遠</a:t>
-            </a:r>
-            <a:endParaRPr lang="zh-CN" altLang="en-US" sz="5400" b="1" dirty="0">
-              <a:solidFill>
-                <a:srgbClr val="660033"/>
-              </a:solidFill>
-              <a:latin typeface="Microsoft JhengHei" panose="020B0604030504040204" pitchFamily="34" charset="-120"/>
-              <a:ea typeface="Microsoft JhengHei" panose="020B0604030504040204" pitchFamily="34" charset="-120"/>
+              <a:latin typeface="+mj-lt"/>
             </a:endParaRPr>
           </a:p>
         </p:txBody>
@@ -5908,7 +7724,7 @@
     </p:spTree>
     <p:extLst>
       <p:ext uri="{BB962C8B-B14F-4D97-AF65-F5344CB8AC3E}">
-        <p14:creationId xmlns:p14="http://schemas.microsoft.com/office/powerpoint/2010/main" val="3238651450"/>
+        <p14:creationId xmlns:p14="http://schemas.microsoft.com/office/powerpoint/2010/main" val="2803510724"/>
       </p:ext>
     </p:extLst>
   </p:cSld>
